--- a/docs/PID_POS_Paparan_Direksi_v2.pptx
+++ b/docs/PID_POS_Paparan_Direksi_v2.pptx
@@ -114,18 +114,14 @@
   <p:extLst>
     <p:ext uri="{521415D9-36F7-43E2-AB2F-B90AF26B5E84}">
       <p14:sectionLst xmlns:p14="http://schemas.microsoft.com/office/powerpoint/2010/main">
-        <p14:section name="Pembuka" id="{b52c9e1a-6190-2de1-9234-2738e58279d1}">
+        <p14:section name="Pembuka" id="{1bf3acd3-d695-5b61-7a35-27981f4f4453}">
           <p14:sldIdLst>
             <p14:sldId id="256"/>
           </p14:sldIdLst>
         </p14:section>
-        <p14:section name="Ringkasan" id="{992637aa-f524-2b4e-2eef-e468c45a0676}">
+        <p14:section name="Aplikasi" id="{431f6ce3-1afd-2159-ba73-9c011f88bc6a}">
           <p14:sldIdLst>
             <p14:sldId id="257"/>
-          </p14:sldIdLst>
-        </p14:section>
-        <p14:section name="Isi" id="{48e642e3-b1f4-1ced-c432-ec5828f637d8}">
-          <p14:sldIdLst>
             <p14:sldId id="258"/>
             <p14:sldId id="259"/>
             <p14:sldId id="260"/>
@@ -133,7 +129,7 @@
             <p14:sldId id="262"/>
           </p14:sldIdLst>
         </p14:section>
-        <p14:section name="Penutup" id="{74df543c-724e-ee9d-0c6d-0f2463821a18}">
+        <p14:section name="Penutup" id="{7596e758-71a3-8b4d-ea85-c230afa80bde}">
           <p14:sldIdLst>
             <p14:sldId id="263"/>
           </p14:sldIdLst>
@@ -542,7 +538,7 @@
           <a:p>
             <a:r>
               <a:rPr lang="en-US" dirty="0"/>
-              <a:t>PID POS adalah aplikasi toko kapal PELNI Services yang terhubung langsung dengan SAP Business One. Paparan ini menyampaikan apa itu PID POS, alurnya, peran yang terlibat, manfaatnya, rencana peluncuran, dan dukungan yang kami mohonkan.</a:t>
+              <a:t>PID POS adalah aplikasi toko kapal PELNI Services yang terhubung langsung dengan SAP Business One. Paparan ini menyampaikan apa itu PID POS, alurnya, peran yang terlibat, fitur utamanya, kasir, dan keunggulannya.</a:t>
             </a:r>
             <a:endParaRPr lang="en-US" dirty="0"/>
           </a:p>
@@ -630,7 +626,7 @@
           <a:p>
             <a:r>
               <a:rPr lang="en-US" dirty="0"/>
-              <a:t>Pesan utamanya: PID POS siap digunakan mulai 27 Oktober 2026. Satu alur dari permintaan kapal sampai penjualan, tujuh peran, dan enam jenis dokumen SAP yang dibuat otomatis. Di akhir paparan kami memohon persetujuan penerapan dan arahan kepada unit terkait.</a:t>
+              <a:t>PID POS terdiri dari aplikasi web untuk admin kapal, DC, dan kantor pusat, serta aplikasi kasir Android untuk setiap dek. Keduanya terhubung langsung dengan SAP Business One, sehingga dokumen dibuat otomatis setelah disetujui. Gambar di kanan adalah beranda admin kapal.</a:t>
             </a:r>
             <a:endParaRPr lang="en-US" dirty="0"/>
           </a:p>
@@ -718,7 +714,7 @@
           <a:p>
             <a:r>
               <a:rPr lang="en-US" dirty="0"/>
-              <a:t>PID POS terdiri dari aplikasi web untuk admin kapal, DC, dan kantor pusat, serta aplikasi kasir Android untuk setiap dek. Keduanya terhubung langsung dengan SAP Business One, sehingga dokumen dibuat otomatis setelah disetujui. Gambar di kanan adalah beranda admin kapal.</a:t>
+              <a:t>Jalur atas selalu dijalani: kapal memesan ke DC, kantor pusat menyetujui sehingga Sales Order terbentuk di SAP, DC memilah stok, barang dikirim ke dek dengan Inventory Transfer, diterima kepala toko dan P2, lalu dijual di kasir dan masuk SAP sebagai Delivery Order. Bila stok DC kurang, jalur pembelian berjalan: Purchase Request, Purchase Order ke vendor, dan GRPO saat barang tiba di DC.</a:t>
             </a:r>
             <a:endParaRPr lang="en-US" dirty="0"/>
           </a:p>
@@ -806,7 +802,7 @@
           <a:p>
             <a:r>
               <a:rPr lang="en-US" dirty="0"/>
-              <a:t>Jalur atas selalu dijalani: kapal memesan ke DC, kantor pusat menyetujui sehingga Sales Order terbentuk di SAP, DC memilah stok, barang dikirim ke dek dengan Inventory Transfer, diterima kepala toko dan P2, lalu dijual di kasir dan masuk SAP sebagai Delivery Order. Bila stok DC kurang, jalur pembelian berjalan: Purchase Request, Purchase Order ke vendor, dan GRPO saat barang tiba di DC.</a:t>
+              <a:t>Ada tujuh peran. Di kapal: admin kapal atau kepala toko, dan kasir. Di kantor pusat: Approve SO, Approve PUR, Admin Purchase, dan Approve PO. Di DC: admin DC. Setiap peran hanya melihat tugas yang menunggunya, lewat lonceng dan tab Giliran saya.</a:t>
             </a:r>
             <a:endParaRPr lang="en-US" dirty="0"/>
           </a:p>
@@ -894,7 +890,7 @@
           <a:p>
             <a:r>
               <a:rPr lang="en-US" dirty="0"/>
-              <a:t>Ada tujuh peran. Di kapal: admin kapal atau kepala toko, dan kasir. Di kantor pusat: Approve SO, Approve PUR, Admin Purchase, dan Approve PO. Di DC: admin DC. Setiap peran hanya melihat tugas yang menunggunya, lewat lonceng dan tab Giliran saya.</a:t>
+              <a:t>Tiga fitur utama aplikasi web: admin kapal memesan barang ke DC per dek; setiap permintaan disetujui berjenjang dan statusnya terlihat per tahap, lalu menjadi Sales Order di SAP; dan posisi stok setiap dek terpantau dalam satu tabel.</a:t>
             </a:r>
             <a:endParaRPr lang="en-US" dirty="0"/>
           </a:p>
@@ -982,7 +978,7 @@
           <a:p>
             <a:r>
               <a:rPr lang="en-US" dirty="0"/>
-              <a:t>Nilainya bagi perusahaan ada tiga. Transparan: stok setiap dek dan status permintaan terpantau real-time. Terkendali: setiap tahap disetujui berjenjang, dan transaksi sensitif seperti retur memerlukan PIN kepala toko. Terintegrasi: dokumen SAP dibuat otomatis, termasuk penjualan harian setiap dek sebagai Delivery Order.</a:t>
+              <a:t>Di setiap dek, kasir cukup scan barang, menerima pembayaran tunai atau QRIS dengan kembalian dihitung otomatis, lalu struk tercetak. Di akhir hari, penjualan dikirim ke SAP sebagai Delivery Order.</a:t>
             </a:r>
             <a:endParaRPr lang="en-US" dirty="0"/>
           </a:p>
@@ -1070,7 +1066,7 @@
           <a:p>
             <a:r>
               <a:rPr lang="en-US" dirty="0"/>
-              <a:t>Kesiapan: alur end-to-end sudah diuji dengan data uji di lingkungan pengujian SAP DB_TEST, dan materi pendukung sudah tersedia berupa manual book per peran, video tutorial, dan video perkenalan. Peluncuran direncanakan Selasa, 27 Oktober 2026, dengan Tim TI PIDC sebagai kontak teknis selama masa awal penggunaan.</a:t>
+              <a:t>Nilainya bagi perusahaan ada tiga. Transparan: stok setiap dek dan status permintaan terpantau real-time. Terkendali: setiap tahap disetujui berjenjang, dan transaksi sensitif seperti retur memerlukan PIN kepala toko. Terintegrasi: dokumen SAP dibuat otomatis, termasuk penjualan harian setiap dek sebagai Delivery Order.</a:t>
             </a:r>
             <a:endParaRPr lang="en-US" dirty="0"/>
           </a:p>
@@ -1158,7 +1154,7 @@
           <a:p>
             <a:r>
               <a:rPr lang="en-US" dirty="0"/>
-              <a:t>Kami memohon dua hal: persetujuan penerapan PID POS di toko kapal, DC, dan kantor pusat mulai 27 Oktober 2026, serta arahan kepada unit terkait untuk menjalankan permintaan barang dan penjualan melalui PID POS. Terima kasih.</a:t>
+              <a:t>PID POS: satu alur, dari kapal sampai kasir. Terima kasih.</a:t>
             </a:r>
             <a:endParaRPr lang="en-US" dirty="0"/>
           </a:p>
@@ -2148,7 +2144,7 @@
                   <a:schemeClr val="tx2"/>
                 </a:solidFill>
               </a:rPr>
-              <a:t>Ringkasan: PID POS siap digunakan 27 Oktober 2026</a:t>
+              <a:t>Satu aplikasi untuk seluruh alur toko kapal</a:t>
             </a:r>
             <a:endParaRPr lang="en-US" sz="3400" dirty="0"/>
           </a:p>
@@ -2156,26 +2152,323 @@
       </p:sp>
       <p:sp>
         <p:nvSpPr>
-          <p:cNvPr id="3" name="Angka alur terintegrasi"/>
+          <p:cNvPr id="3" name="Aplikasi web latar"/>
           <p:cNvSpPr/>
           <p:nvPr/>
         </p:nvSpPr>
         <p:spPr>
           <a:xfrm>
-            <a:off x="640080" y="1508760"/>
-            <a:ext cx="3429000" cy="2377440"/>
-          </a:xfrm>
-          <a:prstGeom prst="roundRect">
-            <a:avLst>
-              <a:gd name="adj" fmla="val 5385"/>
-            </a:avLst>
+            <a:off x="640080" y="1600200"/>
+            <a:ext cx="868680" cy="868680"/>
+          </a:xfrm>
+          <a:prstGeom prst="ellipse">
+            <a:avLst/>
           </a:prstGeom>
           <a:solidFill>
-            <a:srgbClr val="FFFFFF"/>
+            <a:srgbClr val="1F3B7A"/>
           </a:solidFill>
           <a:ln w="12700">
             <a:solidFill>
-              <a:srgbClr val="FFFFFF"/>
+              <a:srgbClr val="1F3B7A"/>
+            </a:solidFill>
+            <a:prstDash val="solid"/>
+          </a:ln>
+        </p:spPr>
+      </p:sp>
+      <p:pic>
+        <p:nvPicPr>
+          <p:cNvPr id="4" name="Aplikasi web" descr="Aplikasi web">    </p:cNvPr>
+          <p:cNvPicPr>
+            <a:picLocks noChangeAspect="1"/>
+          </p:cNvPicPr>
+          <p:nvPr/>
+        </p:nvPicPr>
+        <p:blipFill>
+          <a:blip r:embed="rId1"/>
+          <a:stretch>
+            <a:fillRect/>
+          </a:stretch>
+        </p:blipFill>
+        <p:spPr>
+          <a:xfrm>
+            <a:off x="848563" y="1808683"/>
+            <a:ext cx="451714" cy="451714"/>
+          </a:xfrm>
+          <a:prstGeom prst="rect">
+            <a:avLst/>
+          </a:prstGeom>
+        </p:spPr>
+      </p:pic>
+      <p:sp>
+        <p:nvSpPr>
+          <p:cNvPr id="5" name="Text 2"/>
+          <p:cNvSpPr txBox="1"/>
+          <p:nvPr/>
+        </p:nvSpPr>
+        <p:spPr>
+          <a:xfrm>
+            <a:off x="1737360" y="1508760"/>
+            <a:ext cx="4480560" cy="1143000"/>
+          </a:xfrm>
+          <a:prstGeom prst="rect">
+            <a:avLst/>
+          </a:prstGeom>
+          <a:noFill/>
+          <a:ln/>
+        </p:spPr>
+        <p:txBody>
+          <a:bodyPr wrap="square" lIns="0" tIns="0" rIns="0" bIns="0" rtlCol="0" anchor="t"/>
+          <a:lstStyle/>
+          <a:p>
+            <a:pPr indent="0" marL="0">
+              <a:buNone/>
+            </a:pPr>
+            <a:r>
+              <a:rPr lang="en-US" sz="2000" b="1" dirty="0">
+                <a:solidFill>
+                  <a:srgbClr val="0B1A3A"/>
+                </a:solidFill>
+              </a:rPr>
+              <a:t>Aplikasi web</a:t>
+            </a:r>
+            <a:endParaRPr lang="en-US" sz="2000" dirty="0"/>
+          </a:p>
+          <a:p>
+            <a:pPr indent="0" marL="0">
+              <a:buNone/>
+            </a:pPr>
+            <a:r>
+              <a:rPr lang="en-US" sz="1500" dirty="0">
+                <a:solidFill>
+                  <a:srgbClr val="1B2437"/>
+                </a:solidFill>
+              </a:rPr>
+              <a:t>Untuk admin kapal, DC, dan kantor pusat: pesan barang, persetujuan, stok, kas, dan laporan.</a:t>
+            </a:r>
+            <a:endParaRPr lang="en-US" sz="2000" dirty="0"/>
+          </a:p>
+        </p:txBody>
+      </p:sp>
+      <p:sp>
+        <p:nvSpPr>
+          <p:cNvPr id="6" name="Aplikasi kasir Android latar"/>
+          <p:cNvSpPr/>
+          <p:nvPr/>
+        </p:nvSpPr>
+        <p:spPr>
+          <a:xfrm>
+            <a:off x="640080" y="3063240"/>
+            <a:ext cx="868680" cy="868680"/>
+          </a:xfrm>
+          <a:prstGeom prst="ellipse">
+            <a:avLst/>
+          </a:prstGeom>
+          <a:solidFill>
+            <a:srgbClr val="1F3B7A"/>
+          </a:solidFill>
+          <a:ln w="12700">
+            <a:solidFill>
+              <a:srgbClr val="1F3B7A"/>
+            </a:solidFill>
+            <a:prstDash val="solid"/>
+          </a:ln>
+        </p:spPr>
+      </p:sp>
+      <p:pic>
+        <p:nvPicPr>
+          <p:cNvPr id="7" name="Aplikasi kasir Android" descr="Aplikasi kasir Android">    </p:cNvPr>
+          <p:cNvPicPr>
+            <a:picLocks noChangeAspect="1"/>
+          </p:cNvPicPr>
+          <p:nvPr/>
+        </p:nvPicPr>
+        <p:blipFill>
+          <a:blip r:embed="rId2"/>
+          <a:stretch>
+            <a:fillRect/>
+          </a:stretch>
+        </p:blipFill>
+        <p:spPr>
+          <a:xfrm>
+            <a:off x="848563" y="3271723"/>
+            <a:ext cx="451714" cy="451714"/>
+          </a:xfrm>
+          <a:prstGeom prst="rect">
+            <a:avLst/>
+          </a:prstGeom>
+        </p:spPr>
+      </p:pic>
+      <p:sp>
+        <p:nvSpPr>
+          <p:cNvPr id="8" name="Text 4"/>
+          <p:cNvSpPr txBox="1"/>
+          <p:nvPr/>
+        </p:nvSpPr>
+        <p:spPr>
+          <a:xfrm>
+            <a:off x="1737360" y="2971800"/>
+            <a:ext cx="4480560" cy="1143000"/>
+          </a:xfrm>
+          <a:prstGeom prst="rect">
+            <a:avLst/>
+          </a:prstGeom>
+          <a:noFill/>
+          <a:ln/>
+        </p:spPr>
+        <p:txBody>
+          <a:bodyPr wrap="square" lIns="0" tIns="0" rIns="0" bIns="0" rtlCol="0" anchor="t"/>
+          <a:lstStyle/>
+          <a:p>
+            <a:pPr indent="0" marL="0">
+              <a:buNone/>
+            </a:pPr>
+            <a:r>
+              <a:rPr lang="en-US" sz="2000" b="1" dirty="0">
+                <a:solidFill>
+                  <a:srgbClr val="0B1A3A"/>
+                </a:solidFill>
+              </a:rPr>
+              <a:t>Aplikasi kasir Android</a:t>
+            </a:r>
+            <a:endParaRPr lang="en-US" sz="2000" dirty="0"/>
+          </a:p>
+          <a:p>
+            <a:pPr indent="0" marL="0">
+              <a:buNone/>
+            </a:pPr>
+            <a:r>
+              <a:rPr lang="en-US" sz="1500" dirty="0">
+                <a:solidFill>
+                  <a:srgbClr val="1B2437"/>
+                </a:solidFill>
+              </a:rPr>
+              <a:t>Untuk kasir di setiap dek: scan, bayar tunai atau QRIS, struk, dan rekap shift.</a:t>
+            </a:r>
+            <a:endParaRPr lang="en-US" sz="2000" dirty="0"/>
+          </a:p>
+        </p:txBody>
+      </p:sp>
+      <p:sp>
+        <p:nvSpPr>
+          <p:cNvPr id="9" name="Terhubung SAP Business One latar"/>
+          <p:cNvSpPr/>
+          <p:nvPr/>
+        </p:nvSpPr>
+        <p:spPr>
+          <a:xfrm>
+            <a:off x="640080" y="4526280"/>
+            <a:ext cx="868680" cy="868680"/>
+          </a:xfrm>
+          <a:prstGeom prst="ellipse">
+            <a:avLst/>
+          </a:prstGeom>
+          <a:solidFill>
+            <a:srgbClr val="FF6B1A"/>
+          </a:solidFill>
+          <a:ln w="12700">
+            <a:solidFill>
+              <a:srgbClr val="FF6B1A"/>
+            </a:solidFill>
+            <a:prstDash val="solid"/>
+          </a:ln>
+        </p:spPr>
+      </p:sp>
+      <p:pic>
+        <p:nvPicPr>
+          <p:cNvPr id="10" name="Terhubung SAP Business One" descr="Terhubung SAP Business One">    </p:cNvPr>
+          <p:cNvPicPr>
+            <a:picLocks noChangeAspect="1"/>
+          </p:cNvPicPr>
+          <p:nvPr/>
+        </p:nvPicPr>
+        <p:blipFill>
+          <a:blip r:embed="rId3"/>
+          <a:stretch>
+            <a:fillRect/>
+          </a:stretch>
+        </p:blipFill>
+        <p:spPr>
+          <a:xfrm>
+            <a:off x="848563" y="4734763"/>
+            <a:ext cx="451714" cy="451714"/>
+          </a:xfrm>
+          <a:prstGeom prst="rect">
+            <a:avLst/>
+          </a:prstGeom>
+        </p:spPr>
+      </p:pic>
+      <p:sp>
+        <p:nvSpPr>
+          <p:cNvPr id="11" name="Text 6"/>
+          <p:cNvSpPr txBox="1"/>
+          <p:nvPr/>
+        </p:nvSpPr>
+        <p:spPr>
+          <a:xfrm>
+            <a:off x="1737360" y="4434840"/>
+            <a:ext cx="4480560" cy="1143000"/>
+          </a:xfrm>
+          <a:prstGeom prst="rect">
+            <a:avLst/>
+          </a:prstGeom>
+          <a:noFill/>
+          <a:ln/>
+        </p:spPr>
+        <p:txBody>
+          <a:bodyPr wrap="square" lIns="0" tIns="0" rIns="0" bIns="0" rtlCol="0" anchor="t"/>
+          <a:lstStyle/>
+          <a:p>
+            <a:pPr indent="0" marL="0">
+              <a:buNone/>
+            </a:pPr>
+            <a:r>
+              <a:rPr lang="en-US" sz="2000" b="1" dirty="0">
+                <a:solidFill>
+                  <a:srgbClr val="0B1A3A"/>
+                </a:solidFill>
+              </a:rPr>
+              <a:t>Terhubung SAP Business One</a:t>
+            </a:r>
+            <a:endParaRPr lang="en-US" sz="2000" dirty="0"/>
+          </a:p>
+          <a:p>
+            <a:pPr indent="0" marL="0">
+              <a:buNone/>
+            </a:pPr>
+            <a:r>
+              <a:rPr lang="en-US" sz="1500" dirty="0">
+                <a:solidFill>
+                  <a:srgbClr val="1B2437"/>
+                </a:solidFill>
+              </a:rPr>
+              <a:t>Dokumen dibuat otomatis setelah disetujui, tanpa input ulang.</a:t>
+            </a:r>
+            <a:endParaRPr lang="en-US" sz="2000" dirty="0"/>
+          </a:p>
+        </p:txBody>
+      </p:sp>
+      <p:sp>
+        <p:nvSpPr>
+          <p:cNvPr id="12" name="Beranda admin kapal bingkai"/>
+          <p:cNvSpPr/>
+          <p:nvPr/>
+        </p:nvSpPr>
+        <p:spPr>
+          <a:xfrm>
+            <a:off x="6510528" y="2214588"/>
+            <a:ext cx="5221224" cy="3068903"/>
+          </a:xfrm>
+          <a:prstGeom prst="roundRect">
+            <a:avLst>
+              <a:gd name="adj" fmla="val 4171"/>
+            </a:avLst>
+          </a:prstGeom>
+          <a:solidFill>
+            <a:srgbClr val="E4EAF4"/>
+          </a:solidFill>
+          <a:ln w="12700">
+            <a:solidFill>
+              <a:srgbClr val="E4EAF4"/>
             </a:solidFill>
             <a:prstDash val="solid"/>
           </a:ln>
@@ -2188,416 +2481,30 @@
           </a:effectLst>
         </p:spPr>
       </p:sp>
-      <p:sp>
-        <p:nvSpPr>
-          <p:cNvPr id="4" name="Text 2"/>
-          <p:cNvSpPr txBox="1"/>
-          <p:nvPr/>
-        </p:nvSpPr>
-        <p:spPr>
-          <a:xfrm>
-            <a:off x="960120" y="1645920"/>
-            <a:ext cx="2743200" cy="1097280"/>
-          </a:xfrm>
-          <a:prstGeom prst="rect">
-            <a:avLst/>
-          </a:prstGeom>
-          <a:noFill/>
-          <a:ln/>
-        </p:spPr>
-        <p:txBody>
-          <a:bodyPr wrap="square" lIns="0" tIns="0" rIns="0" bIns="0" rtlCol="0" anchor="ctr"/>
-          <a:lstStyle/>
-          <a:p>
-            <a:pPr indent="0" marL="0">
-              <a:buNone/>
-            </a:pPr>
-            <a:r>
-              <a:rPr lang="en-US" sz="6600" b="1" dirty="0">
-                <a:solidFill>
-                  <a:schemeClr val="accent1"/>
-                </a:solidFill>
-              </a:rPr>
-              <a:t>1</a:t>
-            </a:r>
-            <a:endParaRPr lang="en-US" sz="6600" dirty="0"/>
-          </a:p>
-        </p:txBody>
-      </p:sp>
-      <p:sp>
-        <p:nvSpPr>
-          <p:cNvPr id="5" name="Text 3"/>
-          <p:cNvSpPr txBox="1"/>
-          <p:nvPr/>
-        </p:nvSpPr>
-        <p:spPr>
-          <a:xfrm>
-            <a:off x="960120" y="2743200"/>
-            <a:ext cx="2834640" cy="1005840"/>
-          </a:xfrm>
-          <a:prstGeom prst="rect">
-            <a:avLst/>
-          </a:prstGeom>
-          <a:noFill/>
-          <a:ln/>
-        </p:spPr>
-        <p:txBody>
-          <a:bodyPr wrap="square" lIns="0" tIns="0" rIns="0" bIns="0" rtlCol="0" anchor="t"/>
-          <a:lstStyle/>
-          <a:p>
-            <a:pPr indent="0" marL="0">
-              <a:buNone/>
-            </a:pPr>
-            <a:r>
-              <a:rPr lang="en-US" sz="2000" b="1" dirty="0">
-                <a:solidFill>
-                  <a:srgbClr val="0B1A3A"/>
-                </a:solidFill>
-              </a:rPr>
-              <a:t>alur terintegrasi</a:t>
-            </a:r>
-            <a:endParaRPr lang="en-US" sz="2000" dirty="0"/>
-          </a:p>
-          <a:p>
-            <a:pPr indent="0" marL="0">
-              <a:buNone/>
-            </a:pPr>
-            <a:r>
-              <a:rPr lang="en-US" sz="1400" dirty="0">
-                <a:solidFill>
-                  <a:srgbClr val="5B6B86"/>
-                </a:solidFill>
-              </a:rPr>
-              <a:t>dari permintaan kapal sampai penjualan di kasir</a:t>
-            </a:r>
-            <a:endParaRPr lang="en-US" sz="2000" dirty="0"/>
-          </a:p>
-        </p:txBody>
-      </p:sp>
-      <p:sp>
-        <p:nvSpPr>
-          <p:cNvPr id="6" name="Angka peran pengguna"/>
-          <p:cNvSpPr/>
-          <p:nvPr/>
-        </p:nvSpPr>
-        <p:spPr>
-          <a:xfrm>
-            <a:off x="4343400" y="1508760"/>
-            <a:ext cx="3429000" cy="2377440"/>
-          </a:xfrm>
-          <a:prstGeom prst="roundRect">
-            <a:avLst>
-              <a:gd name="adj" fmla="val 5385"/>
-            </a:avLst>
-          </a:prstGeom>
-          <a:solidFill>
-            <a:srgbClr val="FFFFFF"/>
-          </a:solidFill>
-          <a:ln w="12700">
-            <a:solidFill>
-              <a:srgbClr val="FFFFFF"/>
-            </a:solidFill>
-            <a:prstDash val="solid"/>
-          </a:ln>
-          <a:effectLst>
-            <a:outerShdw sx="100000" sy="100000" kx="0" ky="0" algn="bl" rotWithShape="0" blurRad="127000" dist="38100" dir="5400000">
-              <a:srgbClr val="0B1A3A">
-                <a:alpha val="14000"/>
-              </a:srgbClr>
-            </a:outerShdw>
-          </a:effectLst>
-        </p:spPr>
-      </p:sp>
-      <p:sp>
-        <p:nvSpPr>
-          <p:cNvPr id="7" name="Text 5"/>
-          <p:cNvSpPr txBox="1"/>
-          <p:nvPr/>
-        </p:nvSpPr>
-        <p:spPr>
-          <a:xfrm>
-            <a:off x="4663440" y="1645920"/>
-            <a:ext cx="2743200" cy="1097280"/>
-          </a:xfrm>
-          <a:prstGeom prst="rect">
-            <a:avLst/>
-          </a:prstGeom>
-          <a:noFill/>
-          <a:ln/>
-        </p:spPr>
-        <p:txBody>
-          <a:bodyPr wrap="square" lIns="0" tIns="0" rIns="0" bIns="0" rtlCol="0" anchor="ctr"/>
-          <a:lstStyle/>
-          <a:p>
-            <a:pPr indent="0" marL="0">
-              <a:buNone/>
-            </a:pPr>
-            <a:r>
-              <a:rPr lang="en-US" sz="6600" b="1" dirty="0">
-                <a:solidFill>
-                  <a:schemeClr val="accent1"/>
-                </a:solidFill>
-              </a:rPr>
-              <a:t>7</a:t>
-            </a:r>
-            <a:endParaRPr lang="en-US" sz="6600" dirty="0"/>
-          </a:p>
-        </p:txBody>
-      </p:sp>
-      <p:sp>
-        <p:nvSpPr>
-          <p:cNvPr id="8" name="Text 6"/>
-          <p:cNvSpPr txBox="1"/>
-          <p:nvPr/>
-        </p:nvSpPr>
-        <p:spPr>
-          <a:xfrm>
-            <a:off x="4663440" y="2743200"/>
-            <a:ext cx="2834640" cy="1005840"/>
-          </a:xfrm>
-          <a:prstGeom prst="rect">
-            <a:avLst/>
-          </a:prstGeom>
-          <a:noFill/>
-          <a:ln/>
-        </p:spPr>
-        <p:txBody>
-          <a:bodyPr wrap="square" lIns="0" tIns="0" rIns="0" bIns="0" rtlCol="0" anchor="t"/>
-          <a:lstStyle/>
-          <a:p>
-            <a:pPr indent="0" marL="0">
-              <a:buNone/>
-            </a:pPr>
-            <a:r>
-              <a:rPr lang="en-US" sz="2000" b="1" dirty="0">
-                <a:solidFill>
-                  <a:srgbClr val="0B1A3A"/>
-                </a:solidFill>
-              </a:rPr>
-              <a:t>peran pengguna</a:t>
-            </a:r>
-            <a:endParaRPr lang="en-US" sz="2000" dirty="0"/>
-          </a:p>
-          <a:p>
-            <a:pPr indent="0" marL="0">
-              <a:buNone/>
-            </a:pPr>
-            <a:r>
-              <a:rPr lang="en-US" sz="1400" dirty="0">
-                <a:solidFill>
-                  <a:srgbClr val="5B6B86"/>
-                </a:solidFill>
-              </a:rPr>
-              <a:t>di kapal, DC, dan kantor pusat</a:t>
-            </a:r>
-            <a:endParaRPr lang="en-US" sz="2000" dirty="0"/>
-          </a:p>
-        </p:txBody>
-      </p:sp>
-      <p:sp>
-        <p:nvSpPr>
-          <p:cNvPr id="9" name="Angka jenis dokumen SAP"/>
-          <p:cNvSpPr/>
-          <p:nvPr/>
-        </p:nvSpPr>
-        <p:spPr>
-          <a:xfrm>
-            <a:off x="8046720" y="1508760"/>
-            <a:ext cx="3429000" cy="2377440"/>
-          </a:xfrm>
-          <a:prstGeom prst="roundRect">
-            <a:avLst>
-              <a:gd name="adj" fmla="val 5385"/>
-            </a:avLst>
-          </a:prstGeom>
-          <a:solidFill>
-            <a:srgbClr val="FFFFFF"/>
-          </a:solidFill>
-          <a:ln w="12700">
-            <a:solidFill>
-              <a:srgbClr val="FFFFFF"/>
-            </a:solidFill>
-            <a:prstDash val="solid"/>
-          </a:ln>
-          <a:effectLst>
-            <a:outerShdw sx="100000" sy="100000" kx="0" ky="0" algn="bl" rotWithShape="0" blurRad="127000" dist="38100" dir="5400000">
-              <a:srgbClr val="0B1A3A">
-                <a:alpha val="14000"/>
-              </a:srgbClr>
-            </a:outerShdw>
-          </a:effectLst>
-        </p:spPr>
-      </p:sp>
-      <p:sp>
-        <p:nvSpPr>
-          <p:cNvPr id="10" name="Text 8"/>
-          <p:cNvSpPr txBox="1"/>
-          <p:nvPr/>
-        </p:nvSpPr>
-        <p:spPr>
-          <a:xfrm>
-            <a:off x="8366760" y="1645920"/>
-            <a:ext cx="2743200" cy="1097280"/>
-          </a:xfrm>
-          <a:prstGeom prst="rect">
-            <a:avLst/>
-          </a:prstGeom>
-          <a:noFill/>
-          <a:ln/>
-        </p:spPr>
-        <p:txBody>
-          <a:bodyPr wrap="square" lIns="0" tIns="0" rIns="0" bIns="0" rtlCol="0" anchor="ctr"/>
-          <a:lstStyle/>
-          <a:p>
-            <a:pPr indent="0" marL="0">
-              <a:buNone/>
-            </a:pPr>
-            <a:r>
-              <a:rPr lang="en-US" sz="6600" b="1" dirty="0">
-                <a:solidFill>
-                  <a:schemeClr val="accent1"/>
-                </a:solidFill>
-              </a:rPr>
-              <a:t>6</a:t>
-            </a:r>
-            <a:endParaRPr lang="en-US" sz="6600" dirty="0"/>
-          </a:p>
-        </p:txBody>
-      </p:sp>
-      <p:sp>
-        <p:nvSpPr>
-          <p:cNvPr id="11" name="Text 9"/>
-          <p:cNvSpPr txBox="1"/>
-          <p:nvPr/>
-        </p:nvSpPr>
-        <p:spPr>
-          <a:xfrm>
-            <a:off x="8366760" y="2743200"/>
-            <a:ext cx="2834640" cy="1005840"/>
-          </a:xfrm>
-          <a:prstGeom prst="rect">
-            <a:avLst/>
-          </a:prstGeom>
-          <a:noFill/>
-          <a:ln/>
-        </p:spPr>
-        <p:txBody>
-          <a:bodyPr wrap="square" lIns="0" tIns="0" rIns="0" bIns="0" rtlCol="0" anchor="t"/>
-          <a:lstStyle/>
-          <a:p>
-            <a:pPr indent="0" marL="0">
-              <a:buNone/>
-            </a:pPr>
-            <a:r>
-              <a:rPr lang="en-US" sz="2000" b="1" dirty="0">
-                <a:solidFill>
-                  <a:srgbClr val="0B1A3A"/>
-                </a:solidFill>
-              </a:rPr>
-              <a:t>jenis dokumen SAP</a:t>
-            </a:r>
-            <a:endParaRPr lang="en-US" sz="2000" dirty="0"/>
-          </a:p>
-          <a:p>
-            <a:pPr indent="0" marL="0">
-              <a:buNone/>
-            </a:pPr>
-            <a:r>
-              <a:rPr lang="en-US" sz="1400" dirty="0">
-                <a:solidFill>
-                  <a:srgbClr val="5B6B86"/>
-                </a:solidFill>
-              </a:rPr>
-              <a:t>dibuat otomatis setelah disetujui</a:t>
-            </a:r>
-            <a:endParaRPr lang="en-US" sz="2000" dirty="0"/>
-          </a:p>
-        </p:txBody>
-      </p:sp>
-      <p:sp>
-        <p:nvSpPr>
-          <p:cNvPr id="12" name="Permohonan"/>
-          <p:cNvSpPr/>
-          <p:nvPr/>
-        </p:nvSpPr>
-        <p:spPr>
-          <a:xfrm>
-            <a:off x="640080" y="4251960"/>
-            <a:ext cx="10835640" cy="1783080"/>
-          </a:xfrm>
-          <a:prstGeom prst="roundRect">
-            <a:avLst>
-              <a:gd name="adj" fmla="val 7179"/>
-            </a:avLst>
-          </a:prstGeom>
-          <a:solidFill>
-            <a:srgbClr val="0B1A3A"/>
-          </a:solidFill>
-          <a:ln w="12700">
-            <a:solidFill>
-              <a:srgbClr val="0B1A3A"/>
-            </a:solidFill>
-            <a:prstDash val="solid"/>
-          </a:ln>
-          <a:effectLst>
-            <a:outerShdw sx="100000" sy="100000" kx="0" ky="0" algn="bl" rotWithShape="0" blurRad="127000" dist="38100" dir="5400000">
-              <a:srgbClr val="0B1A3A">
-                <a:alpha val="14000"/>
-              </a:srgbClr>
-            </a:outerShdw>
-          </a:effectLst>
-        </p:spPr>
-      </p:sp>
-      <p:sp>
-        <p:nvSpPr>
-          <p:cNvPr id="13" name="Text 11"/>
-          <p:cNvSpPr txBox="1"/>
-          <p:nvPr/>
-        </p:nvSpPr>
-        <p:spPr>
-          <a:xfrm>
-            <a:off x="1005840" y="4434840"/>
-            <a:ext cx="10149840" cy="1417320"/>
-          </a:xfrm>
-          <a:prstGeom prst="rect">
-            <a:avLst/>
-          </a:prstGeom>
-          <a:noFill/>
-          <a:ln/>
-        </p:spPr>
-        <p:txBody>
-          <a:bodyPr wrap="square" lIns="0" tIns="0" rIns="0" bIns="0" rtlCol="0" anchor="ctr"/>
-          <a:lstStyle/>
-          <a:p>
-            <a:pPr indent="0" marL="0">
-              <a:buNone/>
-            </a:pPr>
-            <a:r>
-              <a:rPr lang="en-US" sz="2000" b="1" dirty="0">
-                <a:solidFill>
-                  <a:srgbClr val="FFFFFF"/>
-                </a:solidFill>
-              </a:rPr>
-              <a:t>Yang kami mohonkan</a:t>
-            </a:r>
-            <a:endParaRPr lang="en-US" sz="2000" dirty="0"/>
-          </a:p>
-          <a:p>
-            <a:pPr indent="0" marL="0">
-              <a:buNone/>
-            </a:pPr>
-            <a:r>
-              <a:rPr lang="en-US" sz="1600" dirty="0">
-                <a:solidFill>
-                  <a:srgbClr val="CADCFC"/>
-                </a:solidFill>
-              </a:rPr>
-              <a:t>Persetujuan penerapan PID POS di toko kapal, DC, dan kantor pusat, serta arahan kepada unit terkait untuk menjalankan permintaan barang dan penjualan melalui PID POS.</a:t>
-            </a:r>
-            <a:endParaRPr lang="en-US" sz="2000" dirty="0"/>
-          </a:p>
-        </p:txBody>
-      </p:sp>
+      <p:pic>
+        <p:nvPicPr>
+          <p:cNvPr id="13" name="Beranda admin kapal" descr="Layar PID POS: Beranda admin kapal">    </p:cNvPr>
+          <p:cNvPicPr>
+            <a:picLocks noChangeAspect="1"/>
+          </p:cNvPicPr>
+          <p:nvPr/>
+        </p:nvPicPr>
+        <p:blipFill>
+          <a:blip r:embed="rId4"/>
+          <a:stretch>
+            <a:fillRect/>
+          </a:stretch>
+        </p:blipFill>
+        <p:spPr>
+          <a:xfrm>
+            <a:off x="6583680" y="2287740"/>
+            <a:ext cx="5074920" cy="2922599"/>
+          </a:xfrm>
+          <a:prstGeom prst="rect">
+            <a:avLst/>
+          </a:prstGeom>
+        </p:spPr>
+      </p:pic>
       <p:sp>
         <p:nvSpPr>
           <p:cNvPr id="25" name="Slide Number Placeholder 0"/>
@@ -2700,7 +2607,7 @@
                   <a:schemeClr val="tx2"/>
                 </a:solidFill>
               </a:rPr>
-              <a:t>Satu aplikasi untuk seluruh alur toko kapal</a:t>
+              <a:t>Alur end-to-end: setiap langkah tercatat di SAP</a:t>
             </a:r>
             <a:endParaRPr lang="en-US" sz="3400" dirty="0"/>
           </a:p>
@@ -2708,323 +2615,26 @@
       </p:sp>
       <p:sp>
         <p:nvSpPr>
-          <p:cNvPr id="3" name="Aplikasi web latar"/>
+          <p:cNvPr id="3" name="Tahap Pesan ke DC"/>
           <p:cNvSpPr/>
           <p:nvPr/>
         </p:nvSpPr>
         <p:spPr>
           <a:xfrm>
-            <a:off x="640080" y="1600200"/>
-            <a:ext cx="868680" cy="868680"/>
-          </a:xfrm>
-          <a:prstGeom prst="ellipse">
-            <a:avLst/>
+            <a:off x="640080" y="1737360"/>
+            <a:ext cx="1627632" cy="1051560"/>
+          </a:xfrm>
+          <a:prstGeom prst="roundRect">
+            <a:avLst>
+              <a:gd name="adj" fmla="val 12174"/>
+            </a:avLst>
           </a:prstGeom>
           <a:solidFill>
-            <a:srgbClr val="1F3B7A"/>
+            <a:srgbClr val="FFFFFF"/>
           </a:solidFill>
           <a:ln w="12700">
             <a:solidFill>
-              <a:srgbClr val="1F3B7A"/>
-            </a:solidFill>
-            <a:prstDash val="solid"/>
-          </a:ln>
-        </p:spPr>
-      </p:sp>
-      <p:pic>
-        <p:nvPicPr>
-          <p:cNvPr id="4" name="Aplikasi web" descr="Aplikasi web">    </p:cNvPr>
-          <p:cNvPicPr>
-            <a:picLocks noChangeAspect="1"/>
-          </p:cNvPicPr>
-          <p:nvPr/>
-        </p:nvPicPr>
-        <p:blipFill>
-          <a:blip r:embed="rId1"/>
-          <a:stretch>
-            <a:fillRect/>
-          </a:stretch>
-        </p:blipFill>
-        <p:spPr>
-          <a:xfrm>
-            <a:off x="848563" y="1808683"/>
-            <a:ext cx="451714" cy="451714"/>
-          </a:xfrm>
-          <a:prstGeom prst="rect">
-            <a:avLst/>
-          </a:prstGeom>
-        </p:spPr>
-      </p:pic>
-      <p:sp>
-        <p:nvSpPr>
-          <p:cNvPr id="5" name="Text 2"/>
-          <p:cNvSpPr txBox="1"/>
-          <p:nvPr/>
-        </p:nvSpPr>
-        <p:spPr>
-          <a:xfrm>
-            <a:off x="1737360" y="1508760"/>
-            <a:ext cx="4480560" cy="1143000"/>
-          </a:xfrm>
-          <a:prstGeom prst="rect">
-            <a:avLst/>
-          </a:prstGeom>
-          <a:noFill/>
-          <a:ln/>
-        </p:spPr>
-        <p:txBody>
-          <a:bodyPr wrap="square" lIns="0" tIns="0" rIns="0" bIns="0" rtlCol="0" anchor="t"/>
-          <a:lstStyle/>
-          <a:p>
-            <a:pPr indent="0" marL="0">
-              <a:buNone/>
-            </a:pPr>
-            <a:r>
-              <a:rPr lang="en-US" sz="2000" b="1" dirty="0">
-                <a:solidFill>
-                  <a:srgbClr val="0B1A3A"/>
-                </a:solidFill>
-              </a:rPr>
-              <a:t>Aplikasi web</a:t>
-            </a:r>
-            <a:endParaRPr lang="en-US" sz="2000" dirty="0"/>
-          </a:p>
-          <a:p>
-            <a:pPr indent="0" marL="0">
-              <a:buNone/>
-            </a:pPr>
-            <a:r>
-              <a:rPr lang="en-US" sz="1500" dirty="0">
-                <a:solidFill>
-                  <a:srgbClr val="1B2437"/>
-                </a:solidFill>
-              </a:rPr>
-              <a:t>Untuk admin kapal, DC, dan kantor pusat: pesan barang, persetujuan, stok, kas, dan laporan.</a:t>
-            </a:r>
-            <a:endParaRPr lang="en-US" sz="2000" dirty="0"/>
-          </a:p>
-        </p:txBody>
-      </p:sp>
-      <p:sp>
-        <p:nvSpPr>
-          <p:cNvPr id="6" name="Aplikasi kasir Android latar"/>
-          <p:cNvSpPr/>
-          <p:nvPr/>
-        </p:nvSpPr>
-        <p:spPr>
-          <a:xfrm>
-            <a:off x="640080" y="3063240"/>
-            <a:ext cx="868680" cy="868680"/>
-          </a:xfrm>
-          <a:prstGeom prst="ellipse">
-            <a:avLst/>
-          </a:prstGeom>
-          <a:solidFill>
-            <a:srgbClr val="1F3B7A"/>
-          </a:solidFill>
-          <a:ln w="12700">
-            <a:solidFill>
-              <a:srgbClr val="1F3B7A"/>
-            </a:solidFill>
-            <a:prstDash val="solid"/>
-          </a:ln>
-        </p:spPr>
-      </p:sp>
-      <p:pic>
-        <p:nvPicPr>
-          <p:cNvPr id="7" name="Aplikasi kasir Android" descr="Aplikasi kasir Android">    </p:cNvPr>
-          <p:cNvPicPr>
-            <a:picLocks noChangeAspect="1"/>
-          </p:cNvPicPr>
-          <p:nvPr/>
-        </p:nvPicPr>
-        <p:blipFill>
-          <a:blip r:embed="rId2"/>
-          <a:stretch>
-            <a:fillRect/>
-          </a:stretch>
-        </p:blipFill>
-        <p:spPr>
-          <a:xfrm>
-            <a:off x="848563" y="3271723"/>
-            <a:ext cx="451714" cy="451714"/>
-          </a:xfrm>
-          <a:prstGeom prst="rect">
-            <a:avLst/>
-          </a:prstGeom>
-        </p:spPr>
-      </p:pic>
-      <p:sp>
-        <p:nvSpPr>
-          <p:cNvPr id="8" name="Text 4"/>
-          <p:cNvSpPr txBox="1"/>
-          <p:nvPr/>
-        </p:nvSpPr>
-        <p:spPr>
-          <a:xfrm>
-            <a:off x="1737360" y="2971800"/>
-            <a:ext cx="4480560" cy="1143000"/>
-          </a:xfrm>
-          <a:prstGeom prst="rect">
-            <a:avLst/>
-          </a:prstGeom>
-          <a:noFill/>
-          <a:ln/>
-        </p:spPr>
-        <p:txBody>
-          <a:bodyPr wrap="square" lIns="0" tIns="0" rIns="0" bIns="0" rtlCol="0" anchor="t"/>
-          <a:lstStyle/>
-          <a:p>
-            <a:pPr indent="0" marL="0">
-              <a:buNone/>
-            </a:pPr>
-            <a:r>
-              <a:rPr lang="en-US" sz="2000" b="1" dirty="0">
-                <a:solidFill>
-                  <a:srgbClr val="0B1A3A"/>
-                </a:solidFill>
-              </a:rPr>
-              <a:t>Aplikasi kasir Android</a:t>
-            </a:r>
-            <a:endParaRPr lang="en-US" sz="2000" dirty="0"/>
-          </a:p>
-          <a:p>
-            <a:pPr indent="0" marL="0">
-              <a:buNone/>
-            </a:pPr>
-            <a:r>
-              <a:rPr lang="en-US" sz="1500" dirty="0">
-                <a:solidFill>
-                  <a:srgbClr val="1B2437"/>
-                </a:solidFill>
-              </a:rPr>
-              <a:t>Untuk kasir di setiap dek: scan, bayar tunai atau QRIS, struk, dan rekap shift.</a:t>
-            </a:r>
-            <a:endParaRPr lang="en-US" sz="2000" dirty="0"/>
-          </a:p>
-        </p:txBody>
-      </p:sp>
-      <p:sp>
-        <p:nvSpPr>
-          <p:cNvPr id="9" name="Terhubung SAP Business One latar"/>
-          <p:cNvSpPr/>
-          <p:nvPr/>
-        </p:nvSpPr>
-        <p:spPr>
-          <a:xfrm>
-            <a:off x="640080" y="4526280"/>
-            <a:ext cx="868680" cy="868680"/>
-          </a:xfrm>
-          <a:prstGeom prst="ellipse">
-            <a:avLst/>
-          </a:prstGeom>
-          <a:solidFill>
-            <a:srgbClr val="FF6B1A"/>
-          </a:solidFill>
-          <a:ln w="12700">
-            <a:solidFill>
-              <a:srgbClr val="FF6B1A"/>
-            </a:solidFill>
-            <a:prstDash val="solid"/>
-          </a:ln>
-        </p:spPr>
-      </p:sp>
-      <p:pic>
-        <p:nvPicPr>
-          <p:cNvPr id="10" name="Terhubung SAP Business One" descr="Terhubung SAP Business One">    </p:cNvPr>
-          <p:cNvPicPr>
-            <a:picLocks noChangeAspect="1"/>
-          </p:cNvPicPr>
-          <p:nvPr/>
-        </p:nvPicPr>
-        <p:blipFill>
-          <a:blip r:embed="rId3"/>
-          <a:stretch>
-            <a:fillRect/>
-          </a:stretch>
-        </p:blipFill>
-        <p:spPr>
-          <a:xfrm>
-            <a:off x="848563" y="4734763"/>
-            <a:ext cx="451714" cy="451714"/>
-          </a:xfrm>
-          <a:prstGeom prst="rect">
-            <a:avLst/>
-          </a:prstGeom>
-        </p:spPr>
-      </p:pic>
-      <p:sp>
-        <p:nvSpPr>
-          <p:cNvPr id="11" name="Text 6"/>
-          <p:cNvSpPr txBox="1"/>
-          <p:nvPr/>
-        </p:nvSpPr>
-        <p:spPr>
-          <a:xfrm>
-            <a:off x="1737360" y="4434840"/>
-            <a:ext cx="4480560" cy="1143000"/>
-          </a:xfrm>
-          <a:prstGeom prst="rect">
-            <a:avLst/>
-          </a:prstGeom>
-          <a:noFill/>
-          <a:ln/>
-        </p:spPr>
-        <p:txBody>
-          <a:bodyPr wrap="square" lIns="0" tIns="0" rIns="0" bIns="0" rtlCol="0" anchor="t"/>
-          <a:lstStyle/>
-          <a:p>
-            <a:pPr indent="0" marL="0">
-              <a:buNone/>
-            </a:pPr>
-            <a:r>
-              <a:rPr lang="en-US" sz="2000" b="1" dirty="0">
-                <a:solidFill>
-                  <a:srgbClr val="0B1A3A"/>
-                </a:solidFill>
-              </a:rPr>
-              <a:t>Terhubung SAP Business One</a:t>
-            </a:r>
-            <a:endParaRPr lang="en-US" sz="2000" dirty="0"/>
-          </a:p>
-          <a:p>
-            <a:pPr indent="0" marL="0">
-              <a:buNone/>
-            </a:pPr>
-            <a:r>
-              <a:rPr lang="en-US" sz="1500" dirty="0">
-                <a:solidFill>
-                  <a:srgbClr val="1B2437"/>
-                </a:solidFill>
-              </a:rPr>
-              <a:t>Dokumen dibuat otomatis setelah disetujui, tanpa input ulang.</a:t>
-            </a:r>
-            <a:endParaRPr lang="en-US" sz="2000" dirty="0"/>
-          </a:p>
-        </p:txBody>
-      </p:sp>
-      <p:sp>
-        <p:nvSpPr>
-          <p:cNvPr id="12" name="Beranda admin kapal bingkai"/>
-          <p:cNvSpPr/>
-          <p:nvPr/>
-        </p:nvSpPr>
-        <p:spPr>
-          <a:xfrm>
-            <a:off x="6510528" y="2214588"/>
-            <a:ext cx="5221224" cy="3068903"/>
-          </a:xfrm>
-          <a:prstGeom prst="roundRect">
-            <a:avLst>
-              <a:gd name="adj" fmla="val 4171"/>
-            </a:avLst>
-          </a:prstGeom>
-          <a:solidFill>
-            <a:srgbClr val="E4EAF4"/>
-          </a:solidFill>
-          <a:ln w="12700">
-            <a:solidFill>
-              <a:srgbClr val="E4EAF4"/>
+              <a:srgbClr val="FFFFFF"/>
             </a:solidFill>
             <a:prstDash val="solid"/>
           </a:ln>
@@ -3037,30 +2647,1439 @@
           </a:effectLst>
         </p:spPr>
       </p:sp>
-      <p:pic>
-        <p:nvPicPr>
-          <p:cNvPr id="13" name="Beranda admin kapal" descr="Layar PID POS: Beranda admin kapal">    </p:cNvPr>
-          <p:cNvPicPr>
-            <a:picLocks noChangeAspect="1"/>
-          </p:cNvPicPr>
-          <p:nvPr/>
-        </p:nvPicPr>
-        <p:blipFill>
-          <a:blip r:embed="rId4"/>
-          <a:stretch>
-            <a:fillRect/>
-          </a:stretch>
-        </p:blipFill>
-        <p:spPr>
-          <a:xfrm>
-            <a:off x="6583680" y="2287740"/>
-            <a:ext cx="5074920" cy="2922599"/>
-          </a:xfrm>
-          <a:prstGeom prst="rect">
-            <a:avLst/>
-          </a:prstGeom>
-        </p:spPr>
-      </p:pic>
+      <p:sp>
+        <p:nvSpPr>
+          <p:cNvPr id="4" name="Text 2"/>
+          <p:cNvSpPr txBox="1"/>
+          <p:nvPr/>
+        </p:nvSpPr>
+        <p:spPr>
+          <a:xfrm>
+            <a:off x="749808" y="1847088"/>
+            <a:ext cx="1408176" cy="822960"/>
+          </a:xfrm>
+          <a:prstGeom prst="rect">
+            <a:avLst/>
+          </a:prstGeom>
+          <a:noFill/>
+          <a:ln/>
+        </p:spPr>
+        <p:txBody>
+          <a:bodyPr wrap="square" lIns="0" tIns="0" rIns="0" bIns="0" rtlCol="0" anchor="ctr"/>
+          <a:lstStyle/>
+          <a:p>
+            <a:pPr algn="ctr" indent="0" marL="0">
+              <a:buNone/>
+            </a:pPr>
+            <a:r>
+              <a:rPr lang="en-US" sz="1500" b="1" dirty="0">
+                <a:solidFill>
+                  <a:srgbClr val="0B1A3A"/>
+                </a:solidFill>
+              </a:rPr>
+              <a:t>Pesan ke DC</a:t>
+            </a:r>
+            <a:endParaRPr lang="en-US" sz="1500" dirty="0"/>
+          </a:p>
+          <a:p>
+            <a:pPr algn="ctr" indent="0" marL="0">
+              <a:buNone/>
+            </a:pPr>
+            <a:r>
+              <a:rPr lang="en-US" sz="1200" dirty="0">
+                <a:solidFill>
+                  <a:srgbClr val="5B6B86"/>
+                </a:solidFill>
+              </a:rPr>
+              <a:t>Admin kapal</a:t>
+            </a:r>
+            <a:endParaRPr lang="en-US" sz="1500" dirty="0"/>
+          </a:p>
+        </p:txBody>
+      </p:sp>
+      <p:sp>
+        <p:nvSpPr>
+          <p:cNvPr id="5" name="Panah alur"/>
+          <p:cNvSpPr/>
+          <p:nvPr/>
+        </p:nvSpPr>
+        <p:spPr>
+          <a:xfrm>
+            <a:off x="2295144" y="2263140"/>
+            <a:ext cx="173736" cy="0"/>
+          </a:xfrm>
+          <a:prstGeom prst="line">
+            <a:avLst/>
+          </a:prstGeom>
+          <a:noFill/>
+          <a:ln w="25400">
+            <a:solidFill>
+              <a:srgbClr val="3D6FC2"/>
+            </a:solidFill>
+            <a:prstDash val="solid"/>
+            <a:tailEnd type="triangle"/>
+          </a:ln>
+        </p:spPr>
+      </p:sp>
+      <p:sp>
+        <p:nvSpPr>
+          <p:cNvPr id="6" name="Tahap Approve SO"/>
+          <p:cNvSpPr/>
+          <p:nvPr/>
+        </p:nvSpPr>
+        <p:spPr>
+          <a:xfrm>
+            <a:off x="2496312" y="1737360"/>
+            <a:ext cx="1627632" cy="1051560"/>
+          </a:xfrm>
+          <a:prstGeom prst="roundRect">
+            <a:avLst>
+              <a:gd name="adj" fmla="val 12174"/>
+            </a:avLst>
+          </a:prstGeom>
+          <a:solidFill>
+            <a:srgbClr val="FFFFFF"/>
+          </a:solidFill>
+          <a:ln w="12700">
+            <a:solidFill>
+              <a:srgbClr val="FFFFFF"/>
+            </a:solidFill>
+            <a:prstDash val="solid"/>
+          </a:ln>
+          <a:effectLst>
+            <a:outerShdw sx="100000" sy="100000" kx="0" ky="0" algn="bl" rotWithShape="0" blurRad="127000" dist="38100" dir="5400000">
+              <a:srgbClr val="0B1A3A">
+                <a:alpha val="14000"/>
+              </a:srgbClr>
+            </a:outerShdw>
+          </a:effectLst>
+        </p:spPr>
+      </p:sp>
+      <p:sp>
+        <p:nvSpPr>
+          <p:cNvPr id="7" name="Text 5"/>
+          <p:cNvSpPr txBox="1"/>
+          <p:nvPr/>
+        </p:nvSpPr>
+        <p:spPr>
+          <a:xfrm>
+            <a:off x="2606040" y="1847088"/>
+            <a:ext cx="1408176" cy="822960"/>
+          </a:xfrm>
+          <a:prstGeom prst="rect">
+            <a:avLst/>
+          </a:prstGeom>
+          <a:noFill/>
+          <a:ln/>
+        </p:spPr>
+        <p:txBody>
+          <a:bodyPr wrap="square" lIns="0" tIns="0" rIns="0" bIns="0" rtlCol="0" anchor="ctr"/>
+          <a:lstStyle/>
+          <a:p>
+            <a:pPr algn="ctr" indent="0" marL="0">
+              <a:buNone/>
+            </a:pPr>
+            <a:r>
+              <a:rPr lang="en-US" sz="1500" b="1" dirty="0">
+                <a:solidFill>
+                  <a:srgbClr val="0B1A3A"/>
+                </a:solidFill>
+              </a:rPr>
+              <a:t>Approve SO</a:t>
+            </a:r>
+            <a:endParaRPr lang="en-US" sz="1500" dirty="0"/>
+          </a:p>
+          <a:p>
+            <a:pPr algn="ctr" indent="0" marL="0">
+              <a:buNone/>
+            </a:pPr>
+            <a:r>
+              <a:rPr lang="en-US" sz="1200" dirty="0">
+                <a:solidFill>
+                  <a:srgbClr val="5B6B86"/>
+                </a:solidFill>
+              </a:rPr>
+              <a:t>Kantor pusat</a:t>
+            </a:r>
+            <a:endParaRPr lang="en-US" sz="1500" dirty="0"/>
+          </a:p>
+        </p:txBody>
+      </p:sp>
+      <p:sp>
+        <p:nvSpPr>
+          <p:cNvPr id="8" name="Panah alur"/>
+          <p:cNvSpPr/>
+          <p:nvPr/>
+        </p:nvSpPr>
+        <p:spPr>
+          <a:xfrm>
+            <a:off x="4151376" y="2263140"/>
+            <a:ext cx="173736" cy="0"/>
+          </a:xfrm>
+          <a:prstGeom prst="line">
+            <a:avLst/>
+          </a:prstGeom>
+          <a:noFill/>
+          <a:ln w="25400">
+            <a:solidFill>
+              <a:srgbClr val="3D6FC2"/>
+            </a:solidFill>
+            <a:prstDash val="solid"/>
+            <a:tailEnd type="triangle"/>
+          </a:ln>
+        </p:spPr>
+      </p:sp>
+      <p:sp>
+        <p:nvSpPr>
+          <p:cNvPr id="9" name="Dokumen SO"/>
+          <p:cNvSpPr/>
+          <p:nvPr/>
+        </p:nvSpPr>
+        <p:spPr>
+          <a:xfrm>
+            <a:off x="2926080" y="2880360"/>
+            <a:ext cx="768096" cy="329184"/>
+          </a:xfrm>
+          <a:prstGeom prst="roundRect">
+            <a:avLst>
+              <a:gd name="adj" fmla="val 22222"/>
+            </a:avLst>
+          </a:prstGeom>
+          <a:solidFill>
+            <a:srgbClr val="4A8A3C"/>
+          </a:solidFill>
+          <a:ln w="12700">
+            <a:solidFill>
+              <a:srgbClr val="4A8A3C"/>
+            </a:solidFill>
+            <a:prstDash val="solid"/>
+          </a:ln>
+        </p:spPr>
+      </p:sp>
+      <p:sp>
+        <p:nvSpPr>
+          <p:cNvPr id="10" name="Text 8"/>
+          <p:cNvSpPr txBox="1"/>
+          <p:nvPr/>
+        </p:nvSpPr>
+        <p:spPr>
+          <a:xfrm>
+            <a:off x="2926080" y="2880360"/>
+            <a:ext cx="768096" cy="329184"/>
+          </a:xfrm>
+          <a:prstGeom prst="rect">
+            <a:avLst/>
+          </a:prstGeom>
+          <a:noFill/>
+          <a:ln/>
+        </p:spPr>
+        <p:txBody>
+          <a:bodyPr wrap="square" lIns="0" tIns="0" rIns="0" bIns="0" rtlCol="0" anchor="ctr"/>
+          <a:lstStyle/>
+          <a:p>
+            <a:pPr algn="ctr" indent="0" marL="0">
+              <a:buNone/>
+            </a:pPr>
+            <a:r>
+              <a:rPr lang="en-US" sz="1200" b="1" dirty="0">
+                <a:solidFill>
+                  <a:srgbClr val="FFFFFF"/>
+                </a:solidFill>
+              </a:rPr>
+              <a:t>SO</a:t>
+            </a:r>
+            <a:endParaRPr lang="en-US" sz="1200" dirty="0"/>
+          </a:p>
+        </p:txBody>
+      </p:sp>
+      <p:sp>
+        <p:nvSpPr>
+          <p:cNvPr id="11" name="Tahap Pilah stok"/>
+          <p:cNvSpPr/>
+          <p:nvPr/>
+        </p:nvSpPr>
+        <p:spPr>
+          <a:xfrm>
+            <a:off x="4352544" y="1737360"/>
+            <a:ext cx="1627632" cy="1051560"/>
+          </a:xfrm>
+          <a:prstGeom prst="roundRect">
+            <a:avLst>
+              <a:gd name="adj" fmla="val 12174"/>
+            </a:avLst>
+          </a:prstGeom>
+          <a:solidFill>
+            <a:srgbClr val="FFFFFF"/>
+          </a:solidFill>
+          <a:ln w="12700">
+            <a:solidFill>
+              <a:srgbClr val="FFFFFF"/>
+            </a:solidFill>
+            <a:prstDash val="solid"/>
+          </a:ln>
+          <a:effectLst>
+            <a:outerShdw sx="100000" sy="100000" kx="0" ky="0" algn="bl" rotWithShape="0" blurRad="127000" dist="38100" dir="5400000">
+              <a:srgbClr val="0B1A3A">
+                <a:alpha val="14000"/>
+              </a:srgbClr>
+            </a:outerShdw>
+          </a:effectLst>
+        </p:spPr>
+      </p:sp>
+      <p:sp>
+        <p:nvSpPr>
+          <p:cNvPr id="12" name="Text 10"/>
+          <p:cNvSpPr txBox="1"/>
+          <p:nvPr/>
+        </p:nvSpPr>
+        <p:spPr>
+          <a:xfrm>
+            <a:off x="4462272" y="1847088"/>
+            <a:ext cx="1408176" cy="822960"/>
+          </a:xfrm>
+          <a:prstGeom prst="rect">
+            <a:avLst/>
+          </a:prstGeom>
+          <a:noFill/>
+          <a:ln/>
+        </p:spPr>
+        <p:txBody>
+          <a:bodyPr wrap="square" lIns="0" tIns="0" rIns="0" bIns="0" rtlCol="0" anchor="ctr"/>
+          <a:lstStyle/>
+          <a:p>
+            <a:pPr algn="ctr" indent="0" marL="0">
+              <a:buNone/>
+            </a:pPr>
+            <a:r>
+              <a:rPr lang="en-US" sz="1500" b="1" dirty="0">
+                <a:solidFill>
+                  <a:srgbClr val="0B1A3A"/>
+                </a:solidFill>
+              </a:rPr>
+              <a:t>Pilah stok</a:t>
+            </a:r>
+            <a:endParaRPr lang="en-US" sz="1500" dirty="0"/>
+          </a:p>
+          <a:p>
+            <a:pPr algn="ctr" indent="0" marL="0">
+              <a:buNone/>
+            </a:pPr>
+            <a:r>
+              <a:rPr lang="en-US" sz="1200" dirty="0">
+                <a:solidFill>
+                  <a:srgbClr val="5B6B86"/>
+                </a:solidFill>
+              </a:rPr>
+              <a:t>Admin DC</a:t>
+            </a:r>
+            <a:endParaRPr lang="en-US" sz="1500" dirty="0"/>
+          </a:p>
+        </p:txBody>
+      </p:sp>
+      <p:sp>
+        <p:nvSpPr>
+          <p:cNvPr id="13" name="Panah alur"/>
+          <p:cNvSpPr/>
+          <p:nvPr/>
+        </p:nvSpPr>
+        <p:spPr>
+          <a:xfrm>
+            <a:off x="6007608" y="2263140"/>
+            <a:ext cx="173736" cy="0"/>
+          </a:xfrm>
+          <a:prstGeom prst="line">
+            <a:avLst/>
+          </a:prstGeom>
+          <a:noFill/>
+          <a:ln w="25400">
+            <a:solidFill>
+              <a:srgbClr val="3D6FC2"/>
+            </a:solidFill>
+            <a:prstDash val="solid"/>
+            <a:tailEnd type="triangle"/>
+          </a:ln>
+        </p:spPr>
+      </p:sp>
+      <p:sp>
+        <p:nvSpPr>
+          <p:cNvPr id="14" name="Tahap Transfer ke dek"/>
+          <p:cNvSpPr/>
+          <p:nvPr/>
+        </p:nvSpPr>
+        <p:spPr>
+          <a:xfrm>
+            <a:off x="6208776" y="1737360"/>
+            <a:ext cx="1627632" cy="1051560"/>
+          </a:xfrm>
+          <a:prstGeom prst="roundRect">
+            <a:avLst>
+              <a:gd name="adj" fmla="val 12174"/>
+            </a:avLst>
+          </a:prstGeom>
+          <a:solidFill>
+            <a:srgbClr val="FFFFFF"/>
+          </a:solidFill>
+          <a:ln w="12700">
+            <a:solidFill>
+              <a:srgbClr val="FFFFFF"/>
+            </a:solidFill>
+            <a:prstDash val="solid"/>
+          </a:ln>
+          <a:effectLst>
+            <a:outerShdw sx="100000" sy="100000" kx="0" ky="0" algn="bl" rotWithShape="0" blurRad="127000" dist="38100" dir="5400000">
+              <a:srgbClr val="0B1A3A">
+                <a:alpha val="14000"/>
+              </a:srgbClr>
+            </a:outerShdw>
+          </a:effectLst>
+        </p:spPr>
+      </p:sp>
+      <p:sp>
+        <p:nvSpPr>
+          <p:cNvPr id="15" name="Text 13"/>
+          <p:cNvSpPr txBox="1"/>
+          <p:nvPr/>
+        </p:nvSpPr>
+        <p:spPr>
+          <a:xfrm>
+            <a:off x="6318504" y="1847088"/>
+            <a:ext cx="1408176" cy="822960"/>
+          </a:xfrm>
+          <a:prstGeom prst="rect">
+            <a:avLst/>
+          </a:prstGeom>
+          <a:noFill/>
+          <a:ln/>
+        </p:spPr>
+        <p:txBody>
+          <a:bodyPr wrap="square" lIns="0" tIns="0" rIns="0" bIns="0" rtlCol="0" anchor="ctr"/>
+          <a:lstStyle/>
+          <a:p>
+            <a:pPr algn="ctr" indent="0" marL="0">
+              <a:buNone/>
+            </a:pPr>
+            <a:r>
+              <a:rPr lang="en-US" sz="1500" b="1" dirty="0">
+                <a:solidFill>
+                  <a:srgbClr val="0B1A3A"/>
+                </a:solidFill>
+              </a:rPr>
+              <a:t>Transfer ke dek</a:t>
+            </a:r>
+            <a:endParaRPr lang="en-US" sz="1500" dirty="0"/>
+          </a:p>
+          <a:p>
+            <a:pPr algn="ctr" indent="0" marL="0">
+              <a:buNone/>
+            </a:pPr>
+            <a:r>
+              <a:rPr lang="en-US" sz="1200" dirty="0">
+                <a:solidFill>
+                  <a:srgbClr val="5B6B86"/>
+                </a:solidFill>
+              </a:rPr>
+              <a:t>Admin DC</a:t>
+            </a:r>
+            <a:endParaRPr lang="en-US" sz="1500" dirty="0"/>
+          </a:p>
+        </p:txBody>
+      </p:sp>
+      <p:sp>
+        <p:nvSpPr>
+          <p:cNvPr id="16" name="Panah alur"/>
+          <p:cNvSpPr/>
+          <p:nvPr/>
+        </p:nvSpPr>
+        <p:spPr>
+          <a:xfrm>
+            <a:off x="7863840" y="2263140"/>
+            <a:ext cx="173736" cy="0"/>
+          </a:xfrm>
+          <a:prstGeom prst="line">
+            <a:avLst/>
+          </a:prstGeom>
+          <a:noFill/>
+          <a:ln w="25400">
+            <a:solidFill>
+              <a:srgbClr val="3D6FC2"/>
+            </a:solidFill>
+            <a:prstDash val="solid"/>
+            <a:tailEnd type="triangle"/>
+          </a:ln>
+        </p:spPr>
+      </p:sp>
+      <p:sp>
+        <p:nvSpPr>
+          <p:cNvPr id="17" name="Dokumen IT"/>
+          <p:cNvSpPr/>
+          <p:nvPr/>
+        </p:nvSpPr>
+        <p:spPr>
+          <a:xfrm>
+            <a:off x="6638544" y="2880360"/>
+            <a:ext cx="768096" cy="329184"/>
+          </a:xfrm>
+          <a:prstGeom prst="roundRect">
+            <a:avLst>
+              <a:gd name="adj" fmla="val 22222"/>
+            </a:avLst>
+          </a:prstGeom>
+          <a:solidFill>
+            <a:srgbClr val="C45C8E"/>
+          </a:solidFill>
+          <a:ln w="12700">
+            <a:solidFill>
+              <a:srgbClr val="C45C8E"/>
+            </a:solidFill>
+            <a:prstDash val="solid"/>
+          </a:ln>
+        </p:spPr>
+      </p:sp>
+      <p:sp>
+        <p:nvSpPr>
+          <p:cNvPr id="18" name="Text 16"/>
+          <p:cNvSpPr txBox="1"/>
+          <p:nvPr/>
+        </p:nvSpPr>
+        <p:spPr>
+          <a:xfrm>
+            <a:off x="6638544" y="2880360"/>
+            <a:ext cx="768096" cy="329184"/>
+          </a:xfrm>
+          <a:prstGeom prst="rect">
+            <a:avLst/>
+          </a:prstGeom>
+          <a:noFill/>
+          <a:ln/>
+        </p:spPr>
+        <p:txBody>
+          <a:bodyPr wrap="square" lIns="0" tIns="0" rIns="0" bIns="0" rtlCol="0" anchor="ctr"/>
+          <a:lstStyle/>
+          <a:p>
+            <a:pPr algn="ctr" indent="0" marL="0">
+              <a:buNone/>
+            </a:pPr>
+            <a:r>
+              <a:rPr lang="en-US" sz="1200" b="1" dirty="0">
+                <a:solidFill>
+                  <a:srgbClr val="FFFFFF"/>
+                </a:solidFill>
+              </a:rPr>
+              <a:t>IT</a:t>
+            </a:r>
+            <a:endParaRPr lang="en-US" sz="1200" dirty="0"/>
+          </a:p>
+        </p:txBody>
+      </p:sp>
+      <p:sp>
+        <p:nvSpPr>
+          <p:cNvPr id="19" name="Tahap Terima di dek"/>
+          <p:cNvSpPr/>
+          <p:nvPr/>
+        </p:nvSpPr>
+        <p:spPr>
+          <a:xfrm>
+            <a:off x="8065008" y="1737360"/>
+            <a:ext cx="1627632" cy="1051560"/>
+          </a:xfrm>
+          <a:prstGeom prst="roundRect">
+            <a:avLst>
+              <a:gd name="adj" fmla="val 12174"/>
+            </a:avLst>
+          </a:prstGeom>
+          <a:solidFill>
+            <a:srgbClr val="FFFFFF"/>
+          </a:solidFill>
+          <a:ln w="12700">
+            <a:solidFill>
+              <a:srgbClr val="FFFFFF"/>
+            </a:solidFill>
+            <a:prstDash val="solid"/>
+          </a:ln>
+          <a:effectLst>
+            <a:outerShdw sx="100000" sy="100000" kx="0" ky="0" algn="bl" rotWithShape="0" blurRad="127000" dist="38100" dir="5400000">
+              <a:srgbClr val="0B1A3A">
+                <a:alpha val="14000"/>
+              </a:srgbClr>
+            </a:outerShdw>
+          </a:effectLst>
+        </p:spPr>
+      </p:sp>
+      <p:sp>
+        <p:nvSpPr>
+          <p:cNvPr id="20" name="Text 18"/>
+          <p:cNvSpPr txBox="1"/>
+          <p:nvPr/>
+        </p:nvSpPr>
+        <p:spPr>
+          <a:xfrm>
+            <a:off x="8174736" y="1847088"/>
+            <a:ext cx="1408176" cy="822960"/>
+          </a:xfrm>
+          <a:prstGeom prst="rect">
+            <a:avLst/>
+          </a:prstGeom>
+          <a:noFill/>
+          <a:ln/>
+        </p:spPr>
+        <p:txBody>
+          <a:bodyPr wrap="square" lIns="0" tIns="0" rIns="0" bIns="0" rtlCol="0" anchor="ctr"/>
+          <a:lstStyle/>
+          <a:p>
+            <a:pPr algn="ctr" indent="0" marL="0">
+              <a:buNone/>
+            </a:pPr>
+            <a:r>
+              <a:rPr lang="en-US" sz="1500" b="1" dirty="0">
+                <a:solidFill>
+                  <a:srgbClr val="0B1A3A"/>
+                </a:solidFill>
+              </a:rPr>
+              <a:t>Terima di dek</a:t>
+            </a:r>
+            <a:endParaRPr lang="en-US" sz="1500" dirty="0"/>
+          </a:p>
+          <a:p>
+            <a:pPr algn="ctr" indent="0" marL="0">
+              <a:buNone/>
+            </a:pPr>
+            <a:r>
+              <a:rPr lang="en-US" sz="1200" dirty="0">
+                <a:solidFill>
+                  <a:srgbClr val="5B6B86"/>
+                </a:solidFill>
+              </a:rPr>
+              <a:t>Kepala toko · P2</a:t>
+            </a:r>
+            <a:endParaRPr lang="en-US" sz="1500" dirty="0"/>
+          </a:p>
+        </p:txBody>
+      </p:sp>
+      <p:sp>
+        <p:nvSpPr>
+          <p:cNvPr id="21" name="Panah alur"/>
+          <p:cNvSpPr/>
+          <p:nvPr/>
+        </p:nvSpPr>
+        <p:spPr>
+          <a:xfrm>
+            <a:off x="9720072" y="2263140"/>
+            <a:ext cx="173736" cy="0"/>
+          </a:xfrm>
+          <a:prstGeom prst="line">
+            <a:avLst/>
+          </a:prstGeom>
+          <a:noFill/>
+          <a:ln w="25400">
+            <a:solidFill>
+              <a:srgbClr val="3D6FC2"/>
+            </a:solidFill>
+            <a:prstDash val="solid"/>
+            <a:tailEnd type="triangle"/>
+          </a:ln>
+        </p:spPr>
+      </p:sp>
+      <p:sp>
+        <p:nvSpPr>
+          <p:cNvPr id="22" name="Tahap Jual di kasir"/>
+          <p:cNvSpPr/>
+          <p:nvPr/>
+        </p:nvSpPr>
+        <p:spPr>
+          <a:xfrm>
+            <a:off x="9921240" y="1737360"/>
+            <a:ext cx="1627632" cy="1051560"/>
+          </a:xfrm>
+          <a:prstGeom prst="roundRect">
+            <a:avLst>
+              <a:gd name="adj" fmla="val 12174"/>
+            </a:avLst>
+          </a:prstGeom>
+          <a:solidFill>
+            <a:srgbClr val="FFFFFF"/>
+          </a:solidFill>
+          <a:ln w="12700">
+            <a:solidFill>
+              <a:srgbClr val="FFFFFF"/>
+            </a:solidFill>
+            <a:prstDash val="solid"/>
+          </a:ln>
+          <a:effectLst>
+            <a:outerShdw sx="100000" sy="100000" kx="0" ky="0" algn="bl" rotWithShape="0" blurRad="127000" dist="38100" dir="5400000">
+              <a:srgbClr val="0B1A3A">
+                <a:alpha val="14000"/>
+              </a:srgbClr>
+            </a:outerShdw>
+          </a:effectLst>
+        </p:spPr>
+      </p:sp>
+      <p:sp>
+        <p:nvSpPr>
+          <p:cNvPr id="23" name="Text 21"/>
+          <p:cNvSpPr txBox="1"/>
+          <p:nvPr/>
+        </p:nvSpPr>
+        <p:spPr>
+          <a:xfrm>
+            <a:off x="10030968" y="1847088"/>
+            <a:ext cx="1408176" cy="822960"/>
+          </a:xfrm>
+          <a:prstGeom prst="rect">
+            <a:avLst/>
+          </a:prstGeom>
+          <a:noFill/>
+          <a:ln/>
+        </p:spPr>
+        <p:txBody>
+          <a:bodyPr wrap="square" lIns="0" tIns="0" rIns="0" bIns="0" rtlCol="0" anchor="ctr"/>
+          <a:lstStyle/>
+          <a:p>
+            <a:pPr algn="ctr" indent="0" marL="0">
+              <a:buNone/>
+            </a:pPr>
+            <a:r>
+              <a:rPr lang="en-US" sz="1500" b="1" dirty="0">
+                <a:solidFill>
+                  <a:srgbClr val="0B1A3A"/>
+                </a:solidFill>
+              </a:rPr>
+              <a:t>Jual di kasir</a:t>
+            </a:r>
+            <a:endParaRPr lang="en-US" sz="1500" dirty="0"/>
+          </a:p>
+          <a:p>
+            <a:pPr algn="ctr" indent="0" marL="0">
+              <a:buNone/>
+            </a:pPr>
+            <a:r>
+              <a:rPr lang="en-US" sz="1200" dirty="0">
+                <a:solidFill>
+                  <a:srgbClr val="5B6B86"/>
+                </a:solidFill>
+              </a:rPr>
+              <a:t>Kasir</a:t>
+            </a:r>
+            <a:endParaRPr lang="en-US" sz="1500" dirty="0"/>
+          </a:p>
+        </p:txBody>
+      </p:sp>
+      <p:sp>
+        <p:nvSpPr>
+          <p:cNvPr id="24" name="Dokumen DO"/>
+          <p:cNvSpPr/>
+          <p:nvPr/>
+        </p:nvSpPr>
+        <p:spPr>
+          <a:xfrm>
+            <a:off x="10351008" y="2880360"/>
+            <a:ext cx="768096" cy="329184"/>
+          </a:xfrm>
+          <a:prstGeom prst="roundRect">
+            <a:avLst>
+              <a:gd name="adj" fmla="val 22222"/>
+            </a:avLst>
+          </a:prstGeom>
+          <a:solidFill>
+            <a:srgbClr val="CF5140"/>
+          </a:solidFill>
+          <a:ln w="12700">
+            <a:solidFill>
+              <a:srgbClr val="CF5140"/>
+            </a:solidFill>
+            <a:prstDash val="solid"/>
+          </a:ln>
+        </p:spPr>
+      </p:sp>
+      <p:sp>
+        <p:nvSpPr>
+          <p:cNvPr id="25" name="Text 23"/>
+          <p:cNvSpPr txBox="1"/>
+          <p:nvPr/>
+        </p:nvSpPr>
+        <p:spPr>
+          <a:xfrm>
+            <a:off x="10351008" y="2880360"/>
+            <a:ext cx="768096" cy="329184"/>
+          </a:xfrm>
+          <a:prstGeom prst="rect">
+            <a:avLst/>
+          </a:prstGeom>
+          <a:noFill/>
+          <a:ln/>
+        </p:spPr>
+        <p:txBody>
+          <a:bodyPr wrap="square" lIns="0" tIns="0" rIns="0" bIns="0" rtlCol="0" anchor="ctr"/>
+          <a:lstStyle/>
+          <a:p>
+            <a:pPr algn="ctr" indent="0" marL="0">
+              <a:buNone/>
+            </a:pPr>
+            <a:r>
+              <a:rPr lang="en-US" sz="1200" b="1" dirty="0">
+                <a:solidFill>
+                  <a:srgbClr val="FFFFFF"/>
+                </a:solidFill>
+              </a:rPr>
+              <a:t>DO</a:t>
+            </a:r>
+            <a:endParaRPr lang="en-US" sz="1200" dirty="0"/>
+          </a:p>
+        </p:txBody>
+      </p:sp>
+      <p:sp>
+        <p:nvSpPr>
+          <p:cNvPr id="26" name="Text 24"/>
+          <p:cNvSpPr txBox="1"/>
+          <p:nvPr/>
+        </p:nvSpPr>
+        <p:spPr>
+          <a:xfrm>
+            <a:off x="640080" y="3703320"/>
+            <a:ext cx="3566160" cy="411480"/>
+          </a:xfrm>
+          <a:prstGeom prst="rect">
+            <a:avLst/>
+          </a:prstGeom>
+          <a:noFill/>
+          <a:ln/>
+        </p:spPr>
+        <p:txBody>
+          <a:bodyPr wrap="square" lIns="0" tIns="0" rIns="0" bIns="0" rtlCol="0" anchor="ctr"/>
+          <a:lstStyle/>
+          <a:p>
+            <a:pPr algn="r" indent="0" marL="0">
+              <a:buNone/>
+            </a:pPr>
+            <a:r>
+              <a:rPr lang="en-US" sz="1400" i="1" dirty="0">
+                <a:solidFill>
+                  <a:srgbClr val="5B6B86"/>
+                </a:solidFill>
+              </a:rPr>
+              <a:t>Bila stok DC kurang:</a:t>
+            </a:r>
+            <a:endParaRPr lang="en-US" sz="1400" dirty="0"/>
+          </a:p>
+        </p:txBody>
+      </p:sp>
+      <p:sp>
+        <p:nvSpPr>
+          <p:cNvPr id="27" name="Cabang pembelian"/>
+          <p:cNvSpPr/>
+          <p:nvPr/>
+        </p:nvSpPr>
+        <p:spPr>
+          <a:xfrm>
+            <a:off x="5166360" y="2788920"/>
+            <a:ext cx="0" cy="640080"/>
+          </a:xfrm>
+          <a:prstGeom prst="line">
+            <a:avLst/>
+          </a:prstGeom>
+          <a:noFill/>
+          <a:ln w="25400">
+            <a:solidFill>
+              <a:srgbClr val="3D6FC2"/>
+            </a:solidFill>
+            <a:prstDash val="dash"/>
+            <a:tailEnd type="triangle"/>
+          </a:ln>
+        </p:spPr>
+      </p:sp>
+      <p:sp>
+        <p:nvSpPr>
+          <p:cNvPr id="28" name="Cabang Purchase Request"/>
+          <p:cNvSpPr/>
+          <p:nvPr/>
+        </p:nvSpPr>
+        <p:spPr>
+          <a:xfrm>
+            <a:off x="4352544" y="3429000"/>
+            <a:ext cx="1627632" cy="1051560"/>
+          </a:xfrm>
+          <a:prstGeom prst="roundRect">
+            <a:avLst>
+              <a:gd name="adj" fmla="val 12174"/>
+            </a:avLst>
+          </a:prstGeom>
+          <a:solidFill>
+            <a:srgbClr val="F5F7FB"/>
+          </a:solidFill>
+          <a:ln w="12700">
+            <a:solidFill>
+              <a:srgbClr val="F5F7FB"/>
+            </a:solidFill>
+            <a:prstDash val="solid"/>
+          </a:ln>
+          <a:effectLst>
+            <a:outerShdw sx="100000" sy="100000" kx="0" ky="0" algn="bl" rotWithShape="0" blurRad="127000" dist="38100" dir="5400000">
+              <a:srgbClr val="0B1A3A">
+                <a:alpha val="14000"/>
+              </a:srgbClr>
+            </a:outerShdw>
+          </a:effectLst>
+        </p:spPr>
+      </p:sp>
+      <p:sp>
+        <p:nvSpPr>
+          <p:cNvPr id="29" name="Text 27"/>
+          <p:cNvSpPr txBox="1"/>
+          <p:nvPr/>
+        </p:nvSpPr>
+        <p:spPr>
+          <a:xfrm>
+            <a:off x="4443984" y="3538728"/>
+            <a:ext cx="1444752" cy="822960"/>
+          </a:xfrm>
+          <a:prstGeom prst="rect">
+            <a:avLst/>
+          </a:prstGeom>
+          <a:noFill/>
+          <a:ln/>
+        </p:spPr>
+        <p:txBody>
+          <a:bodyPr wrap="square" lIns="0" tIns="0" rIns="0" bIns="0" rtlCol="0" anchor="ctr"/>
+          <a:lstStyle/>
+          <a:p>
+            <a:pPr algn="ctr" indent="0" marL="0">
+              <a:buNone/>
+            </a:pPr>
+            <a:r>
+              <a:rPr lang="en-US" sz="1400" b="1" dirty="0">
+                <a:solidFill>
+                  <a:srgbClr val="0B1A3A"/>
+                </a:solidFill>
+              </a:rPr>
+              <a:t>Purchase Request</a:t>
+            </a:r>
+            <a:endParaRPr lang="en-US" sz="1400" dirty="0"/>
+          </a:p>
+          <a:p>
+            <a:pPr algn="ctr" indent="0" marL="0">
+              <a:buNone/>
+            </a:pPr>
+            <a:r>
+              <a:rPr lang="en-US" sz="1200" dirty="0">
+                <a:solidFill>
+                  <a:srgbClr val="5B6B86"/>
+                </a:solidFill>
+              </a:rPr>
+              <a:t>Approve PUR</a:t>
+            </a:r>
+            <a:endParaRPr lang="en-US" sz="1400" dirty="0"/>
+          </a:p>
+        </p:txBody>
+      </p:sp>
+      <p:sp>
+        <p:nvSpPr>
+          <p:cNvPr id="30" name="Dokumen PR"/>
+          <p:cNvSpPr/>
+          <p:nvPr/>
+        </p:nvSpPr>
+        <p:spPr>
+          <a:xfrm>
+            <a:off x="4782312" y="4572000"/>
+            <a:ext cx="768096" cy="329184"/>
+          </a:xfrm>
+          <a:prstGeom prst="roundRect">
+            <a:avLst>
+              <a:gd name="adj" fmla="val 22222"/>
+            </a:avLst>
+          </a:prstGeom>
+          <a:solidFill>
+            <a:srgbClr val="A87412"/>
+          </a:solidFill>
+          <a:ln w="12700">
+            <a:solidFill>
+              <a:srgbClr val="A87412"/>
+            </a:solidFill>
+            <a:prstDash val="solid"/>
+          </a:ln>
+        </p:spPr>
+      </p:sp>
+      <p:sp>
+        <p:nvSpPr>
+          <p:cNvPr id="31" name="Text 29"/>
+          <p:cNvSpPr txBox="1"/>
+          <p:nvPr/>
+        </p:nvSpPr>
+        <p:spPr>
+          <a:xfrm>
+            <a:off x="4782312" y="4572000"/>
+            <a:ext cx="768096" cy="329184"/>
+          </a:xfrm>
+          <a:prstGeom prst="rect">
+            <a:avLst/>
+          </a:prstGeom>
+          <a:noFill/>
+          <a:ln/>
+        </p:spPr>
+        <p:txBody>
+          <a:bodyPr wrap="square" lIns="0" tIns="0" rIns="0" bIns="0" rtlCol="0" anchor="ctr"/>
+          <a:lstStyle/>
+          <a:p>
+            <a:pPr algn="ctr" indent="0" marL="0">
+              <a:buNone/>
+            </a:pPr>
+            <a:r>
+              <a:rPr lang="en-US" sz="1200" b="1" dirty="0">
+                <a:solidFill>
+                  <a:srgbClr val="FFFFFF"/>
+                </a:solidFill>
+              </a:rPr>
+              <a:t>PR</a:t>
+            </a:r>
+            <a:endParaRPr lang="en-US" sz="1200" dirty="0"/>
+          </a:p>
+        </p:txBody>
+      </p:sp>
+      <p:sp>
+        <p:nvSpPr>
+          <p:cNvPr id="32" name="Panah cabang"/>
+          <p:cNvSpPr/>
+          <p:nvPr/>
+        </p:nvSpPr>
+        <p:spPr>
+          <a:xfrm>
+            <a:off x="6007608" y="3954780"/>
+            <a:ext cx="173736" cy="0"/>
+          </a:xfrm>
+          <a:prstGeom prst="line">
+            <a:avLst/>
+          </a:prstGeom>
+          <a:noFill/>
+          <a:ln w="25400">
+            <a:solidFill>
+              <a:srgbClr val="3D6FC2"/>
+            </a:solidFill>
+            <a:prstDash val="solid"/>
+            <a:tailEnd type="triangle"/>
+          </a:ln>
+        </p:spPr>
+      </p:sp>
+      <p:sp>
+        <p:nvSpPr>
+          <p:cNvPr id="33" name="Cabang Purchase Order"/>
+          <p:cNvSpPr/>
+          <p:nvPr/>
+        </p:nvSpPr>
+        <p:spPr>
+          <a:xfrm>
+            <a:off x="6208776" y="3429000"/>
+            <a:ext cx="1627632" cy="1051560"/>
+          </a:xfrm>
+          <a:prstGeom prst="roundRect">
+            <a:avLst>
+              <a:gd name="adj" fmla="val 12174"/>
+            </a:avLst>
+          </a:prstGeom>
+          <a:solidFill>
+            <a:srgbClr val="F5F7FB"/>
+          </a:solidFill>
+          <a:ln w="12700">
+            <a:solidFill>
+              <a:srgbClr val="F5F7FB"/>
+            </a:solidFill>
+            <a:prstDash val="solid"/>
+          </a:ln>
+          <a:effectLst>
+            <a:outerShdw sx="100000" sy="100000" kx="0" ky="0" algn="bl" rotWithShape="0" blurRad="127000" dist="38100" dir="5400000">
+              <a:srgbClr val="0B1A3A">
+                <a:alpha val="14000"/>
+              </a:srgbClr>
+            </a:outerShdw>
+          </a:effectLst>
+        </p:spPr>
+      </p:sp>
+      <p:sp>
+        <p:nvSpPr>
+          <p:cNvPr id="34" name="Text 32"/>
+          <p:cNvSpPr txBox="1"/>
+          <p:nvPr/>
+        </p:nvSpPr>
+        <p:spPr>
+          <a:xfrm>
+            <a:off x="6300216" y="3538728"/>
+            <a:ext cx="1444752" cy="822960"/>
+          </a:xfrm>
+          <a:prstGeom prst="rect">
+            <a:avLst/>
+          </a:prstGeom>
+          <a:noFill/>
+          <a:ln/>
+        </p:spPr>
+        <p:txBody>
+          <a:bodyPr wrap="square" lIns="0" tIns="0" rIns="0" bIns="0" rtlCol="0" anchor="ctr"/>
+          <a:lstStyle/>
+          <a:p>
+            <a:pPr algn="ctr" indent="0" marL="0">
+              <a:buNone/>
+            </a:pPr>
+            <a:r>
+              <a:rPr lang="en-US" sz="1400" b="1" dirty="0">
+                <a:solidFill>
+                  <a:srgbClr val="0B1A3A"/>
+                </a:solidFill>
+              </a:rPr>
+              <a:t>Purchase Order</a:t>
+            </a:r>
+            <a:endParaRPr lang="en-US" sz="1400" dirty="0"/>
+          </a:p>
+          <a:p>
+            <a:pPr algn="ctr" indent="0" marL="0">
+              <a:buNone/>
+            </a:pPr>
+            <a:r>
+              <a:rPr lang="en-US" sz="1200" dirty="0">
+                <a:solidFill>
+                  <a:srgbClr val="5B6B86"/>
+                </a:solidFill>
+              </a:rPr>
+              <a:t>Purchasing</a:t>
+            </a:r>
+            <a:endParaRPr lang="en-US" sz="1400" dirty="0"/>
+          </a:p>
+        </p:txBody>
+      </p:sp>
+      <p:sp>
+        <p:nvSpPr>
+          <p:cNvPr id="35" name="Dokumen PO"/>
+          <p:cNvSpPr/>
+          <p:nvPr/>
+        </p:nvSpPr>
+        <p:spPr>
+          <a:xfrm>
+            <a:off x="6638544" y="4572000"/>
+            <a:ext cx="768096" cy="329184"/>
+          </a:xfrm>
+          <a:prstGeom prst="roundRect">
+            <a:avLst>
+              <a:gd name="adj" fmla="val 22222"/>
+            </a:avLst>
+          </a:prstGeom>
+          <a:solidFill>
+            <a:srgbClr val="C85A1C"/>
+          </a:solidFill>
+          <a:ln w="12700">
+            <a:solidFill>
+              <a:srgbClr val="C85A1C"/>
+            </a:solidFill>
+            <a:prstDash val="solid"/>
+          </a:ln>
+        </p:spPr>
+      </p:sp>
+      <p:sp>
+        <p:nvSpPr>
+          <p:cNvPr id="36" name="Text 34"/>
+          <p:cNvSpPr txBox="1"/>
+          <p:nvPr/>
+        </p:nvSpPr>
+        <p:spPr>
+          <a:xfrm>
+            <a:off x="6638544" y="4572000"/>
+            <a:ext cx="768096" cy="329184"/>
+          </a:xfrm>
+          <a:prstGeom prst="rect">
+            <a:avLst/>
+          </a:prstGeom>
+          <a:noFill/>
+          <a:ln/>
+        </p:spPr>
+        <p:txBody>
+          <a:bodyPr wrap="square" lIns="0" tIns="0" rIns="0" bIns="0" rtlCol="0" anchor="ctr"/>
+          <a:lstStyle/>
+          <a:p>
+            <a:pPr algn="ctr" indent="0" marL="0">
+              <a:buNone/>
+            </a:pPr>
+            <a:r>
+              <a:rPr lang="en-US" sz="1200" b="1" dirty="0">
+                <a:solidFill>
+                  <a:srgbClr val="FFFFFF"/>
+                </a:solidFill>
+              </a:rPr>
+              <a:t>PO</a:t>
+            </a:r>
+            <a:endParaRPr lang="en-US" sz="1200" dirty="0"/>
+          </a:p>
+        </p:txBody>
+      </p:sp>
+      <p:sp>
+        <p:nvSpPr>
+          <p:cNvPr id="37" name="Panah cabang"/>
+          <p:cNvSpPr/>
+          <p:nvPr/>
+        </p:nvSpPr>
+        <p:spPr>
+          <a:xfrm>
+            <a:off x="7863840" y="3954780"/>
+            <a:ext cx="173736" cy="0"/>
+          </a:xfrm>
+          <a:prstGeom prst="line">
+            <a:avLst/>
+          </a:prstGeom>
+          <a:noFill/>
+          <a:ln w="25400">
+            <a:solidFill>
+              <a:srgbClr val="3D6FC2"/>
+            </a:solidFill>
+            <a:prstDash val="solid"/>
+            <a:tailEnd type="triangle"/>
+          </a:ln>
+        </p:spPr>
+      </p:sp>
+      <p:sp>
+        <p:nvSpPr>
+          <p:cNvPr id="38" name="Cabang Barang vendor tiba"/>
+          <p:cNvSpPr/>
+          <p:nvPr/>
+        </p:nvSpPr>
+        <p:spPr>
+          <a:xfrm>
+            <a:off x="8065008" y="3429000"/>
+            <a:ext cx="1627632" cy="1051560"/>
+          </a:xfrm>
+          <a:prstGeom prst="roundRect">
+            <a:avLst>
+              <a:gd name="adj" fmla="val 12174"/>
+            </a:avLst>
+          </a:prstGeom>
+          <a:solidFill>
+            <a:srgbClr val="F5F7FB"/>
+          </a:solidFill>
+          <a:ln w="12700">
+            <a:solidFill>
+              <a:srgbClr val="F5F7FB"/>
+            </a:solidFill>
+            <a:prstDash val="solid"/>
+          </a:ln>
+          <a:effectLst>
+            <a:outerShdw sx="100000" sy="100000" kx="0" ky="0" algn="bl" rotWithShape="0" blurRad="127000" dist="38100" dir="5400000">
+              <a:srgbClr val="0B1A3A">
+                <a:alpha val="14000"/>
+              </a:srgbClr>
+            </a:outerShdw>
+          </a:effectLst>
+        </p:spPr>
+      </p:sp>
+      <p:sp>
+        <p:nvSpPr>
+          <p:cNvPr id="39" name="Text 37"/>
+          <p:cNvSpPr txBox="1"/>
+          <p:nvPr/>
+        </p:nvSpPr>
+        <p:spPr>
+          <a:xfrm>
+            <a:off x="8156448" y="3538728"/>
+            <a:ext cx="1444752" cy="822960"/>
+          </a:xfrm>
+          <a:prstGeom prst="rect">
+            <a:avLst/>
+          </a:prstGeom>
+          <a:noFill/>
+          <a:ln/>
+        </p:spPr>
+        <p:txBody>
+          <a:bodyPr wrap="square" lIns="0" tIns="0" rIns="0" bIns="0" rtlCol="0" anchor="ctr"/>
+          <a:lstStyle/>
+          <a:p>
+            <a:pPr algn="ctr" indent="0" marL="0">
+              <a:buNone/>
+            </a:pPr>
+            <a:r>
+              <a:rPr lang="en-US" sz="1400" b="1" dirty="0">
+                <a:solidFill>
+                  <a:srgbClr val="0B1A3A"/>
+                </a:solidFill>
+              </a:rPr>
+              <a:t>Barang vendor tiba</a:t>
+            </a:r>
+            <a:endParaRPr lang="en-US" sz="1400" dirty="0"/>
+          </a:p>
+          <a:p>
+            <a:pPr algn="ctr" indent="0" marL="0">
+              <a:buNone/>
+            </a:pPr>
+            <a:r>
+              <a:rPr lang="en-US" sz="1200" dirty="0">
+                <a:solidFill>
+                  <a:srgbClr val="5B6B86"/>
+                </a:solidFill>
+              </a:rPr>
+              <a:t>Admin DC</a:t>
+            </a:r>
+            <a:endParaRPr lang="en-US" sz="1400" dirty="0"/>
+          </a:p>
+        </p:txBody>
+      </p:sp>
+      <p:sp>
+        <p:nvSpPr>
+          <p:cNvPr id="40" name="Dokumen GRPO"/>
+          <p:cNvSpPr/>
+          <p:nvPr/>
+        </p:nvSpPr>
+        <p:spPr>
+          <a:xfrm>
+            <a:off x="8494776" y="4572000"/>
+            <a:ext cx="768096" cy="329184"/>
+          </a:xfrm>
+          <a:prstGeom prst="roundRect">
+            <a:avLst>
+              <a:gd name="adj" fmla="val 22222"/>
+            </a:avLst>
+          </a:prstGeom>
+          <a:solidFill>
+            <a:srgbClr val="7C68B8"/>
+          </a:solidFill>
+          <a:ln w="12700">
+            <a:solidFill>
+              <a:srgbClr val="7C68B8"/>
+            </a:solidFill>
+            <a:prstDash val="solid"/>
+          </a:ln>
+        </p:spPr>
+      </p:sp>
+      <p:sp>
+        <p:nvSpPr>
+          <p:cNvPr id="41" name="Text 39"/>
+          <p:cNvSpPr txBox="1"/>
+          <p:nvPr/>
+        </p:nvSpPr>
+        <p:spPr>
+          <a:xfrm>
+            <a:off x="8494776" y="4572000"/>
+            <a:ext cx="768096" cy="329184"/>
+          </a:xfrm>
+          <a:prstGeom prst="rect">
+            <a:avLst/>
+          </a:prstGeom>
+          <a:noFill/>
+          <a:ln/>
+        </p:spPr>
+        <p:txBody>
+          <a:bodyPr wrap="square" lIns="0" tIns="0" rIns="0" bIns="0" rtlCol="0" anchor="ctr"/>
+          <a:lstStyle/>
+          <a:p>
+            <a:pPr algn="ctr" indent="0" marL="0">
+              <a:buNone/>
+            </a:pPr>
+            <a:r>
+              <a:rPr lang="en-US" sz="1200" b="1" dirty="0">
+                <a:solidFill>
+                  <a:srgbClr val="FFFFFF"/>
+                </a:solidFill>
+              </a:rPr>
+              <a:t>GRPO</a:t>
+            </a:r>
+            <a:endParaRPr lang="en-US" sz="1200" dirty="0"/>
+          </a:p>
+        </p:txBody>
+      </p:sp>
+      <p:sp>
+        <p:nvSpPr>
+          <p:cNvPr id="42" name="Kembali ke transfer"/>
+          <p:cNvSpPr/>
+          <p:nvPr/>
+        </p:nvSpPr>
+        <p:spPr>
+          <a:xfrm>
+            <a:off x="7022592" y="3273552"/>
+            <a:ext cx="1856232" cy="155448"/>
+          </a:xfrm>
+          <a:prstGeom prst="line">
+            <a:avLst/>
+          </a:prstGeom>
+          <a:noFill/>
+          <a:ln w="25400">
+            <a:solidFill>
+              <a:srgbClr val="3D6FC2"/>
+            </a:solidFill>
+            <a:prstDash val="dash"/>
+            <a:headEnd type="triangle"/>
+          </a:ln>
+        </p:spPr>
+      </p:sp>
+      <p:sp>
+        <p:nvSpPr>
+          <p:cNvPr id="43" name="Kesimpulan alur"/>
+          <p:cNvSpPr/>
+          <p:nvPr/>
+        </p:nvSpPr>
+        <p:spPr>
+          <a:xfrm>
+            <a:off x="640080" y="5257800"/>
+            <a:ext cx="10835640" cy="822960"/>
+          </a:xfrm>
+          <a:prstGeom prst="roundRect">
+            <a:avLst>
+              <a:gd name="adj" fmla="val 15556"/>
+            </a:avLst>
+          </a:prstGeom>
+          <a:solidFill>
+            <a:srgbClr val="EEF3FB"/>
+          </a:solidFill>
+          <a:ln w="12700">
+            <a:solidFill>
+              <a:srgbClr val="EEF3FB"/>
+            </a:solidFill>
+            <a:prstDash val="solid"/>
+          </a:ln>
+          <a:effectLst>
+            <a:outerShdw sx="100000" sy="100000" kx="0" ky="0" algn="bl" rotWithShape="0" blurRad="127000" dist="38100" dir="5400000">
+              <a:srgbClr val="0B1A3A">
+                <a:alpha val="14000"/>
+              </a:srgbClr>
+            </a:outerShdw>
+          </a:effectLst>
+        </p:spPr>
+      </p:sp>
+      <p:sp>
+        <p:nvSpPr>
+          <p:cNvPr id="44" name="Text 42"/>
+          <p:cNvSpPr txBox="1"/>
+          <p:nvPr/>
+        </p:nvSpPr>
+        <p:spPr>
+          <a:xfrm>
+            <a:off x="914400" y="5257800"/>
+            <a:ext cx="10332720" cy="822960"/>
+          </a:xfrm>
+          <a:prstGeom prst="rect">
+            <a:avLst/>
+          </a:prstGeom>
+          <a:noFill/>
+          <a:ln/>
+        </p:spPr>
+        <p:txBody>
+          <a:bodyPr wrap="square" lIns="0" tIns="0" rIns="0" bIns="0" rtlCol="0" anchor="ctr"/>
+          <a:lstStyle/>
+          <a:p>
+            <a:pPr indent="0" marL="0">
+              <a:buNone/>
+            </a:pPr>
+            <a:r>
+              <a:rPr lang="en-US" sz="1600" b="1" dirty="0">
+                <a:solidFill>
+                  <a:srgbClr val="0B1A3A"/>
+                </a:solidFill>
+              </a:rPr>
+              <a:t>6 jenis dokumen SAP dibuat otomatis: </a:t>
+            </a:r>
+            <a:pPr indent="0" marL="0">
+              <a:buNone/>
+            </a:pPr>
+            <a:r>
+              <a:rPr lang="en-US" sz="1600" dirty="0">
+                <a:solidFill>
+                  <a:srgbClr val="1B2437"/>
+                </a:solidFill>
+              </a:rPr>
+              <a:t>SO, PR, PO, GRPO, IT (Inventory Transfer), dan DO (Delivery Order), tanpa input ulang.</a:t>
+            </a:r>
+            <a:endParaRPr lang="en-US" sz="1600" dirty="0"/>
+          </a:p>
+        </p:txBody>
+      </p:sp>
       <p:sp>
         <p:nvSpPr>
           <p:cNvPr id="25" name="Slide Number Placeholder 0"/>
@@ -3163,7 +4182,7 @@
                   <a:schemeClr val="tx2"/>
                 </a:solidFill>
               </a:rPr>
-              <a:t>Alur end-to-end: setiap langkah tercatat di SAP</a:t>
+              <a:t>Tujuh peran, masing-masing melihat tugasnya sendiri</a:t>
             </a:r>
             <a:endParaRPr lang="en-US" sz="3400" dirty="0"/>
           </a:p>
@@ -3171,18 +4190,137 @@
       </p:sp>
       <p:sp>
         <p:nvSpPr>
-          <p:cNvPr id="3" name="Tahap Pesan ke DC"/>
+          <p:cNvPr id="3" name="Zona Kapal"/>
           <p:cNvSpPr/>
           <p:nvPr/>
         </p:nvSpPr>
         <p:spPr>
           <a:xfrm>
-            <a:off x="640080" y="1737360"/>
-            <a:ext cx="1627632" cy="1051560"/>
+            <a:off x="640080" y="1554480"/>
+            <a:ext cx="3383280" cy="2880360"/>
           </a:xfrm>
           <a:prstGeom prst="roundRect">
             <a:avLst>
-              <a:gd name="adj" fmla="val 12174"/>
+              <a:gd name="adj" fmla="val 4444"/>
+            </a:avLst>
+          </a:prstGeom>
+          <a:solidFill>
+            <a:srgbClr val="EEF3FB"/>
+          </a:solidFill>
+          <a:ln w="12700">
+            <a:solidFill>
+              <a:srgbClr val="EEF3FB"/>
+            </a:solidFill>
+            <a:prstDash val="solid"/>
+          </a:ln>
+          <a:effectLst>
+            <a:outerShdw sx="100000" sy="100000" kx="0" ky="0" algn="bl" rotWithShape="0" blurRad="127000" dist="38100" dir="5400000">
+              <a:srgbClr val="0B1A3A">
+                <a:alpha val="14000"/>
+              </a:srgbClr>
+            </a:outerShdw>
+          </a:effectLst>
+        </p:spPr>
+      </p:sp>
+      <p:sp>
+        <p:nvSpPr>
+          <p:cNvPr id="4" name="Ikon Kapal latar"/>
+          <p:cNvSpPr/>
+          <p:nvPr/>
+        </p:nvSpPr>
+        <p:spPr>
+          <a:xfrm>
+            <a:off x="914400" y="1737360"/>
+            <a:ext cx="548640" cy="548640"/>
+          </a:xfrm>
+          <a:prstGeom prst="ellipse">
+            <a:avLst/>
+          </a:prstGeom>
+          <a:solidFill>
+            <a:srgbClr val="0B1A3A"/>
+          </a:solidFill>
+          <a:ln w="12700">
+            <a:solidFill>
+              <a:srgbClr val="0B1A3A"/>
+            </a:solidFill>
+            <a:prstDash val="solid"/>
+          </a:ln>
+        </p:spPr>
+      </p:sp>
+      <p:pic>
+        <p:nvPicPr>
+          <p:cNvPr id="5" name="Ikon Kapal" descr="Ikon Kapal">    </p:cNvPr>
+          <p:cNvPicPr>
+            <a:picLocks noChangeAspect="1"/>
+          </p:cNvPicPr>
+          <p:nvPr/>
+        </p:nvPicPr>
+        <p:blipFill>
+          <a:blip r:embed="rId1"/>
+          <a:stretch>
+            <a:fillRect/>
+          </a:stretch>
+        </p:blipFill>
+        <p:spPr>
+          <a:xfrm>
+            <a:off x="1046074" y="1869034"/>
+            <a:ext cx="285293" cy="285293"/>
+          </a:xfrm>
+          <a:prstGeom prst="rect">
+            <a:avLst/>
+          </a:prstGeom>
+        </p:spPr>
+      </p:pic>
+      <p:sp>
+        <p:nvSpPr>
+          <p:cNvPr id="6" name="Text 3"/>
+          <p:cNvSpPr txBox="1"/>
+          <p:nvPr/>
+        </p:nvSpPr>
+        <p:spPr>
+          <a:xfrm>
+            <a:off x="1600200" y="1737360"/>
+            <a:ext cx="2194560" cy="548640"/>
+          </a:xfrm>
+          <a:prstGeom prst="rect">
+            <a:avLst/>
+          </a:prstGeom>
+          <a:noFill/>
+          <a:ln/>
+        </p:spPr>
+        <p:txBody>
+          <a:bodyPr wrap="square" lIns="0" tIns="0" rIns="0" bIns="0" rtlCol="0" anchor="ctr"/>
+          <a:lstStyle/>
+          <a:p>
+            <a:pPr indent="0" marL="0">
+              <a:buNone/>
+            </a:pPr>
+            <a:r>
+              <a:rPr lang="en-US" sz="2000" b="1" dirty="0">
+                <a:solidFill>
+                  <a:srgbClr val="0B1A3A"/>
+                </a:solidFill>
+              </a:rPr>
+              <a:t>Kapal</a:t>
+            </a:r>
+            <a:endParaRPr lang="en-US" sz="2000" dirty="0"/>
+          </a:p>
+        </p:txBody>
+      </p:sp>
+      <p:sp>
+        <p:nvSpPr>
+          <p:cNvPr id="7" name="Peran Admin Kapal / Kepala Toko"/>
+          <p:cNvSpPr/>
+          <p:nvPr/>
+        </p:nvSpPr>
+        <p:spPr>
+          <a:xfrm>
+            <a:off x="868680" y="2514600"/>
+            <a:ext cx="2926080" cy="731520"/>
+          </a:xfrm>
+          <a:prstGeom prst="roundRect">
+            <a:avLst>
+              <a:gd name="adj" fmla="val 17500"/>
             </a:avLst>
           </a:prstGeom>
           <a:solidFill>
@@ -3205,14 +4343,14 @@
       </p:sp>
       <p:sp>
         <p:nvSpPr>
-          <p:cNvPr id="4" name="Text 2"/>
+          <p:cNvPr id="8" name="Text 5"/>
           <p:cNvSpPr txBox="1"/>
           <p:nvPr/>
         </p:nvSpPr>
         <p:spPr>
           <a:xfrm>
-            <a:off x="749808" y="1847088"/>
-            <a:ext cx="1408176" cy="822960"/>
+            <a:off x="1051560" y="2514600"/>
+            <a:ext cx="2560320" cy="731520"/>
           </a:xfrm>
           <a:prstGeom prst="rect">
             <a:avLst/>
@@ -3224,7 +4362,7 @@
           <a:bodyPr wrap="square" lIns="0" tIns="0" rIns="0" bIns="0" rtlCol="0" anchor="ctr"/>
           <a:lstStyle/>
           <a:p>
-            <a:pPr algn="ctr" indent="0" marL="0">
+            <a:pPr indent="0" marL="0">
               <a:buNone/>
             </a:pPr>
             <a:r>
@@ -3233,12 +4371,12 @@
                   <a:srgbClr val="0B1A3A"/>
                 </a:solidFill>
               </a:rPr>
-              <a:t>Pesan ke DC</a:t>
+              <a:t>Admin Kapal / Kepala Toko</a:t>
             </a:r>
             <a:endParaRPr lang="en-US" sz="1500" dirty="0"/>
           </a:p>
           <a:p>
-            <a:pPr algn="ctr" indent="0" marL="0">
+            <a:pPr indent="0" marL="0">
               <a:buNone/>
             </a:pPr>
             <a:r>
@@ -3247,7 +4385,7 @@
                   <a:srgbClr val="5B6B86"/>
                 </a:solidFill>
               </a:rPr>
-              <a:t>Admin kapal</a:t>
+              <a:t>Pesan ke DC, terima barang di dek</a:t>
             </a:r>
             <a:endParaRPr lang="en-US" sz="1500" dirty="0"/>
           </a:p>
@@ -3255,42 +4393,18 @@
       </p:sp>
       <p:sp>
         <p:nvSpPr>
-          <p:cNvPr id="5" name="Panah alur"/>
+          <p:cNvPr id="9" name="Peran Kasir"/>
           <p:cNvSpPr/>
           <p:nvPr/>
         </p:nvSpPr>
         <p:spPr>
           <a:xfrm>
-            <a:off x="2295144" y="2263140"/>
-            <a:ext cx="173736" cy="0"/>
-          </a:xfrm>
-          <a:prstGeom prst="line">
-            <a:avLst/>
-          </a:prstGeom>
-          <a:noFill/>
-          <a:ln w="25400">
-            <a:solidFill>
-              <a:srgbClr val="3D6FC2"/>
-            </a:solidFill>
-            <a:prstDash val="solid"/>
-            <a:tailEnd type="triangle"/>
-          </a:ln>
-        </p:spPr>
-      </p:sp>
-      <p:sp>
-        <p:nvSpPr>
-          <p:cNvPr id="6" name="Tahap Approve SO"/>
-          <p:cNvSpPr/>
-          <p:nvPr/>
-        </p:nvSpPr>
-        <p:spPr>
-          <a:xfrm>
-            <a:off x="2496312" y="1737360"/>
-            <a:ext cx="1627632" cy="1051560"/>
+            <a:off x="868680" y="3383280"/>
+            <a:ext cx="2926080" cy="731520"/>
           </a:xfrm>
           <a:prstGeom prst="roundRect">
             <a:avLst>
-              <a:gd name="adj" fmla="val 12174"/>
+              <a:gd name="adj" fmla="val 17500"/>
             </a:avLst>
           </a:prstGeom>
           <a:solidFill>
@@ -3313,14 +4427,14 @@
       </p:sp>
       <p:sp>
         <p:nvSpPr>
-          <p:cNvPr id="7" name="Text 5"/>
+          <p:cNvPr id="10" name="Text 7"/>
           <p:cNvSpPr txBox="1"/>
           <p:nvPr/>
         </p:nvSpPr>
         <p:spPr>
           <a:xfrm>
-            <a:off x="2606040" y="1847088"/>
-            <a:ext cx="1408176" cy="822960"/>
+            <a:off x="1051560" y="3383280"/>
+            <a:ext cx="2560320" cy="731520"/>
           </a:xfrm>
           <a:prstGeom prst="rect">
             <a:avLst/>
@@ -3332,7 +4446,7 @@
           <a:bodyPr wrap="square" lIns="0" tIns="0" rIns="0" bIns="0" rtlCol="0" anchor="ctr"/>
           <a:lstStyle/>
           <a:p>
-            <a:pPr algn="ctr" indent="0" marL="0">
+            <a:pPr indent="0" marL="0">
               <a:buNone/>
             </a:pPr>
             <a:r>
@@ -3341,12 +4455,12 @@
                   <a:srgbClr val="0B1A3A"/>
                 </a:solidFill>
               </a:rPr>
-              <a:t>Approve SO</a:t>
+              <a:t>Kasir</a:t>
             </a:r>
             <a:endParaRPr lang="en-US" sz="1500" dirty="0"/>
           </a:p>
           <a:p>
-            <a:pPr algn="ctr" indent="0" marL="0">
+            <a:pPr indent="0" marL="0">
               <a:buNone/>
             </a:pPr>
             <a:r>
@@ -3355,7 +4469,7 @@
                   <a:srgbClr val="5B6B86"/>
                 </a:solidFill>
               </a:rPr>
-              <a:t>Kantor pusat</a:t>
+              <a:t>Jual, kirim DO harian ke SAP</a:t>
             </a:r>
             <a:endParaRPr lang="en-US" sz="1500" dirty="0"/>
           </a:p>
@@ -3363,65 +4477,97 @@
       </p:sp>
       <p:sp>
         <p:nvSpPr>
-          <p:cNvPr id="8" name="Panah alur"/>
+          <p:cNvPr id="11" name="Zona Kantor pusat"/>
           <p:cNvSpPr/>
           <p:nvPr/>
         </p:nvSpPr>
         <p:spPr>
           <a:xfrm>
-            <a:off x="4151376" y="2263140"/>
-            <a:ext cx="173736" cy="0"/>
-          </a:xfrm>
-          <a:prstGeom prst="line">
-            <a:avLst/>
-          </a:prstGeom>
-          <a:noFill/>
-          <a:ln w="25400">
-            <a:solidFill>
-              <a:srgbClr val="3D6FC2"/>
-            </a:solidFill>
-            <a:prstDash val="solid"/>
-            <a:tailEnd type="triangle"/>
-          </a:ln>
-        </p:spPr>
-      </p:sp>
-      <p:sp>
-        <p:nvSpPr>
-          <p:cNvPr id="9" name="Dokumen SO"/>
-          <p:cNvSpPr/>
-          <p:nvPr/>
-        </p:nvSpPr>
-        <p:spPr>
-          <a:xfrm>
-            <a:off x="2926080" y="2880360"/>
-            <a:ext cx="768096" cy="329184"/>
+            <a:off x="4297680" y="1554480"/>
+            <a:ext cx="4069080" cy="4617720"/>
           </a:xfrm>
           <a:prstGeom prst="roundRect">
             <a:avLst>
-              <a:gd name="adj" fmla="val 22222"/>
+              <a:gd name="adj" fmla="val 3146"/>
             </a:avLst>
           </a:prstGeom>
           <a:solidFill>
-            <a:srgbClr val="4A8A3C"/>
+            <a:srgbClr val="EEF3FB"/>
           </a:solidFill>
           <a:ln w="12700">
             <a:solidFill>
-              <a:srgbClr val="4A8A3C"/>
+              <a:srgbClr val="EEF3FB"/>
             </a:solidFill>
             <a:prstDash val="solid"/>
           </a:ln>
-        </p:spPr>
-      </p:sp>
-      <p:sp>
-        <p:nvSpPr>
-          <p:cNvPr id="10" name="Text 8"/>
+          <a:effectLst>
+            <a:outerShdw sx="100000" sy="100000" kx="0" ky="0" algn="bl" rotWithShape="0" blurRad="127000" dist="38100" dir="5400000">
+              <a:srgbClr val="0B1A3A">
+                <a:alpha val="14000"/>
+              </a:srgbClr>
+            </a:outerShdw>
+          </a:effectLst>
+        </p:spPr>
+      </p:sp>
+      <p:sp>
+        <p:nvSpPr>
+          <p:cNvPr id="12" name="Ikon Kantor pusat latar"/>
+          <p:cNvSpPr/>
+          <p:nvPr/>
+        </p:nvSpPr>
+        <p:spPr>
+          <a:xfrm>
+            <a:off x="4572000" y="1737360"/>
+            <a:ext cx="548640" cy="548640"/>
+          </a:xfrm>
+          <a:prstGeom prst="ellipse">
+            <a:avLst/>
+          </a:prstGeom>
+          <a:solidFill>
+            <a:srgbClr val="0B1A3A"/>
+          </a:solidFill>
+          <a:ln w="12700">
+            <a:solidFill>
+              <a:srgbClr val="0B1A3A"/>
+            </a:solidFill>
+            <a:prstDash val="solid"/>
+          </a:ln>
+        </p:spPr>
+      </p:sp>
+      <p:pic>
+        <p:nvPicPr>
+          <p:cNvPr id="13" name="Ikon Kantor pusat" descr="Ikon Kantor pusat">    </p:cNvPr>
+          <p:cNvPicPr>
+            <a:picLocks noChangeAspect="1"/>
+          </p:cNvPicPr>
+          <p:nvPr/>
+        </p:nvPicPr>
+        <p:blipFill>
+          <a:blip r:embed="rId2"/>
+          <a:stretch>
+            <a:fillRect/>
+          </a:stretch>
+        </p:blipFill>
+        <p:spPr>
+          <a:xfrm>
+            <a:off x="4703674" y="1869034"/>
+            <a:ext cx="285293" cy="285293"/>
+          </a:xfrm>
+          <a:prstGeom prst="rect">
+            <a:avLst/>
+          </a:prstGeom>
+        </p:spPr>
+      </p:pic>
+      <p:sp>
+        <p:nvSpPr>
+          <p:cNvPr id="14" name="Text 10"/>
           <p:cNvSpPr txBox="1"/>
           <p:nvPr/>
         </p:nvSpPr>
         <p:spPr>
           <a:xfrm>
-            <a:off x="2926080" y="2880360"/>
-            <a:ext cx="768096" cy="329184"/>
+            <a:off x="5257800" y="1737360"/>
+            <a:ext cx="2880360" cy="548640"/>
           </a:xfrm>
           <a:prstGeom prst="rect">
             <a:avLst/>
@@ -3433,35 +4579,35 @@
           <a:bodyPr wrap="square" lIns="0" tIns="0" rIns="0" bIns="0" rtlCol="0" anchor="ctr"/>
           <a:lstStyle/>
           <a:p>
-            <a:pPr algn="ctr" indent="0" marL="0">
-              <a:buNone/>
-            </a:pPr>
-            <a:r>
-              <a:rPr lang="en-US" sz="1200" b="1" dirty="0">
-                <a:solidFill>
-                  <a:srgbClr val="FFFFFF"/>
-                </a:solidFill>
-              </a:rPr>
-              <a:t>SO</a:t>
-            </a:r>
-            <a:endParaRPr lang="en-US" sz="1200" dirty="0"/>
-          </a:p>
-        </p:txBody>
-      </p:sp>
-      <p:sp>
-        <p:nvSpPr>
-          <p:cNvPr id="11" name="Tahap Pilah stok"/>
+            <a:pPr indent="0" marL="0">
+              <a:buNone/>
+            </a:pPr>
+            <a:r>
+              <a:rPr lang="en-US" sz="2000" b="1" dirty="0">
+                <a:solidFill>
+                  <a:srgbClr val="0B1A3A"/>
+                </a:solidFill>
+              </a:rPr>
+              <a:t>Kantor pusat</a:t>
+            </a:r>
+            <a:endParaRPr lang="en-US" sz="2000" dirty="0"/>
+          </a:p>
+        </p:txBody>
+      </p:sp>
+      <p:sp>
+        <p:nvSpPr>
+          <p:cNvPr id="15" name="Peran Approve SO (P2)"/>
           <p:cNvSpPr/>
           <p:nvPr/>
         </p:nvSpPr>
         <p:spPr>
           <a:xfrm>
-            <a:off x="4352544" y="1737360"/>
-            <a:ext cx="1627632" cy="1051560"/>
+            <a:off x="4526280" y="2514600"/>
+            <a:ext cx="3611880" cy="731520"/>
           </a:xfrm>
           <a:prstGeom prst="roundRect">
             <a:avLst>
-              <a:gd name="adj" fmla="val 12174"/>
+              <a:gd name="adj" fmla="val 17500"/>
             </a:avLst>
           </a:prstGeom>
           <a:solidFill>
@@ -3484,14 +4630,14 @@
       </p:sp>
       <p:sp>
         <p:nvSpPr>
-          <p:cNvPr id="12" name="Text 10"/>
+          <p:cNvPr id="16" name="Text 12"/>
           <p:cNvSpPr txBox="1"/>
           <p:nvPr/>
         </p:nvSpPr>
         <p:spPr>
           <a:xfrm>
-            <a:off x="4462272" y="1847088"/>
-            <a:ext cx="1408176" cy="822960"/>
+            <a:off x="4709160" y="2514600"/>
+            <a:ext cx="3246120" cy="731520"/>
           </a:xfrm>
           <a:prstGeom prst="rect">
             <a:avLst/>
@@ -3503,7 +4649,7 @@
           <a:bodyPr wrap="square" lIns="0" tIns="0" rIns="0" bIns="0" rtlCol="0" anchor="ctr"/>
           <a:lstStyle/>
           <a:p>
-            <a:pPr algn="ctr" indent="0" marL="0">
+            <a:pPr indent="0" marL="0">
               <a:buNone/>
             </a:pPr>
             <a:r>
@@ -3512,12 +4658,12 @@
                   <a:srgbClr val="0B1A3A"/>
                 </a:solidFill>
               </a:rPr>
-              <a:t>Pilah stok</a:t>
+              <a:t>Approve SO (P2)</a:t>
             </a:r>
             <a:endParaRPr lang="en-US" sz="1500" dirty="0"/>
           </a:p>
           <a:p>
-            <a:pPr algn="ctr" indent="0" marL="0">
+            <a:pPr indent="0" marL="0">
               <a:buNone/>
             </a:pPr>
             <a:r>
@@ -3526,7 +4672,7 @@
                   <a:srgbClr val="5B6B86"/>
                 </a:solidFill>
               </a:rPr>
-              <a:t>Admin DC</a:t>
+              <a:t>Setujui permintaan jadi Sales Order</a:t>
             </a:r>
             <a:endParaRPr lang="en-US" sz="1500" dirty="0"/>
           </a:p>
@@ -3534,42 +4680,18 @@
       </p:sp>
       <p:sp>
         <p:nvSpPr>
-          <p:cNvPr id="13" name="Panah alur"/>
+          <p:cNvPr id="17" name="Peran Approve PUR"/>
           <p:cNvSpPr/>
           <p:nvPr/>
         </p:nvSpPr>
         <p:spPr>
           <a:xfrm>
-            <a:off x="6007608" y="2263140"/>
-            <a:ext cx="173736" cy="0"/>
-          </a:xfrm>
-          <a:prstGeom prst="line">
-            <a:avLst/>
-          </a:prstGeom>
-          <a:noFill/>
-          <a:ln w="25400">
-            <a:solidFill>
-              <a:srgbClr val="3D6FC2"/>
-            </a:solidFill>
-            <a:prstDash val="solid"/>
-            <a:tailEnd type="triangle"/>
-          </a:ln>
-        </p:spPr>
-      </p:sp>
-      <p:sp>
-        <p:nvSpPr>
-          <p:cNvPr id="14" name="Tahap Transfer ke dek"/>
-          <p:cNvSpPr/>
-          <p:nvPr/>
-        </p:nvSpPr>
-        <p:spPr>
-          <a:xfrm>
-            <a:off x="6208776" y="1737360"/>
-            <a:ext cx="1627632" cy="1051560"/>
+            <a:off x="4526280" y="3383280"/>
+            <a:ext cx="3611880" cy="731520"/>
           </a:xfrm>
           <a:prstGeom prst="roundRect">
             <a:avLst>
-              <a:gd name="adj" fmla="val 12174"/>
+              <a:gd name="adj" fmla="val 17500"/>
             </a:avLst>
           </a:prstGeom>
           <a:solidFill>
@@ -3592,14 +4714,14 @@
       </p:sp>
       <p:sp>
         <p:nvSpPr>
-          <p:cNvPr id="15" name="Text 13"/>
+          <p:cNvPr id="18" name="Text 14"/>
           <p:cNvSpPr txBox="1"/>
           <p:nvPr/>
         </p:nvSpPr>
         <p:spPr>
           <a:xfrm>
-            <a:off x="6318504" y="1847088"/>
-            <a:ext cx="1408176" cy="822960"/>
+            <a:off x="4709160" y="3383280"/>
+            <a:ext cx="3246120" cy="731520"/>
           </a:xfrm>
           <a:prstGeom prst="rect">
             <a:avLst/>
@@ -3611,7 +4733,7 @@
           <a:bodyPr wrap="square" lIns="0" tIns="0" rIns="0" bIns="0" rtlCol="0" anchor="ctr"/>
           <a:lstStyle/>
           <a:p>
-            <a:pPr algn="ctr" indent="0" marL="0">
+            <a:pPr indent="0" marL="0">
               <a:buNone/>
             </a:pPr>
             <a:r>
@@ -3620,12 +4742,12 @@
                   <a:srgbClr val="0B1A3A"/>
                 </a:solidFill>
               </a:rPr>
-              <a:t>Transfer ke dek</a:t>
+              <a:t>Approve PUR</a:t>
             </a:r>
             <a:endParaRPr lang="en-US" sz="1500" dirty="0"/>
           </a:p>
           <a:p>
-            <a:pPr algn="ctr" indent="0" marL="0">
+            <a:pPr indent="0" marL="0">
               <a:buNone/>
             </a:pPr>
             <a:r>
@@ -3634,7 +4756,7 @@
                   <a:srgbClr val="5B6B86"/>
                 </a:solidFill>
               </a:rPr>
-              <a:t>Admin DC</a:t>
+              <a:t>Setujui PR, GRPO, dan transfer</a:t>
             </a:r>
             <a:endParaRPr lang="en-US" sz="1500" dirty="0"/>
           </a:p>
@@ -3642,105 +4764,18 @@
       </p:sp>
       <p:sp>
         <p:nvSpPr>
-          <p:cNvPr id="16" name="Panah alur"/>
+          <p:cNvPr id="19" name="Peran Admin Purchase"/>
           <p:cNvSpPr/>
           <p:nvPr/>
         </p:nvSpPr>
         <p:spPr>
           <a:xfrm>
-            <a:off x="7863840" y="2263140"/>
-            <a:ext cx="173736" cy="0"/>
-          </a:xfrm>
-          <a:prstGeom prst="line">
-            <a:avLst/>
-          </a:prstGeom>
-          <a:noFill/>
-          <a:ln w="25400">
-            <a:solidFill>
-              <a:srgbClr val="3D6FC2"/>
-            </a:solidFill>
-            <a:prstDash val="solid"/>
-            <a:tailEnd type="triangle"/>
-          </a:ln>
-        </p:spPr>
-      </p:sp>
-      <p:sp>
-        <p:nvSpPr>
-          <p:cNvPr id="17" name="Dokumen IT"/>
-          <p:cNvSpPr/>
-          <p:nvPr/>
-        </p:nvSpPr>
-        <p:spPr>
-          <a:xfrm>
-            <a:off x="6638544" y="2880360"/>
-            <a:ext cx="768096" cy="329184"/>
+            <a:off x="4526280" y="4251960"/>
+            <a:ext cx="3611880" cy="731520"/>
           </a:xfrm>
           <a:prstGeom prst="roundRect">
             <a:avLst>
-              <a:gd name="adj" fmla="val 22222"/>
-            </a:avLst>
-          </a:prstGeom>
-          <a:solidFill>
-            <a:srgbClr val="C45C8E"/>
-          </a:solidFill>
-          <a:ln w="12700">
-            <a:solidFill>
-              <a:srgbClr val="C45C8E"/>
-            </a:solidFill>
-            <a:prstDash val="solid"/>
-          </a:ln>
-        </p:spPr>
-      </p:sp>
-      <p:sp>
-        <p:nvSpPr>
-          <p:cNvPr id="18" name="Text 16"/>
-          <p:cNvSpPr txBox="1"/>
-          <p:nvPr/>
-        </p:nvSpPr>
-        <p:spPr>
-          <a:xfrm>
-            <a:off x="6638544" y="2880360"/>
-            <a:ext cx="768096" cy="329184"/>
-          </a:xfrm>
-          <a:prstGeom prst="rect">
-            <a:avLst/>
-          </a:prstGeom>
-          <a:noFill/>
-          <a:ln/>
-        </p:spPr>
-        <p:txBody>
-          <a:bodyPr wrap="square" lIns="0" tIns="0" rIns="0" bIns="0" rtlCol="0" anchor="ctr"/>
-          <a:lstStyle/>
-          <a:p>
-            <a:pPr algn="ctr" indent="0" marL="0">
-              <a:buNone/>
-            </a:pPr>
-            <a:r>
-              <a:rPr lang="en-US" sz="1200" b="1" dirty="0">
-                <a:solidFill>
-                  <a:srgbClr val="FFFFFF"/>
-                </a:solidFill>
-              </a:rPr>
-              <a:t>IT</a:t>
-            </a:r>
-            <a:endParaRPr lang="en-US" sz="1200" dirty="0"/>
-          </a:p>
-        </p:txBody>
-      </p:sp>
-      <p:sp>
-        <p:nvSpPr>
-          <p:cNvPr id="19" name="Tahap Terima di dek"/>
-          <p:cNvSpPr/>
-          <p:nvPr/>
-        </p:nvSpPr>
-        <p:spPr>
-          <a:xfrm>
-            <a:off x="8065008" y="1737360"/>
-            <a:ext cx="1627632" cy="1051560"/>
-          </a:xfrm>
-          <a:prstGeom prst="roundRect">
-            <a:avLst>
-              <a:gd name="adj" fmla="val 12174"/>
+              <a:gd name="adj" fmla="val 17500"/>
             </a:avLst>
           </a:prstGeom>
           <a:solidFill>
@@ -3763,14 +4798,14 @@
       </p:sp>
       <p:sp>
         <p:nvSpPr>
-          <p:cNvPr id="20" name="Text 18"/>
+          <p:cNvPr id="20" name="Text 16"/>
           <p:cNvSpPr txBox="1"/>
           <p:nvPr/>
         </p:nvSpPr>
         <p:spPr>
           <a:xfrm>
-            <a:off x="8174736" y="1847088"/>
-            <a:ext cx="1408176" cy="822960"/>
+            <a:off x="4709160" y="4251960"/>
+            <a:ext cx="3246120" cy="731520"/>
           </a:xfrm>
           <a:prstGeom prst="rect">
             <a:avLst/>
@@ -3782,7 +4817,7 @@
           <a:bodyPr wrap="square" lIns="0" tIns="0" rIns="0" bIns="0" rtlCol="0" anchor="ctr"/>
           <a:lstStyle/>
           <a:p>
-            <a:pPr algn="ctr" indent="0" marL="0">
+            <a:pPr indent="0" marL="0">
               <a:buNone/>
             </a:pPr>
             <a:r>
@@ -3791,12 +4826,12 @@
                   <a:srgbClr val="0B1A3A"/>
                 </a:solidFill>
               </a:rPr>
-              <a:t>Terima di dek</a:t>
+              <a:t>Admin Purchase</a:t>
             </a:r>
             <a:endParaRPr lang="en-US" sz="1500" dirty="0"/>
           </a:p>
           <a:p>
-            <a:pPr algn="ctr" indent="0" marL="0">
+            <a:pPr indent="0" marL="0">
               <a:buNone/>
             </a:pPr>
             <a:r>
@@ -3805,7 +4840,7 @@
                   <a:srgbClr val="5B6B86"/>
                 </a:solidFill>
               </a:rPr>
-              <a:t>Kepala toko · P2</a:t>
+              <a:t>Buat Purchase Order ke vendor</a:t>
             </a:r>
             <a:endParaRPr lang="en-US" sz="1500" dirty="0"/>
           </a:p>
@@ -3813,42 +4848,18 @@
       </p:sp>
       <p:sp>
         <p:nvSpPr>
-          <p:cNvPr id="21" name="Panah alur"/>
+          <p:cNvPr id="21" name="Peran Approve PO"/>
           <p:cNvSpPr/>
           <p:nvPr/>
         </p:nvSpPr>
         <p:spPr>
           <a:xfrm>
-            <a:off x="9720072" y="2263140"/>
-            <a:ext cx="173736" cy="0"/>
-          </a:xfrm>
-          <a:prstGeom prst="line">
-            <a:avLst/>
-          </a:prstGeom>
-          <a:noFill/>
-          <a:ln w="25400">
-            <a:solidFill>
-              <a:srgbClr val="3D6FC2"/>
-            </a:solidFill>
-            <a:prstDash val="solid"/>
-            <a:tailEnd type="triangle"/>
-          </a:ln>
-        </p:spPr>
-      </p:sp>
-      <p:sp>
-        <p:nvSpPr>
-          <p:cNvPr id="22" name="Tahap Jual di kasir"/>
-          <p:cNvSpPr/>
-          <p:nvPr/>
-        </p:nvSpPr>
-        <p:spPr>
-          <a:xfrm>
-            <a:off x="9921240" y="1737360"/>
-            <a:ext cx="1627632" cy="1051560"/>
+            <a:off x="4526280" y="5120640"/>
+            <a:ext cx="3611880" cy="731520"/>
           </a:xfrm>
           <a:prstGeom prst="roundRect">
             <a:avLst>
-              <a:gd name="adj" fmla="val 12174"/>
+              <a:gd name="adj" fmla="val 17500"/>
             </a:avLst>
           </a:prstGeom>
           <a:solidFill>
@@ -3871,14 +4882,14 @@
       </p:sp>
       <p:sp>
         <p:nvSpPr>
-          <p:cNvPr id="23" name="Text 21"/>
+          <p:cNvPr id="22" name="Text 18"/>
           <p:cNvSpPr txBox="1"/>
           <p:nvPr/>
         </p:nvSpPr>
         <p:spPr>
           <a:xfrm>
-            <a:off x="10030968" y="1847088"/>
-            <a:ext cx="1408176" cy="822960"/>
+            <a:off x="4709160" y="5120640"/>
+            <a:ext cx="3246120" cy="731520"/>
           </a:xfrm>
           <a:prstGeom prst="rect">
             <a:avLst/>
@@ -3890,7 +4901,7 @@
           <a:bodyPr wrap="square" lIns="0" tIns="0" rIns="0" bIns="0" rtlCol="0" anchor="ctr"/>
           <a:lstStyle/>
           <a:p>
-            <a:pPr algn="ctr" indent="0" marL="0">
+            <a:pPr indent="0" marL="0">
               <a:buNone/>
             </a:pPr>
             <a:r>
@@ -3899,12 +4910,12 @@
                   <a:srgbClr val="0B1A3A"/>
                 </a:solidFill>
               </a:rPr>
-              <a:t>Jual di kasir</a:t>
+              <a:t>Approve PO</a:t>
             </a:r>
             <a:endParaRPr lang="en-US" sz="1500" dirty="0"/>
           </a:p>
           <a:p>
-            <a:pPr algn="ctr" indent="0" marL="0">
+            <a:pPr indent="0" marL="0">
               <a:buNone/>
             </a:pPr>
             <a:r>
@@ -3913,7 +4924,7 @@
                   <a:srgbClr val="5B6B86"/>
                 </a:solidFill>
               </a:rPr>
-              <a:t>Kasir</a:t>
+              <a:t>Setujui Purchase Order</a:t>
             </a:r>
             <a:endParaRPr lang="en-US" sz="1500" dirty="0"/>
           </a:p>
@@ -3921,654 +4932,18 @@
       </p:sp>
       <p:sp>
         <p:nvSpPr>
-          <p:cNvPr id="24" name="Dokumen DO"/>
+          <p:cNvPr id="23" name="Zona DC"/>
           <p:cNvSpPr/>
           <p:nvPr/>
         </p:nvSpPr>
         <p:spPr>
           <a:xfrm>
-            <a:off x="10351008" y="2880360"/>
-            <a:ext cx="768096" cy="329184"/>
+            <a:off x="8641080" y="1554480"/>
+            <a:ext cx="2834640" cy="2011680"/>
           </a:xfrm>
           <a:prstGeom prst="roundRect">
             <a:avLst>
-              <a:gd name="adj" fmla="val 22222"/>
-            </a:avLst>
-          </a:prstGeom>
-          <a:solidFill>
-            <a:srgbClr val="CF5140"/>
-          </a:solidFill>
-          <a:ln w="12700">
-            <a:solidFill>
-              <a:srgbClr val="CF5140"/>
-            </a:solidFill>
-            <a:prstDash val="solid"/>
-          </a:ln>
-        </p:spPr>
-      </p:sp>
-      <p:sp>
-        <p:nvSpPr>
-          <p:cNvPr id="25" name="Text 23"/>
-          <p:cNvSpPr txBox="1"/>
-          <p:nvPr/>
-        </p:nvSpPr>
-        <p:spPr>
-          <a:xfrm>
-            <a:off x="10351008" y="2880360"/>
-            <a:ext cx="768096" cy="329184"/>
-          </a:xfrm>
-          <a:prstGeom prst="rect">
-            <a:avLst/>
-          </a:prstGeom>
-          <a:noFill/>
-          <a:ln/>
-        </p:spPr>
-        <p:txBody>
-          <a:bodyPr wrap="square" lIns="0" tIns="0" rIns="0" bIns="0" rtlCol="0" anchor="ctr"/>
-          <a:lstStyle/>
-          <a:p>
-            <a:pPr algn="ctr" indent="0" marL="0">
-              <a:buNone/>
-            </a:pPr>
-            <a:r>
-              <a:rPr lang="en-US" sz="1200" b="1" dirty="0">
-                <a:solidFill>
-                  <a:srgbClr val="FFFFFF"/>
-                </a:solidFill>
-              </a:rPr>
-              <a:t>DO</a:t>
-            </a:r>
-            <a:endParaRPr lang="en-US" sz="1200" dirty="0"/>
-          </a:p>
-        </p:txBody>
-      </p:sp>
-      <p:sp>
-        <p:nvSpPr>
-          <p:cNvPr id="26" name="Text 24"/>
-          <p:cNvSpPr txBox="1"/>
-          <p:nvPr/>
-        </p:nvSpPr>
-        <p:spPr>
-          <a:xfrm>
-            <a:off x="640080" y="3703320"/>
-            <a:ext cx="3566160" cy="411480"/>
-          </a:xfrm>
-          <a:prstGeom prst="rect">
-            <a:avLst/>
-          </a:prstGeom>
-          <a:noFill/>
-          <a:ln/>
-        </p:spPr>
-        <p:txBody>
-          <a:bodyPr wrap="square" lIns="0" tIns="0" rIns="0" bIns="0" rtlCol="0" anchor="ctr"/>
-          <a:lstStyle/>
-          <a:p>
-            <a:pPr algn="r" indent="0" marL="0">
-              <a:buNone/>
-            </a:pPr>
-            <a:r>
-              <a:rPr lang="en-US" sz="1400" i="1" dirty="0">
-                <a:solidFill>
-                  <a:srgbClr val="5B6B86"/>
-                </a:solidFill>
-              </a:rPr>
-              <a:t>Bila stok DC kurang:</a:t>
-            </a:r>
-            <a:endParaRPr lang="en-US" sz="1400" dirty="0"/>
-          </a:p>
-        </p:txBody>
-      </p:sp>
-      <p:sp>
-        <p:nvSpPr>
-          <p:cNvPr id="27" name="Cabang pembelian"/>
-          <p:cNvSpPr/>
-          <p:nvPr/>
-        </p:nvSpPr>
-        <p:spPr>
-          <a:xfrm>
-            <a:off x="5166360" y="2788920"/>
-            <a:ext cx="0" cy="640080"/>
-          </a:xfrm>
-          <a:prstGeom prst="line">
-            <a:avLst/>
-          </a:prstGeom>
-          <a:noFill/>
-          <a:ln w="25400">
-            <a:solidFill>
-              <a:srgbClr val="3D6FC2"/>
-            </a:solidFill>
-            <a:prstDash val="dash"/>
-            <a:tailEnd type="triangle"/>
-          </a:ln>
-        </p:spPr>
-      </p:sp>
-      <p:sp>
-        <p:nvSpPr>
-          <p:cNvPr id="28" name="Cabang Purchase Request"/>
-          <p:cNvSpPr/>
-          <p:nvPr/>
-        </p:nvSpPr>
-        <p:spPr>
-          <a:xfrm>
-            <a:off x="4352544" y="3429000"/>
-            <a:ext cx="1627632" cy="1051560"/>
-          </a:xfrm>
-          <a:prstGeom prst="roundRect">
-            <a:avLst>
-              <a:gd name="adj" fmla="val 12174"/>
-            </a:avLst>
-          </a:prstGeom>
-          <a:solidFill>
-            <a:srgbClr val="F5F7FB"/>
-          </a:solidFill>
-          <a:ln w="12700">
-            <a:solidFill>
-              <a:srgbClr val="F5F7FB"/>
-            </a:solidFill>
-            <a:prstDash val="solid"/>
-          </a:ln>
-          <a:effectLst>
-            <a:outerShdw sx="100000" sy="100000" kx="0" ky="0" algn="bl" rotWithShape="0" blurRad="127000" dist="38100" dir="5400000">
-              <a:srgbClr val="0B1A3A">
-                <a:alpha val="14000"/>
-              </a:srgbClr>
-            </a:outerShdw>
-          </a:effectLst>
-        </p:spPr>
-      </p:sp>
-      <p:sp>
-        <p:nvSpPr>
-          <p:cNvPr id="29" name="Text 27"/>
-          <p:cNvSpPr txBox="1"/>
-          <p:nvPr/>
-        </p:nvSpPr>
-        <p:spPr>
-          <a:xfrm>
-            <a:off x="4443984" y="3538728"/>
-            <a:ext cx="1444752" cy="822960"/>
-          </a:xfrm>
-          <a:prstGeom prst="rect">
-            <a:avLst/>
-          </a:prstGeom>
-          <a:noFill/>
-          <a:ln/>
-        </p:spPr>
-        <p:txBody>
-          <a:bodyPr wrap="square" lIns="0" tIns="0" rIns="0" bIns="0" rtlCol="0" anchor="ctr"/>
-          <a:lstStyle/>
-          <a:p>
-            <a:pPr algn="ctr" indent="0" marL="0">
-              <a:buNone/>
-            </a:pPr>
-            <a:r>
-              <a:rPr lang="en-US" sz="1400" b="1" dirty="0">
-                <a:solidFill>
-                  <a:srgbClr val="0B1A3A"/>
-                </a:solidFill>
-              </a:rPr>
-              <a:t>Purchase Request</a:t>
-            </a:r>
-            <a:endParaRPr lang="en-US" sz="1400" dirty="0"/>
-          </a:p>
-          <a:p>
-            <a:pPr algn="ctr" indent="0" marL="0">
-              <a:buNone/>
-            </a:pPr>
-            <a:r>
-              <a:rPr lang="en-US" sz="1200" dirty="0">
-                <a:solidFill>
-                  <a:srgbClr val="5B6B86"/>
-                </a:solidFill>
-              </a:rPr>
-              <a:t>Approve PUR</a:t>
-            </a:r>
-            <a:endParaRPr lang="en-US" sz="1400" dirty="0"/>
-          </a:p>
-        </p:txBody>
-      </p:sp>
-      <p:sp>
-        <p:nvSpPr>
-          <p:cNvPr id="30" name="Dokumen PR"/>
-          <p:cNvSpPr/>
-          <p:nvPr/>
-        </p:nvSpPr>
-        <p:spPr>
-          <a:xfrm>
-            <a:off x="4782312" y="4572000"/>
-            <a:ext cx="768096" cy="329184"/>
-          </a:xfrm>
-          <a:prstGeom prst="roundRect">
-            <a:avLst>
-              <a:gd name="adj" fmla="val 22222"/>
-            </a:avLst>
-          </a:prstGeom>
-          <a:solidFill>
-            <a:srgbClr val="A87412"/>
-          </a:solidFill>
-          <a:ln w="12700">
-            <a:solidFill>
-              <a:srgbClr val="A87412"/>
-            </a:solidFill>
-            <a:prstDash val="solid"/>
-          </a:ln>
-        </p:spPr>
-      </p:sp>
-      <p:sp>
-        <p:nvSpPr>
-          <p:cNvPr id="31" name="Text 29"/>
-          <p:cNvSpPr txBox="1"/>
-          <p:nvPr/>
-        </p:nvSpPr>
-        <p:spPr>
-          <a:xfrm>
-            <a:off x="4782312" y="4572000"/>
-            <a:ext cx="768096" cy="329184"/>
-          </a:xfrm>
-          <a:prstGeom prst="rect">
-            <a:avLst/>
-          </a:prstGeom>
-          <a:noFill/>
-          <a:ln/>
-        </p:spPr>
-        <p:txBody>
-          <a:bodyPr wrap="square" lIns="0" tIns="0" rIns="0" bIns="0" rtlCol="0" anchor="ctr"/>
-          <a:lstStyle/>
-          <a:p>
-            <a:pPr algn="ctr" indent="0" marL="0">
-              <a:buNone/>
-            </a:pPr>
-            <a:r>
-              <a:rPr lang="en-US" sz="1200" b="1" dirty="0">
-                <a:solidFill>
-                  <a:srgbClr val="FFFFFF"/>
-                </a:solidFill>
-              </a:rPr>
-              <a:t>PR</a:t>
-            </a:r>
-            <a:endParaRPr lang="en-US" sz="1200" dirty="0"/>
-          </a:p>
-        </p:txBody>
-      </p:sp>
-      <p:sp>
-        <p:nvSpPr>
-          <p:cNvPr id="32" name="Panah cabang"/>
-          <p:cNvSpPr/>
-          <p:nvPr/>
-        </p:nvSpPr>
-        <p:spPr>
-          <a:xfrm>
-            <a:off x="6007608" y="3954780"/>
-            <a:ext cx="173736" cy="0"/>
-          </a:xfrm>
-          <a:prstGeom prst="line">
-            <a:avLst/>
-          </a:prstGeom>
-          <a:noFill/>
-          <a:ln w="25400">
-            <a:solidFill>
-              <a:srgbClr val="3D6FC2"/>
-            </a:solidFill>
-            <a:prstDash val="solid"/>
-            <a:tailEnd type="triangle"/>
-          </a:ln>
-        </p:spPr>
-      </p:sp>
-      <p:sp>
-        <p:nvSpPr>
-          <p:cNvPr id="33" name="Cabang Purchase Order"/>
-          <p:cNvSpPr/>
-          <p:nvPr/>
-        </p:nvSpPr>
-        <p:spPr>
-          <a:xfrm>
-            <a:off x="6208776" y="3429000"/>
-            <a:ext cx="1627632" cy="1051560"/>
-          </a:xfrm>
-          <a:prstGeom prst="roundRect">
-            <a:avLst>
-              <a:gd name="adj" fmla="val 12174"/>
-            </a:avLst>
-          </a:prstGeom>
-          <a:solidFill>
-            <a:srgbClr val="F5F7FB"/>
-          </a:solidFill>
-          <a:ln w="12700">
-            <a:solidFill>
-              <a:srgbClr val="F5F7FB"/>
-            </a:solidFill>
-            <a:prstDash val="solid"/>
-          </a:ln>
-          <a:effectLst>
-            <a:outerShdw sx="100000" sy="100000" kx="0" ky="0" algn="bl" rotWithShape="0" blurRad="127000" dist="38100" dir="5400000">
-              <a:srgbClr val="0B1A3A">
-                <a:alpha val="14000"/>
-              </a:srgbClr>
-            </a:outerShdw>
-          </a:effectLst>
-        </p:spPr>
-      </p:sp>
-      <p:sp>
-        <p:nvSpPr>
-          <p:cNvPr id="34" name="Text 32"/>
-          <p:cNvSpPr txBox="1"/>
-          <p:nvPr/>
-        </p:nvSpPr>
-        <p:spPr>
-          <a:xfrm>
-            <a:off x="6300216" y="3538728"/>
-            <a:ext cx="1444752" cy="822960"/>
-          </a:xfrm>
-          <a:prstGeom prst="rect">
-            <a:avLst/>
-          </a:prstGeom>
-          <a:noFill/>
-          <a:ln/>
-        </p:spPr>
-        <p:txBody>
-          <a:bodyPr wrap="square" lIns="0" tIns="0" rIns="0" bIns="0" rtlCol="0" anchor="ctr"/>
-          <a:lstStyle/>
-          <a:p>
-            <a:pPr algn="ctr" indent="0" marL="0">
-              <a:buNone/>
-            </a:pPr>
-            <a:r>
-              <a:rPr lang="en-US" sz="1400" b="1" dirty="0">
-                <a:solidFill>
-                  <a:srgbClr val="0B1A3A"/>
-                </a:solidFill>
-              </a:rPr>
-              <a:t>Purchase Order</a:t>
-            </a:r>
-            <a:endParaRPr lang="en-US" sz="1400" dirty="0"/>
-          </a:p>
-          <a:p>
-            <a:pPr algn="ctr" indent="0" marL="0">
-              <a:buNone/>
-            </a:pPr>
-            <a:r>
-              <a:rPr lang="en-US" sz="1200" dirty="0">
-                <a:solidFill>
-                  <a:srgbClr val="5B6B86"/>
-                </a:solidFill>
-              </a:rPr>
-              <a:t>Purchasing</a:t>
-            </a:r>
-            <a:endParaRPr lang="en-US" sz="1400" dirty="0"/>
-          </a:p>
-        </p:txBody>
-      </p:sp>
-      <p:sp>
-        <p:nvSpPr>
-          <p:cNvPr id="35" name="Dokumen PO"/>
-          <p:cNvSpPr/>
-          <p:nvPr/>
-        </p:nvSpPr>
-        <p:spPr>
-          <a:xfrm>
-            <a:off x="6638544" y="4572000"/>
-            <a:ext cx="768096" cy="329184"/>
-          </a:xfrm>
-          <a:prstGeom prst="roundRect">
-            <a:avLst>
-              <a:gd name="adj" fmla="val 22222"/>
-            </a:avLst>
-          </a:prstGeom>
-          <a:solidFill>
-            <a:srgbClr val="C85A1C"/>
-          </a:solidFill>
-          <a:ln w="12700">
-            <a:solidFill>
-              <a:srgbClr val="C85A1C"/>
-            </a:solidFill>
-            <a:prstDash val="solid"/>
-          </a:ln>
-        </p:spPr>
-      </p:sp>
-      <p:sp>
-        <p:nvSpPr>
-          <p:cNvPr id="36" name="Text 34"/>
-          <p:cNvSpPr txBox="1"/>
-          <p:nvPr/>
-        </p:nvSpPr>
-        <p:spPr>
-          <a:xfrm>
-            <a:off x="6638544" y="4572000"/>
-            <a:ext cx="768096" cy="329184"/>
-          </a:xfrm>
-          <a:prstGeom prst="rect">
-            <a:avLst/>
-          </a:prstGeom>
-          <a:noFill/>
-          <a:ln/>
-        </p:spPr>
-        <p:txBody>
-          <a:bodyPr wrap="square" lIns="0" tIns="0" rIns="0" bIns="0" rtlCol="0" anchor="ctr"/>
-          <a:lstStyle/>
-          <a:p>
-            <a:pPr algn="ctr" indent="0" marL="0">
-              <a:buNone/>
-            </a:pPr>
-            <a:r>
-              <a:rPr lang="en-US" sz="1200" b="1" dirty="0">
-                <a:solidFill>
-                  <a:srgbClr val="FFFFFF"/>
-                </a:solidFill>
-              </a:rPr>
-              <a:t>PO</a:t>
-            </a:r>
-            <a:endParaRPr lang="en-US" sz="1200" dirty="0"/>
-          </a:p>
-        </p:txBody>
-      </p:sp>
-      <p:sp>
-        <p:nvSpPr>
-          <p:cNvPr id="37" name="Panah cabang"/>
-          <p:cNvSpPr/>
-          <p:nvPr/>
-        </p:nvSpPr>
-        <p:spPr>
-          <a:xfrm>
-            <a:off x="7863840" y="3954780"/>
-            <a:ext cx="173736" cy="0"/>
-          </a:xfrm>
-          <a:prstGeom prst="line">
-            <a:avLst/>
-          </a:prstGeom>
-          <a:noFill/>
-          <a:ln w="25400">
-            <a:solidFill>
-              <a:srgbClr val="3D6FC2"/>
-            </a:solidFill>
-            <a:prstDash val="solid"/>
-            <a:tailEnd type="triangle"/>
-          </a:ln>
-        </p:spPr>
-      </p:sp>
-      <p:sp>
-        <p:nvSpPr>
-          <p:cNvPr id="38" name="Cabang Barang vendor tiba"/>
-          <p:cNvSpPr/>
-          <p:nvPr/>
-        </p:nvSpPr>
-        <p:spPr>
-          <a:xfrm>
-            <a:off x="8065008" y="3429000"/>
-            <a:ext cx="1627632" cy="1051560"/>
-          </a:xfrm>
-          <a:prstGeom prst="roundRect">
-            <a:avLst>
-              <a:gd name="adj" fmla="val 12174"/>
-            </a:avLst>
-          </a:prstGeom>
-          <a:solidFill>
-            <a:srgbClr val="F5F7FB"/>
-          </a:solidFill>
-          <a:ln w="12700">
-            <a:solidFill>
-              <a:srgbClr val="F5F7FB"/>
-            </a:solidFill>
-            <a:prstDash val="solid"/>
-          </a:ln>
-          <a:effectLst>
-            <a:outerShdw sx="100000" sy="100000" kx="0" ky="0" algn="bl" rotWithShape="0" blurRad="127000" dist="38100" dir="5400000">
-              <a:srgbClr val="0B1A3A">
-                <a:alpha val="14000"/>
-              </a:srgbClr>
-            </a:outerShdw>
-          </a:effectLst>
-        </p:spPr>
-      </p:sp>
-      <p:sp>
-        <p:nvSpPr>
-          <p:cNvPr id="39" name="Text 37"/>
-          <p:cNvSpPr txBox="1"/>
-          <p:nvPr/>
-        </p:nvSpPr>
-        <p:spPr>
-          <a:xfrm>
-            <a:off x="8156448" y="3538728"/>
-            <a:ext cx="1444752" cy="822960"/>
-          </a:xfrm>
-          <a:prstGeom prst="rect">
-            <a:avLst/>
-          </a:prstGeom>
-          <a:noFill/>
-          <a:ln/>
-        </p:spPr>
-        <p:txBody>
-          <a:bodyPr wrap="square" lIns="0" tIns="0" rIns="0" bIns="0" rtlCol="0" anchor="ctr"/>
-          <a:lstStyle/>
-          <a:p>
-            <a:pPr algn="ctr" indent="0" marL="0">
-              <a:buNone/>
-            </a:pPr>
-            <a:r>
-              <a:rPr lang="en-US" sz="1400" b="1" dirty="0">
-                <a:solidFill>
-                  <a:srgbClr val="0B1A3A"/>
-                </a:solidFill>
-              </a:rPr>
-              <a:t>Barang vendor tiba</a:t>
-            </a:r>
-            <a:endParaRPr lang="en-US" sz="1400" dirty="0"/>
-          </a:p>
-          <a:p>
-            <a:pPr algn="ctr" indent="0" marL="0">
-              <a:buNone/>
-            </a:pPr>
-            <a:r>
-              <a:rPr lang="en-US" sz="1200" dirty="0">
-                <a:solidFill>
-                  <a:srgbClr val="5B6B86"/>
-                </a:solidFill>
-              </a:rPr>
-              <a:t>Admin DC</a:t>
-            </a:r>
-            <a:endParaRPr lang="en-US" sz="1400" dirty="0"/>
-          </a:p>
-        </p:txBody>
-      </p:sp>
-      <p:sp>
-        <p:nvSpPr>
-          <p:cNvPr id="40" name="Dokumen GRPO"/>
-          <p:cNvSpPr/>
-          <p:nvPr/>
-        </p:nvSpPr>
-        <p:spPr>
-          <a:xfrm>
-            <a:off x="8494776" y="4572000"/>
-            <a:ext cx="768096" cy="329184"/>
-          </a:xfrm>
-          <a:prstGeom prst="roundRect">
-            <a:avLst>
-              <a:gd name="adj" fmla="val 22222"/>
-            </a:avLst>
-          </a:prstGeom>
-          <a:solidFill>
-            <a:srgbClr val="7C68B8"/>
-          </a:solidFill>
-          <a:ln w="12700">
-            <a:solidFill>
-              <a:srgbClr val="7C68B8"/>
-            </a:solidFill>
-            <a:prstDash val="solid"/>
-          </a:ln>
-        </p:spPr>
-      </p:sp>
-      <p:sp>
-        <p:nvSpPr>
-          <p:cNvPr id="41" name="Text 39"/>
-          <p:cNvSpPr txBox="1"/>
-          <p:nvPr/>
-        </p:nvSpPr>
-        <p:spPr>
-          <a:xfrm>
-            <a:off x="8494776" y="4572000"/>
-            <a:ext cx="768096" cy="329184"/>
-          </a:xfrm>
-          <a:prstGeom prst="rect">
-            <a:avLst/>
-          </a:prstGeom>
-          <a:noFill/>
-          <a:ln/>
-        </p:spPr>
-        <p:txBody>
-          <a:bodyPr wrap="square" lIns="0" tIns="0" rIns="0" bIns="0" rtlCol="0" anchor="ctr"/>
-          <a:lstStyle/>
-          <a:p>
-            <a:pPr algn="ctr" indent="0" marL="0">
-              <a:buNone/>
-            </a:pPr>
-            <a:r>
-              <a:rPr lang="en-US" sz="1200" b="1" dirty="0">
-                <a:solidFill>
-                  <a:srgbClr val="FFFFFF"/>
-                </a:solidFill>
-              </a:rPr>
-              <a:t>GRPO</a:t>
-            </a:r>
-            <a:endParaRPr lang="en-US" sz="1200" dirty="0"/>
-          </a:p>
-        </p:txBody>
-      </p:sp>
-      <p:sp>
-        <p:nvSpPr>
-          <p:cNvPr id="42" name="Kembali ke transfer"/>
-          <p:cNvSpPr/>
-          <p:nvPr/>
-        </p:nvSpPr>
-        <p:spPr>
-          <a:xfrm>
-            <a:off x="7022592" y="3273552"/>
-            <a:ext cx="1856232" cy="155448"/>
-          </a:xfrm>
-          <a:prstGeom prst="line">
-            <a:avLst/>
-          </a:prstGeom>
-          <a:noFill/>
-          <a:ln w="25400">
-            <a:solidFill>
-              <a:srgbClr val="3D6FC2"/>
-            </a:solidFill>
-            <a:prstDash val="dash"/>
-            <a:headEnd type="triangle"/>
-          </a:ln>
-        </p:spPr>
-      </p:sp>
-      <p:sp>
-        <p:nvSpPr>
-          <p:cNvPr id="43" name="Kesimpulan alur"/>
-          <p:cNvSpPr/>
-          <p:nvPr/>
-        </p:nvSpPr>
-        <p:spPr>
-          <a:xfrm>
-            <a:off x="640080" y="5257800"/>
-            <a:ext cx="10835640" cy="822960"/>
-          </a:xfrm>
-          <a:prstGeom prst="roundRect">
-            <a:avLst>
-              <a:gd name="adj" fmla="val 15556"/>
+              <a:gd name="adj" fmla="val 6364"/>
             </a:avLst>
           </a:prstGeom>
           <a:solidFill>
@@ -4591,14 +4966,63 @@
       </p:sp>
       <p:sp>
         <p:nvSpPr>
-          <p:cNvPr id="44" name="Text 42"/>
+          <p:cNvPr id="24" name="Ikon DC latar"/>
+          <p:cNvSpPr/>
+          <p:nvPr/>
+        </p:nvSpPr>
+        <p:spPr>
+          <a:xfrm>
+            <a:off x="8915400" y="1737360"/>
+            <a:ext cx="548640" cy="548640"/>
+          </a:xfrm>
+          <a:prstGeom prst="ellipse">
+            <a:avLst/>
+          </a:prstGeom>
+          <a:solidFill>
+            <a:srgbClr val="0B1A3A"/>
+          </a:solidFill>
+          <a:ln w="12700">
+            <a:solidFill>
+              <a:srgbClr val="0B1A3A"/>
+            </a:solidFill>
+            <a:prstDash val="solid"/>
+          </a:ln>
+        </p:spPr>
+      </p:sp>
+      <p:pic>
+        <p:nvPicPr>
+          <p:cNvPr id="25" name="Ikon DC" descr="Ikon DC">    </p:cNvPr>
+          <p:cNvPicPr>
+            <a:picLocks noChangeAspect="1"/>
+          </p:cNvPicPr>
+          <p:nvPr/>
+        </p:nvPicPr>
+        <p:blipFill>
+          <a:blip r:embed="rId3"/>
+          <a:stretch>
+            <a:fillRect/>
+          </a:stretch>
+        </p:blipFill>
+        <p:spPr>
+          <a:xfrm>
+            <a:off x="9047074" y="1869034"/>
+            <a:ext cx="285293" cy="285293"/>
+          </a:xfrm>
+          <a:prstGeom prst="rect">
+            <a:avLst/>
+          </a:prstGeom>
+        </p:spPr>
+      </p:pic>
+      <p:sp>
+        <p:nvSpPr>
+          <p:cNvPr id="26" name="Text 21"/>
           <p:cNvSpPr txBox="1"/>
           <p:nvPr/>
         </p:nvSpPr>
         <p:spPr>
           <a:xfrm>
-            <a:off x="914400" y="5257800"/>
-            <a:ext cx="10332720" cy="822960"/>
+            <a:off x="9601200" y="1737360"/>
+            <a:ext cx="1645920" cy="548640"/>
           </a:xfrm>
           <a:prstGeom prst="rect">
             <a:avLst/>
@@ -4614,25 +5038,98 @@
               <a:buNone/>
             </a:pPr>
             <a:r>
-              <a:rPr lang="en-US" sz="1600" b="1" dirty="0">
+              <a:rPr lang="en-US" sz="2000" b="1" dirty="0">
                 <a:solidFill>
                   <a:srgbClr val="0B1A3A"/>
                 </a:solidFill>
               </a:rPr>
-              <a:t>6 jenis dokumen SAP dibuat otomatis: </a:t>
-            </a:r>
+              <a:t>DC</a:t>
+            </a:r>
+            <a:endParaRPr lang="en-US" sz="2000" dirty="0"/>
+          </a:p>
+        </p:txBody>
+      </p:sp>
+      <p:sp>
+        <p:nvSpPr>
+          <p:cNvPr id="27" name="Peran Admin DC"/>
+          <p:cNvSpPr/>
+          <p:nvPr/>
+        </p:nvSpPr>
+        <p:spPr>
+          <a:xfrm>
+            <a:off x="8869680" y="2514600"/>
+            <a:ext cx="2377440" cy="731520"/>
+          </a:xfrm>
+          <a:prstGeom prst="roundRect">
+            <a:avLst>
+              <a:gd name="adj" fmla="val 17500"/>
+            </a:avLst>
+          </a:prstGeom>
+          <a:solidFill>
+            <a:srgbClr val="FFFFFF"/>
+          </a:solidFill>
+          <a:ln w="12700">
+            <a:solidFill>
+              <a:srgbClr val="FFFFFF"/>
+            </a:solidFill>
+            <a:prstDash val="solid"/>
+          </a:ln>
+          <a:effectLst>
+            <a:outerShdw sx="100000" sy="100000" kx="0" ky="0" algn="bl" rotWithShape="0" blurRad="127000" dist="38100" dir="5400000">
+              <a:srgbClr val="0B1A3A">
+                <a:alpha val="14000"/>
+              </a:srgbClr>
+            </a:outerShdw>
+          </a:effectLst>
+        </p:spPr>
+      </p:sp>
+      <p:sp>
+        <p:nvSpPr>
+          <p:cNvPr id="28" name="Text 23"/>
+          <p:cNvSpPr txBox="1"/>
+          <p:nvPr/>
+        </p:nvSpPr>
+        <p:spPr>
+          <a:xfrm>
+            <a:off x="9052560" y="2514600"/>
+            <a:ext cx="2011680" cy="731520"/>
+          </a:xfrm>
+          <a:prstGeom prst="rect">
+            <a:avLst/>
+          </a:prstGeom>
+          <a:noFill/>
+          <a:ln/>
+        </p:spPr>
+        <p:txBody>
+          <a:bodyPr wrap="square" lIns="0" tIns="0" rIns="0" bIns="0" rtlCol="0" anchor="ctr"/>
+          <a:lstStyle/>
+          <a:p>
             <a:pPr indent="0" marL="0">
               <a:buNone/>
             </a:pPr>
             <a:r>
-              <a:rPr lang="en-US" sz="1600" dirty="0">
-                <a:solidFill>
-                  <a:srgbClr val="1B2437"/>
-                </a:solidFill>
-              </a:rPr>
-              <a:t>SO, PR, PO, GRPO, IT (Inventory Transfer), dan DO (Delivery Order), tanpa input ulang.</a:t>
-            </a:r>
-            <a:endParaRPr lang="en-US" sz="1600" dirty="0"/>
+              <a:rPr lang="en-US" sz="1500" b="1" dirty="0">
+                <a:solidFill>
+                  <a:srgbClr val="0B1A3A"/>
+                </a:solidFill>
+              </a:rPr>
+              <a:t>Admin DC</a:t>
+            </a:r>
+            <a:endParaRPr lang="en-US" sz="1500" dirty="0"/>
+          </a:p>
+          <a:p>
+            <a:pPr indent="0" marL="0">
+              <a:buNone/>
+            </a:pPr>
+            <a:r>
+              <a:rPr lang="en-US" sz="1200" dirty="0">
+                <a:solidFill>
+                  <a:srgbClr val="5B6B86"/>
+                </a:solidFill>
+              </a:rPr>
+              <a:t>Pilah stok, ajukan GRPO dan transfer</a:t>
+            </a:r>
+            <a:endParaRPr lang="en-US" sz="1500" dirty="0"/>
           </a:p>
         </p:txBody>
       </p:sp>
@@ -4738,7 +5235,7 @@
                   <a:schemeClr val="tx2"/>
                 </a:solidFill>
               </a:rPr>
-              <a:t>Tujuh peran, masing-masing melihat tugasnya sendiri</a:t>
+              <a:t>Fitur utama aplikasi web</a:t>
             </a:r>
             <a:endParaRPr lang="en-US" sz="3400" dirty="0"/>
           </a:p>
@@ -4746,137 +5243,18 @@
       </p:sp>
       <p:sp>
         <p:nvSpPr>
-          <p:cNvPr id="3" name="Zona Kapal"/>
+          <p:cNvPr id="3" name="Fitur Pesan ke DC"/>
           <p:cNvSpPr/>
           <p:nvPr/>
         </p:nvSpPr>
         <p:spPr>
           <a:xfrm>
-            <a:off x="640080" y="1554480"/>
-            <a:ext cx="3383280" cy="2880360"/>
+            <a:off x="640080" y="1508760"/>
+            <a:ext cx="3429000" cy="4526280"/>
           </a:xfrm>
           <a:prstGeom prst="roundRect">
             <a:avLst>
-              <a:gd name="adj" fmla="val 4444"/>
-            </a:avLst>
-          </a:prstGeom>
-          <a:solidFill>
-            <a:srgbClr val="EEF3FB"/>
-          </a:solidFill>
-          <a:ln w="12700">
-            <a:solidFill>
-              <a:srgbClr val="EEF3FB"/>
-            </a:solidFill>
-            <a:prstDash val="solid"/>
-          </a:ln>
-          <a:effectLst>
-            <a:outerShdw sx="100000" sy="100000" kx="0" ky="0" algn="bl" rotWithShape="0" blurRad="127000" dist="38100" dir="5400000">
-              <a:srgbClr val="0B1A3A">
-                <a:alpha val="14000"/>
-              </a:srgbClr>
-            </a:outerShdw>
-          </a:effectLst>
-        </p:spPr>
-      </p:sp>
-      <p:sp>
-        <p:nvSpPr>
-          <p:cNvPr id="4" name="Ikon Kapal latar"/>
-          <p:cNvSpPr/>
-          <p:nvPr/>
-        </p:nvSpPr>
-        <p:spPr>
-          <a:xfrm>
-            <a:off x="914400" y="1737360"/>
-            <a:ext cx="548640" cy="548640"/>
-          </a:xfrm>
-          <a:prstGeom prst="ellipse">
-            <a:avLst/>
-          </a:prstGeom>
-          <a:solidFill>
-            <a:srgbClr val="0B1A3A"/>
-          </a:solidFill>
-          <a:ln w="12700">
-            <a:solidFill>
-              <a:srgbClr val="0B1A3A"/>
-            </a:solidFill>
-            <a:prstDash val="solid"/>
-          </a:ln>
-        </p:spPr>
-      </p:sp>
-      <p:pic>
-        <p:nvPicPr>
-          <p:cNvPr id="5" name="Ikon Kapal" descr="Ikon Kapal">    </p:cNvPr>
-          <p:cNvPicPr>
-            <a:picLocks noChangeAspect="1"/>
-          </p:cNvPicPr>
-          <p:nvPr/>
-        </p:nvPicPr>
-        <p:blipFill>
-          <a:blip r:embed="rId1"/>
-          <a:stretch>
-            <a:fillRect/>
-          </a:stretch>
-        </p:blipFill>
-        <p:spPr>
-          <a:xfrm>
-            <a:off x="1046074" y="1869034"/>
-            <a:ext cx="285293" cy="285293"/>
-          </a:xfrm>
-          <a:prstGeom prst="rect">
-            <a:avLst/>
-          </a:prstGeom>
-        </p:spPr>
-      </p:pic>
-      <p:sp>
-        <p:nvSpPr>
-          <p:cNvPr id="6" name="Text 3"/>
-          <p:cNvSpPr txBox="1"/>
-          <p:nvPr/>
-        </p:nvSpPr>
-        <p:spPr>
-          <a:xfrm>
-            <a:off x="1600200" y="1737360"/>
-            <a:ext cx="2194560" cy="548640"/>
-          </a:xfrm>
-          <a:prstGeom prst="rect">
-            <a:avLst/>
-          </a:prstGeom>
-          <a:noFill/>
-          <a:ln/>
-        </p:spPr>
-        <p:txBody>
-          <a:bodyPr wrap="square" lIns="0" tIns="0" rIns="0" bIns="0" rtlCol="0" anchor="ctr"/>
-          <a:lstStyle/>
-          <a:p>
-            <a:pPr indent="0" marL="0">
-              <a:buNone/>
-            </a:pPr>
-            <a:r>
-              <a:rPr lang="en-US" sz="2000" b="1" dirty="0">
-                <a:solidFill>
-                  <a:srgbClr val="0B1A3A"/>
-                </a:solidFill>
-              </a:rPr>
-              <a:t>Kapal</a:t>
-            </a:r>
-            <a:endParaRPr lang="en-US" sz="2000" dirty="0"/>
-          </a:p>
-        </p:txBody>
-      </p:sp>
-      <p:sp>
-        <p:nvSpPr>
-          <p:cNvPr id="7" name="Peran Admin Kapal / Kepala Toko"/>
-          <p:cNvSpPr/>
-          <p:nvPr/>
-        </p:nvSpPr>
-        <p:spPr>
-          <a:xfrm>
-            <a:off x="868680" y="2514600"/>
-            <a:ext cx="2926080" cy="731520"/>
-          </a:xfrm>
-          <a:prstGeom prst="roundRect">
-            <a:avLst>
-              <a:gd name="adj" fmla="val 17500"/>
+              <a:gd name="adj" fmla="val 3733"/>
             </a:avLst>
           </a:prstGeom>
           <a:solidFill>
@@ -4899,14 +5277,72 @@
       </p:sp>
       <p:sp>
         <p:nvSpPr>
-          <p:cNvPr id="8" name="Text 5"/>
+          <p:cNvPr id="4" name="Pesan ke DC bingkai"/>
+          <p:cNvSpPr/>
+          <p:nvPr/>
+        </p:nvSpPr>
+        <p:spPr>
+          <a:xfrm>
+            <a:off x="795528" y="2169460"/>
+            <a:ext cx="3118104" cy="1558961"/>
+          </a:xfrm>
+          <a:prstGeom prst="roundRect">
+            <a:avLst>
+              <a:gd name="adj" fmla="val 8212"/>
+            </a:avLst>
+          </a:prstGeom>
+          <a:solidFill>
+            <a:srgbClr val="E4EAF4"/>
+          </a:solidFill>
+          <a:ln w="12700">
+            <a:solidFill>
+              <a:srgbClr val="E4EAF4"/>
+            </a:solidFill>
+            <a:prstDash val="solid"/>
+          </a:ln>
+          <a:effectLst>
+            <a:outerShdw sx="100000" sy="100000" kx="0" ky="0" algn="bl" rotWithShape="0" blurRad="127000" dist="38100" dir="5400000">
+              <a:srgbClr val="0B1A3A">
+                <a:alpha val="14000"/>
+              </a:srgbClr>
+            </a:outerShdw>
+          </a:effectLst>
+        </p:spPr>
+      </p:sp>
+      <p:pic>
+        <p:nvPicPr>
+          <p:cNvPr id="5" name="Pesan ke DC" descr="Layar PID POS: Pesan ke DC">    </p:cNvPr>
+          <p:cNvPicPr>
+            <a:picLocks noChangeAspect="1"/>
+          </p:cNvPicPr>
+          <p:nvPr/>
+        </p:nvPicPr>
+        <p:blipFill>
+          <a:blip r:embed="rId1"/>
+          <a:stretch>
+            <a:fillRect/>
+          </a:stretch>
+        </p:blipFill>
+        <p:spPr>
+          <a:xfrm>
+            <a:off x="868680" y="2242612"/>
+            <a:ext cx="2971800" cy="1412657"/>
+          </a:xfrm>
+          <a:prstGeom prst="rect">
+            <a:avLst/>
+          </a:prstGeom>
+        </p:spPr>
+      </p:pic>
+      <p:sp>
+        <p:nvSpPr>
+          <p:cNvPr id="6" name="Text 3"/>
           <p:cNvSpPr txBox="1"/>
           <p:nvPr/>
         </p:nvSpPr>
         <p:spPr>
           <a:xfrm>
-            <a:off x="1051560" y="2514600"/>
-            <a:ext cx="2560320" cy="731520"/>
+            <a:off x="914400" y="4343400"/>
+            <a:ext cx="2880360" cy="1554480"/>
           </a:xfrm>
           <a:prstGeom prst="rect">
             <a:avLst/>
@@ -4915,52 +5351,58 @@
           <a:ln/>
         </p:spPr>
         <p:txBody>
-          <a:bodyPr wrap="square" lIns="0" tIns="0" rIns="0" bIns="0" rtlCol="0" anchor="ctr"/>
+          <a:bodyPr wrap="square" lIns="0" tIns="0" rIns="0" bIns="0" rtlCol="0" anchor="t"/>
           <a:lstStyle/>
           <a:p>
             <a:pPr indent="0" marL="0">
-              <a:buNone/>
-            </a:pPr>
-            <a:r>
-              <a:rPr lang="en-US" sz="1500" b="1" dirty="0">
+              <a:spcAft>
+                <a:spcPts val="600"/>
+              </a:spcAft>
+              <a:buNone/>
+            </a:pPr>
+            <a:r>
+              <a:rPr lang="en-US" sz="2000" b="1" dirty="0">
                 <a:solidFill>
                   <a:srgbClr val="0B1A3A"/>
                 </a:solidFill>
               </a:rPr>
-              <a:t>Admin Kapal / Kepala Toko</a:t>
-            </a:r>
-            <a:endParaRPr lang="en-US" sz="1500" dirty="0"/>
+              <a:t>Pesan ke DC</a:t>
+            </a:r>
+            <a:endParaRPr lang="en-US" sz="2000" dirty="0"/>
           </a:p>
           <a:p>
             <a:pPr indent="0" marL="0">
-              <a:buNone/>
-            </a:pPr>
-            <a:r>
-              <a:rPr lang="en-US" sz="1200" dirty="0">
-                <a:solidFill>
-                  <a:srgbClr val="5B6B86"/>
-                </a:solidFill>
-              </a:rPr>
-              <a:t>Pesan ke DC, terima barang di dek</a:t>
-            </a:r>
-            <a:endParaRPr lang="en-US" sz="1500" dirty="0"/>
-          </a:p>
-        </p:txBody>
-      </p:sp>
-      <p:sp>
-        <p:nvSpPr>
-          <p:cNvPr id="9" name="Peran Kasir"/>
+              <a:spcAft>
+                <a:spcPts val="600"/>
+              </a:spcAft>
+              <a:buNone/>
+            </a:pPr>
+            <a:r>
+              <a:rPr lang="en-US" sz="1400" dirty="0">
+                <a:solidFill>
+                  <a:srgbClr val="1B2437"/>
+                </a:solidFill>
+              </a:rPr>
+              <a:t>Pilih barang dan dek tujuan, lalu kirim permintaan ke DC.</a:t>
+            </a:r>
+            <a:endParaRPr lang="en-US" sz="2000" dirty="0"/>
+          </a:p>
+        </p:txBody>
+      </p:sp>
+      <p:sp>
+        <p:nvSpPr>
+          <p:cNvPr id="7" name="Fitur Persetujuan berjenjang"/>
           <p:cNvSpPr/>
           <p:nvPr/>
         </p:nvSpPr>
         <p:spPr>
           <a:xfrm>
-            <a:off x="868680" y="3383280"/>
-            <a:ext cx="2926080" cy="731520"/>
+            <a:off x="4343400" y="1508760"/>
+            <a:ext cx="3429000" cy="4526280"/>
           </a:xfrm>
           <a:prstGeom prst="roundRect">
             <a:avLst>
-              <a:gd name="adj" fmla="val 17500"/>
+              <a:gd name="adj" fmla="val 3733"/>
             </a:avLst>
           </a:prstGeom>
           <a:solidFill>
@@ -4983,76 +5425,26 @@
       </p:sp>
       <p:sp>
         <p:nvSpPr>
-          <p:cNvPr id="10" name="Text 7"/>
-          <p:cNvSpPr txBox="1"/>
-          <p:nvPr/>
-        </p:nvSpPr>
-        <p:spPr>
-          <a:xfrm>
-            <a:off x="1051560" y="3383280"/>
-            <a:ext cx="2560320" cy="731520"/>
-          </a:xfrm>
-          <a:prstGeom prst="rect">
-            <a:avLst/>
-          </a:prstGeom>
-          <a:noFill/>
-          <a:ln/>
-        </p:spPr>
-        <p:txBody>
-          <a:bodyPr wrap="square" lIns="0" tIns="0" rIns="0" bIns="0" rtlCol="0" anchor="ctr"/>
-          <a:lstStyle/>
-          <a:p>
-            <a:pPr indent="0" marL="0">
-              <a:buNone/>
-            </a:pPr>
-            <a:r>
-              <a:rPr lang="en-US" sz="1500" b="1" dirty="0">
-                <a:solidFill>
-                  <a:srgbClr val="0B1A3A"/>
-                </a:solidFill>
-              </a:rPr>
-              <a:t>Kasir</a:t>
-            </a:r>
-            <a:endParaRPr lang="en-US" sz="1500" dirty="0"/>
-          </a:p>
-          <a:p>
-            <a:pPr indent="0" marL="0">
-              <a:buNone/>
-            </a:pPr>
-            <a:r>
-              <a:rPr lang="en-US" sz="1200" dirty="0">
-                <a:solidFill>
-                  <a:srgbClr val="5B6B86"/>
-                </a:solidFill>
-              </a:rPr>
-              <a:t>Jual, kirim DO harian ke SAP</a:t>
-            </a:r>
-            <a:endParaRPr lang="en-US" sz="1500" dirty="0"/>
-          </a:p>
-        </p:txBody>
-      </p:sp>
-      <p:sp>
-        <p:nvSpPr>
-          <p:cNvPr id="11" name="Zona Kantor pusat"/>
+          <p:cNvPr id="8" name="Persetujuan berjenjang bingkai"/>
           <p:cNvSpPr/>
           <p:nvPr/>
         </p:nvSpPr>
         <p:spPr>
           <a:xfrm>
-            <a:off x="4297680" y="1554480"/>
-            <a:ext cx="4069080" cy="4617720"/>
+            <a:off x="4671768" y="1709928"/>
+            <a:ext cx="2772265" cy="2478024"/>
           </a:xfrm>
           <a:prstGeom prst="roundRect">
             <a:avLst>
-              <a:gd name="adj" fmla="val 3146"/>
+              <a:gd name="adj" fmla="val 5166"/>
             </a:avLst>
           </a:prstGeom>
           <a:solidFill>
-            <a:srgbClr val="EEF3FB"/>
+            <a:srgbClr val="E4EAF4"/>
           </a:solidFill>
           <a:ln w="12700">
             <a:solidFill>
-              <a:srgbClr val="EEF3FB"/>
+              <a:srgbClr val="E4EAF4"/>
             </a:solidFill>
             <a:prstDash val="solid"/>
           </a:ln>
@@ -5065,34 +5457,9 @@
           </a:effectLst>
         </p:spPr>
       </p:sp>
-      <p:sp>
-        <p:nvSpPr>
-          <p:cNvPr id="12" name="Ikon Kantor pusat latar"/>
-          <p:cNvSpPr/>
-          <p:nvPr/>
-        </p:nvSpPr>
-        <p:spPr>
-          <a:xfrm>
-            <a:off x="4572000" y="1737360"/>
-            <a:ext cx="548640" cy="548640"/>
-          </a:xfrm>
-          <a:prstGeom prst="ellipse">
-            <a:avLst/>
-          </a:prstGeom>
-          <a:solidFill>
-            <a:srgbClr val="0B1A3A"/>
-          </a:solidFill>
-          <a:ln w="12700">
-            <a:solidFill>
-              <a:srgbClr val="0B1A3A"/>
-            </a:solidFill>
-            <a:prstDash val="solid"/>
-          </a:ln>
-        </p:spPr>
-      </p:sp>
       <p:pic>
         <p:nvPicPr>
-          <p:cNvPr id="13" name="Ikon Kantor pusat" descr="Ikon Kantor pusat">    </p:cNvPr>
+          <p:cNvPr id="9" name="Persetujuan berjenjang" descr="Layar PID POS: Persetujuan berjenjang">    </p:cNvPr>
           <p:cNvPicPr>
             <a:picLocks noChangeAspect="1"/>
           </p:cNvPicPr>
@@ -5106,8 +5473,8 @@
         </p:blipFill>
         <p:spPr>
           <a:xfrm>
-            <a:off x="4703674" y="1869034"/>
-            <a:ext cx="285293" cy="285293"/>
+            <a:off x="4744920" y="1783080"/>
+            <a:ext cx="2625961" cy="2331720"/>
           </a:xfrm>
           <a:prstGeom prst="rect">
             <a:avLst/>
@@ -5116,14 +5483,14 @@
       </p:pic>
       <p:sp>
         <p:nvSpPr>
-          <p:cNvPr id="14" name="Text 10"/>
+          <p:cNvPr id="10" name="Text 6"/>
           <p:cNvSpPr txBox="1"/>
           <p:nvPr/>
         </p:nvSpPr>
         <p:spPr>
           <a:xfrm>
-            <a:off x="5257800" y="1737360"/>
-            <a:ext cx="2880360" cy="548640"/>
+            <a:off x="4617720" y="4343400"/>
+            <a:ext cx="2880360" cy="1554480"/>
           </a:xfrm>
           <a:prstGeom prst="rect">
             <a:avLst/>
@@ -5132,10 +5499,13 @@
           <a:ln/>
         </p:spPr>
         <p:txBody>
-          <a:bodyPr wrap="square" lIns="0" tIns="0" rIns="0" bIns="0" rtlCol="0" anchor="ctr"/>
+          <a:bodyPr wrap="square" lIns="0" tIns="0" rIns="0" bIns="0" rtlCol="0" anchor="t"/>
           <a:lstStyle/>
           <a:p>
             <a:pPr indent="0" marL="0">
+              <a:spcAft>
+                <a:spcPts val="600"/>
+              </a:spcAft>
               <a:buNone/>
             </a:pPr>
             <a:r>
@@ -5144,26 +5514,43 @@
                   <a:srgbClr val="0B1A3A"/>
                 </a:solidFill>
               </a:rPr>
-              <a:t>Kantor pusat</a:t>
+              <a:t>Persetujuan berjenjang</a:t>
             </a:r>
             <a:endParaRPr lang="en-US" sz="2000" dirty="0"/>
           </a:p>
-        </p:txBody>
-      </p:sp>
-      <p:sp>
-        <p:nvSpPr>
-          <p:cNvPr id="15" name="Peran Approve SO (P2)"/>
+          <a:p>
+            <a:pPr indent="0" marL="0">
+              <a:spcAft>
+                <a:spcPts val="600"/>
+              </a:spcAft>
+              <a:buNone/>
+            </a:pPr>
+            <a:r>
+              <a:rPr lang="en-US" sz="1400" dirty="0">
+                <a:solidFill>
+                  <a:srgbClr val="1B2437"/>
+                </a:solidFill>
+              </a:rPr>
+              <a:t>Status tiap tahap terlihat; setelah disetujui jadi Sales Order di SAP.</a:t>
+            </a:r>
+            <a:endParaRPr lang="en-US" sz="2000" dirty="0"/>
+          </a:p>
+        </p:txBody>
+      </p:sp>
+      <p:sp>
+        <p:nvSpPr>
+          <p:cNvPr id="11" name="Fitur Posisi stok per dek"/>
           <p:cNvSpPr/>
           <p:nvPr/>
         </p:nvSpPr>
         <p:spPr>
           <a:xfrm>
-            <a:off x="4526280" y="2514600"/>
-            <a:ext cx="3611880" cy="731520"/>
+            <a:off x="8046720" y="1508760"/>
+            <a:ext cx="3429000" cy="4526280"/>
           </a:xfrm>
           <a:prstGeom prst="roundRect">
             <a:avLst>
-              <a:gd name="adj" fmla="val 17500"/>
+              <a:gd name="adj" fmla="val 3733"/>
             </a:avLst>
           </a:prstGeom>
           <a:solidFill>
@@ -5186,76 +5573,26 @@
       </p:sp>
       <p:sp>
         <p:nvSpPr>
-          <p:cNvPr id="16" name="Text 12"/>
-          <p:cNvSpPr txBox="1"/>
-          <p:nvPr/>
-        </p:nvSpPr>
-        <p:spPr>
-          <a:xfrm>
-            <a:off x="4709160" y="2514600"/>
-            <a:ext cx="3246120" cy="731520"/>
-          </a:xfrm>
-          <a:prstGeom prst="rect">
-            <a:avLst/>
-          </a:prstGeom>
-          <a:noFill/>
-          <a:ln/>
-        </p:spPr>
-        <p:txBody>
-          <a:bodyPr wrap="square" lIns="0" tIns="0" rIns="0" bIns="0" rtlCol="0" anchor="ctr"/>
-          <a:lstStyle/>
-          <a:p>
-            <a:pPr indent="0" marL="0">
-              <a:buNone/>
-            </a:pPr>
-            <a:r>
-              <a:rPr lang="en-US" sz="1500" b="1" dirty="0">
-                <a:solidFill>
-                  <a:srgbClr val="0B1A3A"/>
-                </a:solidFill>
-              </a:rPr>
-              <a:t>Approve SO (P2)</a:t>
-            </a:r>
-            <a:endParaRPr lang="en-US" sz="1500" dirty="0"/>
-          </a:p>
-          <a:p>
-            <a:pPr indent="0" marL="0">
-              <a:buNone/>
-            </a:pPr>
-            <a:r>
-              <a:rPr lang="en-US" sz="1200" dirty="0">
-                <a:solidFill>
-                  <a:srgbClr val="5B6B86"/>
-                </a:solidFill>
-              </a:rPr>
-              <a:t>Setujui permintaan jadi Sales Order</a:t>
-            </a:r>
-            <a:endParaRPr lang="en-US" sz="1500" dirty="0"/>
-          </a:p>
-        </p:txBody>
-      </p:sp>
-      <p:sp>
-        <p:nvSpPr>
-          <p:cNvPr id="17" name="Peran Approve PUR"/>
+          <p:cNvPr id="12" name="Posisi stok per dek bingkai"/>
           <p:cNvSpPr/>
           <p:nvPr/>
         </p:nvSpPr>
         <p:spPr>
           <a:xfrm>
-            <a:off x="4526280" y="3383280"/>
-            <a:ext cx="3611880" cy="731520"/>
+            <a:off x="8202168" y="2447930"/>
+            <a:ext cx="3118104" cy="1002020"/>
           </a:xfrm>
           <a:prstGeom prst="roundRect">
             <a:avLst>
-              <a:gd name="adj" fmla="val 17500"/>
+              <a:gd name="adj" fmla="val 12776"/>
             </a:avLst>
           </a:prstGeom>
           <a:solidFill>
-            <a:srgbClr val="FFFFFF"/>
+            <a:srgbClr val="E4EAF4"/>
           </a:solidFill>
           <a:ln w="12700">
             <a:solidFill>
-              <a:srgbClr val="FFFFFF"/>
+              <a:srgbClr val="E4EAF4"/>
             </a:solidFill>
             <a:prstDash val="solid"/>
           </a:ln>
@@ -5268,286 +5605,9 @@
           </a:effectLst>
         </p:spPr>
       </p:sp>
-      <p:sp>
-        <p:nvSpPr>
-          <p:cNvPr id="18" name="Text 14"/>
-          <p:cNvSpPr txBox="1"/>
-          <p:nvPr/>
-        </p:nvSpPr>
-        <p:spPr>
-          <a:xfrm>
-            <a:off x="4709160" y="3383280"/>
-            <a:ext cx="3246120" cy="731520"/>
-          </a:xfrm>
-          <a:prstGeom prst="rect">
-            <a:avLst/>
-          </a:prstGeom>
-          <a:noFill/>
-          <a:ln/>
-        </p:spPr>
-        <p:txBody>
-          <a:bodyPr wrap="square" lIns="0" tIns="0" rIns="0" bIns="0" rtlCol="0" anchor="ctr"/>
-          <a:lstStyle/>
-          <a:p>
-            <a:pPr indent="0" marL="0">
-              <a:buNone/>
-            </a:pPr>
-            <a:r>
-              <a:rPr lang="en-US" sz="1500" b="1" dirty="0">
-                <a:solidFill>
-                  <a:srgbClr val="0B1A3A"/>
-                </a:solidFill>
-              </a:rPr>
-              <a:t>Approve PUR</a:t>
-            </a:r>
-            <a:endParaRPr lang="en-US" sz="1500" dirty="0"/>
-          </a:p>
-          <a:p>
-            <a:pPr indent="0" marL="0">
-              <a:buNone/>
-            </a:pPr>
-            <a:r>
-              <a:rPr lang="en-US" sz="1200" dirty="0">
-                <a:solidFill>
-                  <a:srgbClr val="5B6B86"/>
-                </a:solidFill>
-              </a:rPr>
-              <a:t>Setujui PR, GRPO, dan transfer</a:t>
-            </a:r>
-            <a:endParaRPr lang="en-US" sz="1500" dirty="0"/>
-          </a:p>
-        </p:txBody>
-      </p:sp>
-      <p:sp>
-        <p:nvSpPr>
-          <p:cNvPr id="19" name="Peran Admin Purchase"/>
-          <p:cNvSpPr/>
-          <p:nvPr/>
-        </p:nvSpPr>
-        <p:spPr>
-          <a:xfrm>
-            <a:off x="4526280" y="4251960"/>
-            <a:ext cx="3611880" cy="731520"/>
-          </a:xfrm>
-          <a:prstGeom prst="roundRect">
-            <a:avLst>
-              <a:gd name="adj" fmla="val 17500"/>
-            </a:avLst>
-          </a:prstGeom>
-          <a:solidFill>
-            <a:srgbClr val="FFFFFF"/>
-          </a:solidFill>
-          <a:ln w="12700">
-            <a:solidFill>
-              <a:srgbClr val="FFFFFF"/>
-            </a:solidFill>
-            <a:prstDash val="solid"/>
-          </a:ln>
-          <a:effectLst>
-            <a:outerShdw sx="100000" sy="100000" kx="0" ky="0" algn="bl" rotWithShape="0" blurRad="127000" dist="38100" dir="5400000">
-              <a:srgbClr val="0B1A3A">
-                <a:alpha val="14000"/>
-              </a:srgbClr>
-            </a:outerShdw>
-          </a:effectLst>
-        </p:spPr>
-      </p:sp>
-      <p:sp>
-        <p:nvSpPr>
-          <p:cNvPr id="20" name="Text 16"/>
-          <p:cNvSpPr txBox="1"/>
-          <p:nvPr/>
-        </p:nvSpPr>
-        <p:spPr>
-          <a:xfrm>
-            <a:off x="4709160" y="4251960"/>
-            <a:ext cx="3246120" cy="731520"/>
-          </a:xfrm>
-          <a:prstGeom prst="rect">
-            <a:avLst/>
-          </a:prstGeom>
-          <a:noFill/>
-          <a:ln/>
-        </p:spPr>
-        <p:txBody>
-          <a:bodyPr wrap="square" lIns="0" tIns="0" rIns="0" bIns="0" rtlCol="0" anchor="ctr"/>
-          <a:lstStyle/>
-          <a:p>
-            <a:pPr indent="0" marL="0">
-              <a:buNone/>
-            </a:pPr>
-            <a:r>
-              <a:rPr lang="en-US" sz="1500" b="1" dirty="0">
-                <a:solidFill>
-                  <a:srgbClr val="0B1A3A"/>
-                </a:solidFill>
-              </a:rPr>
-              <a:t>Admin Purchase</a:t>
-            </a:r>
-            <a:endParaRPr lang="en-US" sz="1500" dirty="0"/>
-          </a:p>
-          <a:p>
-            <a:pPr indent="0" marL="0">
-              <a:buNone/>
-            </a:pPr>
-            <a:r>
-              <a:rPr lang="en-US" sz="1200" dirty="0">
-                <a:solidFill>
-                  <a:srgbClr val="5B6B86"/>
-                </a:solidFill>
-              </a:rPr>
-              <a:t>Buat Purchase Order ke vendor</a:t>
-            </a:r>
-            <a:endParaRPr lang="en-US" sz="1500" dirty="0"/>
-          </a:p>
-        </p:txBody>
-      </p:sp>
-      <p:sp>
-        <p:nvSpPr>
-          <p:cNvPr id="21" name="Peran Approve PO"/>
-          <p:cNvSpPr/>
-          <p:nvPr/>
-        </p:nvSpPr>
-        <p:spPr>
-          <a:xfrm>
-            <a:off x="4526280" y="5120640"/>
-            <a:ext cx="3611880" cy="731520"/>
-          </a:xfrm>
-          <a:prstGeom prst="roundRect">
-            <a:avLst>
-              <a:gd name="adj" fmla="val 17500"/>
-            </a:avLst>
-          </a:prstGeom>
-          <a:solidFill>
-            <a:srgbClr val="FFFFFF"/>
-          </a:solidFill>
-          <a:ln w="12700">
-            <a:solidFill>
-              <a:srgbClr val="FFFFFF"/>
-            </a:solidFill>
-            <a:prstDash val="solid"/>
-          </a:ln>
-          <a:effectLst>
-            <a:outerShdw sx="100000" sy="100000" kx="0" ky="0" algn="bl" rotWithShape="0" blurRad="127000" dist="38100" dir="5400000">
-              <a:srgbClr val="0B1A3A">
-                <a:alpha val="14000"/>
-              </a:srgbClr>
-            </a:outerShdw>
-          </a:effectLst>
-        </p:spPr>
-      </p:sp>
-      <p:sp>
-        <p:nvSpPr>
-          <p:cNvPr id="22" name="Text 18"/>
-          <p:cNvSpPr txBox="1"/>
-          <p:nvPr/>
-        </p:nvSpPr>
-        <p:spPr>
-          <a:xfrm>
-            <a:off x="4709160" y="5120640"/>
-            <a:ext cx="3246120" cy="731520"/>
-          </a:xfrm>
-          <a:prstGeom prst="rect">
-            <a:avLst/>
-          </a:prstGeom>
-          <a:noFill/>
-          <a:ln/>
-        </p:spPr>
-        <p:txBody>
-          <a:bodyPr wrap="square" lIns="0" tIns="0" rIns="0" bIns="0" rtlCol="0" anchor="ctr"/>
-          <a:lstStyle/>
-          <a:p>
-            <a:pPr indent="0" marL="0">
-              <a:buNone/>
-            </a:pPr>
-            <a:r>
-              <a:rPr lang="en-US" sz="1500" b="1" dirty="0">
-                <a:solidFill>
-                  <a:srgbClr val="0B1A3A"/>
-                </a:solidFill>
-              </a:rPr>
-              <a:t>Approve PO</a:t>
-            </a:r>
-            <a:endParaRPr lang="en-US" sz="1500" dirty="0"/>
-          </a:p>
-          <a:p>
-            <a:pPr indent="0" marL="0">
-              <a:buNone/>
-            </a:pPr>
-            <a:r>
-              <a:rPr lang="en-US" sz="1200" dirty="0">
-                <a:solidFill>
-                  <a:srgbClr val="5B6B86"/>
-                </a:solidFill>
-              </a:rPr>
-              <a:t>Setujui Purchase Order</a:t>
-            </a:r>
-            <a:endParaRPr lang="en-US" sz="1500" dirty="0"/>
-          </a:p>
-        </p:txBody>
-      </p:sp>
-      <p:sp>
-        <p:nvSpPr>
-          <p:cNvPr id="23" name="Zona DC"/>
-          <p:cNvSpPr/>
-          <p:nvPr/>
-        </p:nvSpPr>
-        <p:spPr>
-          <a:xfrm>
-            <a:off x="8641080" y="1554480"/>
-            <a:ext cx="2834640" cy="2011680"/>
-          </a:xfrm>
-          <a:prstGeom prst="roundRect">
-            <a:avLst>
-              <a:gd name="adj" fmla="val 6364"/>
-            </a:avLst>
-          </a:prstGeom>
-          <a:solidFill>
-            <a:srgbClr val="EEF3FB"/>
-          </a:solidFill>
-          <a:ln w="12700">
-            <a:solidFill>
-              <a:srgbClr val="EEF3FB"/>
-            </a:solidFill>
-            <a:prstDash val="solid"/>
-          </a:ln>
-          <a:effectLst>
-            <a:outerShdw sx="100000" sy="100000" kx="0" ky="0" algn="bl" rotWithShape="0" blurRad="127000" dist="38100" dir="5400000">
-              <a:srgbClr val="0B1A3A">
-                <a:alpha val="14000"/>
-              </a:srgbClr>
-            </a:outerShdw>
-          </a:effectLst>
-        </p:spPr>
-      </p:sp>
-      <p:sp>
-        <p:nvSpPr>
-          <p:cNvPr id="24" name="Ikon DC latar"/>
-          <p:cNvSpPr/>
-          <p:nvPr/>
-        </p:nvSpPr>
-        <p:spPr>
-          <a:xfrm>
-            <a:off x="8915400" y="1737360"/>
-            <a:ext cx="548640" cy="548640"/>
-          </a:xfrm>
-          <a:prstGeom prst="ellipse">
-            <a:avLst/>
-          </a:prstGeom>
-          <a:solidFill>
-            <a:srgbClr val="0B1A3A"/>
-          </a:solidFill>
-          <a:ln w="12700">
-            <a:solidFill>
-              <a:srgbClr val="0B1A3A"/>
-            </a:solidFill>
-            <a:prstDash val="solid"/>
-          </a:ln>
-        </p:spPr>
-      </p:sp>
       <p:pic>
         <p:nvPicPr>
-          <p:cNvPr id="25" name="Ikon DC" descr="Ikon DC">    </p:cNvPr>
+          <p:cNvPr id="13" name="Posisi stok per dek" descr="Layar PID POS: Posisi stok per dek">    </p:cNvPr>
           <p:cNvPicPr>
             <a:picLocks noChangeAspect="1"/>
           </p:cNvPicPr>
@@ -5561,8 +5621,8 @@
         </p:blipFill>
         <p:spPr>
           <a:xfrm>
-            <a:off x="9047074" y="1869034"/>
-            <a:ext cx="285293" cy="285293"/>
+            <a:off x="8275320" y="2521082"/>
+            <a:ext cx="2971800" cy="855716"/>
           </a:xfrm>
           <a:prstGeom prst="rect">
             <a:avLst/>
@@ -5571,14 +5631,14 @@
       </p:pic>
       <p:sp>
         <p:nvSpPr>
-          <p:cNvPr id="26" name="Text 21"/>
+          <p:cNvPr id="14" name="Text 9"/>
           <p:cNvSpPr txBox="1"/>
           <p:nvPr/>
         </p:nvSpPr>
         <p:spPr>
           <a:xfrm>
-            <a:off x="9601200" y="1737360"/>
-            <a:ext cx="1645920" cy="548640"/>
+            <a:off x="8321040" y="4343400"/>
+            <a:ext cx="2880360" cy="1554480"/>
           </a:xfrm>
           <a:prstGeom prst="rect">
             <a:avLst/>
@@ -5587,10 +5647,13 @@
           <a:ln/>
         </p:spPr>
         <p:txBody>
-          <a:bodyPr wrap="square" lIns="0" tIns="0" rIns="0" bIns="0" rtlCol="0" anchor="ctr"/>
+          <a:bodyPr wrap="square" lIns="0" tIns="0" rIns="0" bIns="0" rtlCol="0" anchor="t"/>
           <a:lstStyle/>
           <a:p>
             <a:pPr indent="0" marL="0">
+              <a:spcAft>
+                <a:spcPts val="600"/>
+              </a:spcAft>
               <a:buNone/>
             </a:pPr>
             <a:r>
@@ -5599,93 +5662,26 @@
                   <a:srgbClr val="0B1A3A"/>
                 </a:solidFill>
               </a:rPr>
-              <a:t>DC</a:t>
+              <a:t>Posisi stok per dek</a:t>
             </a:r>
             <a:endParaRPr lang="en-US" sz="2000" dirty="0"/>
           </a:p>
-        </p:txBody>
-      </p:sp>
-      <p:sp>
-        <p:nvSpPr>
-          <p:cNvPr id="27" name="Peran Admin DC"/>
-          <p:cNvSpPr/>
-          <p:nvPr/>
-        </p:nvSpPr>
-        <p:spPr>
-          <a:xfrm>
-            <a:off x="8869680" y="2514600"/>
-            <a:ext cx="2377440" cy="731520"/>
-          </a:xfrm>
-          <a:prstGeom prst="roundRect">
-            <a:avLst>
-              <a:gd name="adj" fmla="val 17500"/>
-            </a:avLst>
-          </a:prstGeom>
-          <a:solidFill>
-            <a:srgbClr val="FFFFFF"/>
-          </a:solidFill>
-          <a:ln w="12700">
-            <a:solidFill>
-              <a:srgbClr val="FFFFFF"/>
-            </a:solidFill>
-            <a:prstDash val="solid"/>
-          </a:ln>
-          <a:effectLst>
-            <a:outerShdw sx="100000" sy="100000" kx="0" ky="0" algn="bl" rotWithShape="0" blurRad="127000" dist="38100" dir="5400000">
-              <a:srgbClr val="0B1A3A">
-                <a:alpha val="14000"/>
-              </a:srgbClr>
-            </a:outerShdw>
-          </a:effectLst>
-        </p:spPr>
-      </p:sp>
-      <p:sp>
-        <p:nvSpPr>
-          <p:cNvPr id="28" name="Text 23"/>
-          <p:cNvSpPr txBox="1"/>
-          <p:nvPr/>
-        </p:nvSpPr>
-        <p:spPr>
-          <a:xfrm>
-            <a:off x="9052560" y="2514600"/>
-            <a:ext cx="2011680" cy="731520"/>
-          </a:xfrm>
-          <a:prstGeom prst="rect">
-            <a:avLst/>
-          </a:prstGeom>
-          <a:noFill/>
-          <a:ln/>
-        </p:spPr>
-        <p:txBody>
-          <a:bodyPr wrap="square" lIns="0" tIns="0" rIns="0" bIns="0" rtlCol="0" anchor="ctr"/>
-          <a:lstStyle/>
           <a:p>
             <a:pPr indent="0" marL="0">
-              <a:buNone/>
-            </a:pPr>
-            <a:r>
-              <a:rPr lang="en-US" sz="1500" b="1" dirty="0">
-                <a:solidFill>
-                  <a:srgbClr val="0B1A3A"/>
-                </a:solidFill>
-              </a:rPr>
-              <a:t>Admin DC</a:t>
-            </a:r>
-            <a:endParaRPr lang="en-US" sz="1500" dirty="0"/>
-          </a:p>
-          <a:p>
-            <a:pPr indent="0" marL="0">
-              <a:buNone/>
-            </a:pPr>
-            <a:r>
-              <a:rPr lang="en-US" sz="1200" dirty="0">
-                <a:solidFill>
-                  <a:srgbClr val="5B6B86"/>
-                </a:solidFill>
-              </a:rPr>
-              <a:t>Pilah stok, ajukan GRPO dan transfer</a:t>
-            </a:r>
-            <a:endParaRPr lang="en-US" sz="1500" dirty="0"/>
+              <a:spcAft>
+                <a:spcPts val="600"/>
+              </a:spcAft>
+              <a:buNone/>
+            </a:pPr>
+            <a:r>
+              <a:rPr lang="en-US" sz="1400" dirty="0">
+                <a:solidFill>
+                  <a:srgbClr val="1B2437"/>
+                </a:solidFill>
+              </a:rPr>
+              <a:t>Stok setiap dek, total, dan penjualan 7 hari dalam satu tabel.</a:t>
+            </a:r>
+            <a:endParaRPr lang="en-US" sz="2000" dirty="0"/>
           </a:p>
         </p:txBody>
       </p:sp>
@@ -5791,7 +5787,7 @@
                   <a:schemeClr val="tx2"/>
                 </a:solidFill>
               </a:rPr>
-              <a:t>Nilai bagi perusahaan</a:t>
+              <a:t>Kasir di setiap dek</a:t>
             </a:r>
             <a:endParaRPr lang="en-US" sz="3400" dirty="0"/>
           </a:p>
@@ -5799,26 +5795,26 @@
       </p:sp>
       <p:sp>
         <p:nvSpPr>
-          <p:cNvPr id="3" name="Nilai Transparan"/>
+          <p:cNvPr id="3" name="Kasir: scan barang bingkai"/>
           <p:cNvSpPr/>
           <p:nvPr/>
         </p:nvSpPr>
         <p:spPr>
           <a:xfrm>
-            <a:off x="640080" y="1600200"/>
-            <a:ext cx="3429000" cy="3566160"/>
+            <a:off x="566928" y="1563129"/>
+            <a:ext cx="5175504" cy="3091663"/>
           </a:xfrm>
           <a:prstGeom prst="roundRect">
             <a:avLst>
-              <a:gd name="adj" fmla="val 3733"/>
+              <a:gd name="adj" fmla="val 4141"/>
             </a:avLst>
           </a:prstGeom>
           <a:solidFill>
-            <a:srgbClr val="FFFFFF"/>
+            <a:srgbClr val="E4EAF4"/>
           </a:solidFill>
           <a:ln w="12700">
             <a:solidFill>
-              <a:srgbClr val="FFFFFF"/>
+              <a:srgbClr val="E4EAF4"/>
             </a:solidFill>
             <a:prstDash val="solid"/>
           </a:ln>
@@ -5831,34 +5827,9 @@
           </a:effectLst>
         </p:spPr>
       </p:sp>
-      <p:sp>
-        <p:nvSpPr>
-          <p:cNvPr id="4" name="Ikon Transparan latar"/>
-          <p:cNvSpPr/>
-          <p:nvPr/>
-        </p:nvSpPr>
-        <p:spPr>
-          <a:xfrm>
-            <a:off x="960120" y="1920240"/>
-            <a:ext cx="914400" cy="914400"/>
-          </a:xfrm>
-          <a:prstGeom prst="ellipse">
-            <a:avLst/>
-          </a:prstGeom>
-          <a:solidFill>
-            <a:srgbClr val="1F3B7A"/>
-          </a:solidFill>
-          <a:ln w="12700">
-            <a:solidFill>
-              <a:srgbClr val="1F3B7A"/>
-            </a:solidFill>
-            <a:prstDash val="solid"/>
-          </a:ln>
-        </p:spPr>
-      </p:sp>
       <p:pic>
         <p:nvPicPr>
-          <p:cNvPr id="5" name="Ikon Transparan" descr="Ikon Transparan">    </p:cNvPr>
+          <p:cNvPr id="4" name="Kasir: scan barang" descr="Layar PID POS: Kasir: scan barang">    </p:cNvPr>
           <p:cNvPicPr>
             <a:picLocks noChangeAspect="1"/>
           </p:cNvPicPr>
@@ -5872,8 +5843,8 @@
         </p:blipFill>
         <p:spPr>
           <a:xfrm>
-            <a:off x="1179576" y="2139696"/>
-            <a:ext cx="475488" cy="475488"/>
+            <a:off x="640080" y="1636281"/>
+            <a:ext cx="5029200" cy="2945359"/>
           </a:xfrm>
           <a:prstGeom prst="rect">
             <a:avLst/>
@@ -5882,98 +5853,26 @@
       </p:pic>
       <p:sp>
         <p:nvSpPr>
-          <p:cNvPr id="6" name="Text 3"/>
-          <p:cNvSpPr txBox="1"/>
-          <p:nvPr/>
-        </p:nvSpPr>
-        <p:spPr>
-          <a:xfrm>
-            <a:off x="960120" y="3063240"/>
-            <a:ext cx="2834640" cy="548640"/>
-          </a:xfrm>
-          <a:prstGeom prst="rect">
-            <a:avLst/>
-          </a:prstGeom>
-          <a:noFill/>
-          <a:ln/>
-        </p:spPr>
-        <p:txBody>
-          <a:bodyPr wrap="square" lIns="0" tIns="0" rIns="0" bIns="0" rtlCol="0" anchor="ctr"/>
-          <a:lstStyle/>
-          <a:p>
-            <a:pPr indent="0" marL="0">
-              <a:buNone/>
-            </a:pPr>
-            <a:r>
-              <a:rPr lang="en-US" sz="2600" b="1" dirty="0">
-                <a:solidFill>
-                  <a:srgbClr val="0B1A3A"/>
-                </a:solidFill>
-              </a:rPr>
-              <a:t>Transparan</a:t>
-            </a:r>
-            <a:endParaRPr lang="en-US" sz="2600" dirty="0"/>
-          </a:p>
-        </p:txBody>
-      </p:sp>
-      <p:sp>
-        <p:nvSpPr>
-          <p:cNvPr id="7" name="Text 4"/>
-          <p:cNvSpPr txBox="1"/>
-          <p:nvPr/>
-        </p:nvSpPr>
-        <p:spPr>
-          <a:xfrm>
-            <a:off x="960120" y="3657600"/>
-            <a:ext cx="2834640" cy="1828800"/>
-          </a:xfrm>
-          <a:prstGeom prst="rect">
-            <a:avLst/>
-          </a:prstGeom>
-          <a:noFill/>
-          <a:ln/>
-        </p:spPr>
-        <p:txBody>
-          <a:bodyPr wrap="square" lIns="0" tIns="0" rIns="0" bIns="0" rtlCol="0" anchor="t"/>
-          <a:lstStyle/>
-          <a:p>
-            <a:pPr indent="0" marL="0">
-              <a:buNone/>
-            </a:pPr>
-            <a:r>
-              <a:rPr lang="en-US" sz="1500" dirty="0">
-                <a:solidFill>
-                  <a:srgbClr val="1B2437"/>
-                </a:solidFill>
-              </a:rPr>
-              <a:t>Stok setiap dek dan status setiap permintaan terpantau real-time, lengkap dengan riwayatnya.</a:t>
-            </a:r>
-            <a:endParaRPr lang="en-US" sz="1500" dirty="0"/>
-          </a:p>
-        </p:txBody>
-      </p:sp>
-      <p:sp>
-        <p:nvSpPr>
-          <p:cNvPr id="8" name="Nilai Terkendali"/>
+          <p:cNvPr id="5" name="Kasir: pembayaran bingkai"/>
           <p:cNvSpPr/>
           <p:nvPr/>
         </p:nvSpPr>
         <p:spPr>
           <a:xfrm>
-            <a:off x="4343400" y="1600200"/>
-            <a:ext cx="3429000" cy="3566160"/>
+            <a:off x="5824728" y="1814711"/>
+            <a:ext cx="5175504" cy="2588497"/>
           </a:xfrm>
           <a:prstGeom prst="roundRect">
             <a:avLst>
-              <a:gd name="adj" fmla="val 3733"/>
+              <a:gd name="adj" fmla="val 4946"/>
             </a:avLst>
           </a:prstGeom>
           <a:solidFill>
-            <a:srgbClr val="FFFFFF"/>
+            <a:srgbClr val="E4EAF4"/>
           </a:solidFill>
           <a:ln w="12700">
             <a:solidFill>
-              <a:srgbClr val="FFFFFF"/>
+              <a:srgbClr val="E4EAF4"/>
             </a:solidFill>
             <a:prstDash val="solid"/>
           </a:ln>
@@ -5986,34 +5885,9 @@
           </a:effectLst>
         </p:spPr>
       </p:sp>
-      <p:sp>
-        <p:nvSpPr>
-          <p:cNvPr id="9" name="Ikon Terkendali latar"/>
-          <p:cNvSpPr/>
-          <p:nvPr/>
-        </p:nvSpPr>
-        <p:spPr>
-          <a:xfrm>
-            <a:off x="4663440" y="1920240"/>
-            <a:ext cx="914400" cy="914400"/>
-          </a:xfrm>
-          <a:prstGeom prst="ellipse">
-            <a:avLst/>
-          </a:prstGeom>
-          <a:solidFill>
-            <a:srgbClr val="3D6FC2"/>
-          </a:solidFill>
-          <a:ln w="12700">
-            <a:solidFill>
-              <a:srgbClr val="3D6FC2"/>
-            </a:solidFill>
-            <a:prstDash val="solid"/>
-          </a:ln>
-        </p:spPr>
-      </p:sp>
       <p:pic>
         <p:nvPicPr>
-          <p:cNvPr id="10" name="Ikon Terkendali" descr="Ikon Terkendali">    </p:cNvPr>
+          <p:cNvPr id="6" name="Kasir: pembayaran" descr="Layar PID POS: Kasir: pembayaran">    </p:cNvPr>
           <p:cNvPicPr>
             <a:picLocks noChangeAspect="1"/>
           </p:cNvPicPr>
@@ -6027,8 +5901,8 @@
         </p:blipFill>
         <p:spPr>
           <a:xfrm>
-            <a:off x="4882896" y="2139696"/>
-            <a:ext cx="475488" cy="475488"/>
+            <a:off x="5897880" y="1887863"/>
+            <a:ext cx="5029200" cy="2442193"/>
           </a:xfrm>
           <a:prstGeom prst="rect">
             <a:avLst/>
@@ -6037,120 +5911,347 @@
       </p:pic>
       <p:sp>
         <p:nvSpPr>
-          <p:cNvPr id="11" name="Text 7"/>
-          <p:cNvSpPr txBox="1"/>
-          <p:nvPr/>
-        </p:nvSpPr>
-        <p:spPr>
-          <a:xfrm>
-            <a:off x="4663440" y="3063240"/>
-            <a:ext cx="2834640" cy="548640"/>
-          </a:xfrm>
-          <a:prstGeom prst="rect">
-            <a:avLst/>
-          </a:prstGeom>
-          <a:noFill/>
-          <a:ln/>
-        </p:spPr>
-        <p:txBody>
-          <a:bodyPr wrap="square" lIns="0" tIns="0" rIns="0" bIns="0" rtlCol="0" anchor="ctr"/>
-          <a:lstStyle/>
-          <a:p>
-            <a:pPr indent="0" marL="0">
-              <a:buNone/>
-            </a:pPr>
-            <a:r>
-              <a:rPr lang="en-US" sz="2600" b="1" dirty="0">
-                <a:solidFill>
-                  <a:srgbClr val="0B1A3A"/>
-                </a:solidFill>
-              </a:rPr>
-              <a:t>Terkendali</a:t>
-            </a:r>
-            <a:endParaRPr lang="en-US" sz="2600" dirty="0"/>
-          </a:p>
-        </p:txBody>
-      </p:sp>
-      <p:sp>
-        <p:nvSpPr>
-          <p:cNvPr id="12" name="Text 8"/>
-          <p:cNvSpPr txBox="1"/>
-          <p:nvPr/>
-        </p:nvSpPr>
-        <p:spPr>
-          <a:xfrm>
-            <a:off x="4663440" y="3657600"/>
-            <a:ext cx="2834640" cy="1828800"/>
-          </a:xfrm>
-          <a:prstGeom prst="rect">
-            <a:avLst/>
-          </a:prstGeom>
-          <a:noFill/>
-          <a:ln/>
-        </p:spPr>
-        <p:txBody>
-          <a:bodyPr wrap="square" lIns="0" tIns="0" rIns="0" bIns="0" rtlCol="0" anchor="t"/>
-          <a:lstStyle/>
-          <a:p>
-            <a:pPr indent="0" marL="0">
-              <a:buNone/>
-            </a:pPr>
-            <a:r>
-              <a:rPr lang="en-US" sz="1500" dirty="0">
-                <a:solidFill>
-                  <a:srgbClr val="1B2437"/>
-                </a:solidFill>
-              </a:rPr>
-              <a:t>Persetujuan berjenjang di setiap tahap; retur dan kas keluar besar memerlukan PIN kepala toko.</a:t>
-            </a:r>
-            <a:endParaRPr lang="en-US" sz="1500" dirty="0"/>
-          </a:p>
-        </p:txBody>
-      </p:sp>
-      <p:sp>
-        <p:nvSpPr>
-          <p:cNvPr id="13" name="Nilai Terintegrasi"/>
+          <p:cNvPr id="7" name="Langkah 1"/>
           <p:cNvSpPr/>
           <p:nvPr/>
         </p:nvSpPr>
         <p:spPr>
           <a:xfrm>
-            <a:off x="8046720" y="1600200"/>
-            <a:ext cx="3429000" cy="3566160"/>
-          </a:xfrm>
-          <a:prstGeom prst="roundRect">
-            <a:avLst>
-              <a:gd name="adj" fmla="val 3733"/>
-            </a:avLst>
+            <a:off x="640080" y="5120640"/>
+            <a:ext cx="502920" cy="502920"/>
+          </a:xfrm>
+          <a:prstGeom prst="ellipse">
+            <a:avLst/>
           </a:prstGeom>
           <a:solidFill>
-            <a:srgbClr val="FFFFFF"/>
+            <a:srgbClr val="0B1A3A"/>
           </a:solidFill>
           <a:ln w="12700">
             <a:solidFill>
-              <a:srgbClr val="FFFFFF"/>
+              <a:srgbClr val="0B1A3A"/>
             </a:solidFill>
             <a:prstDash val="solid"/>
           </a:ln>
-          <a:effectLst>
-            <a:outerShdw sx="100000" sy="100000" kx="0" ky="0" algn="bl" rotWithShape="0" blurRad="127000" dist="38100" dir="5400000">
-              <a:srgbClr val="0B1A3A">
-                <a:alpha val="14000"/>
-              </a:srgbClr>
-            </a:outerShdw>
-          </a:effectLst>
-        </p:spPr>
-      </p:sp>
-      <p:sp>
-        <p:nvSpPr>
-          <p:cNvPr id="14" name="Ikon Terintegrasi latar"/>
+        </p:spPr>
+      </p:sp>
+      <p:sp>
+        <p:nvSpPr>
+          <p:cNvPr id="8" name="Text 4"/>
+          <p:cNvSpPr txBox="1"/>
+          <p:nvPr/>
+        </p:nvSpPr>
+        <p:spPr>
+          <a:xfrm>
+            <a:off x="640080" y="5120640"/>
+            <a:ext cx="502920" cy="502920"/>
+          </a:xfrm>
+          <a:prstGeom prst="rect">
+            <a:avLst/>
+          </a:prstGeom>
+          <a:noFill/>
+          <a:ln/>
+        </p:spPr>
+        <p:txBody>
+          <a:bodyPr wrap="square" lIns="0" tIns="0" rIns="0" bIns="0" rtlCol="0" anchor="ctr"/>
+          <a:lstStyle/>
+          <a:p>
+            <a:pPr algn="ctr" indent="0" marL="0">
+              <a:buNone/>
+            </a:pPr>
+            <a:r>
+              <a:rPr lang="en-US" sz="1500" b="1" dirty="0">
+                <a:solidFill>
+                  <a:srgbClr val="FFFFFF"/>
+                </a:solidFill>
+              </a:rPr>
+              <a:t>1</a:t>
+            </a:r>
+            <a:endParaRPr lang="en-US" sz="1500" dirty="0"/>
+          </a:p>
+        </p:txBody>
+      </p:sp>
+      <p:sp>
+        <p:nvSpPr>
+          <p:cNvPr id="9" name="Text 5"/>
+          <p:cNvSpPr txBox="1"/>
+          <p:nvPr/>
+        </p:nvSpPr>
+        <p:spPr>
+          <a:xfrm>
+            <a:off x="1280160" y="5029200"/>
+            <a:ext cx="1965960" cy="777240"/>
+          </a:xfrm>
+          <a:prstGeom prst="rect">
+            <a:avLst/>
+          </a:prstGeom>
+          <a:noFill/>
+          <a:ln/>
+        </p:spPr>
+        <p:txBody>
+          <a:bodyPr wrap="square" lIns="0" tIns="0" rIns="0" bIns="0" rtlCol="0" anchor="ctr"/>
+          <a:lstStyle/>
+          <a:p>
+            <a:pPr indent="0" marL="0">
+              <a:buNone/>
+            </a:pPr>
+            <a:r>
+              <a:rPr lang="en-US" sz="1600" b="1" dirty="0">
+                <a:solidFill>
+                  <a:srgbClr val="0B1A3A"/>
+                </a:solidFill>
+              </a:rPr>
+              <a:t>Scan barang</a:t>
+            </a:r>
+            <a:endParaRPr lang="en-US" sz="1600" dirty="0"/>
+          </a:p>
+          <a:p>
+            <a:pPr indent="0" marL="0">
+              <a:buNone/>
+            </a:pPr>
+            <a:r>
+              <a:rPr lang="en-US" sz="1200" dirty="0">
+                <a:solidFill>
+                  <a:srgbClr val="5B6B86"/>
+                </a:solidFill>
+              </a:rPr>
+              <a:t>barcode, atau ketik nama/kode</a:t>
+            </a:r>
+            <a:endParaRPr lang="en-US" sz="1600" dirty="0"/>
+          </a:p>
+        </p:txBody>
+      </p:sp>
+      <p:sp>
+        <p:nvSpPr>
+          <p:cNvPr id="10" name="Langkah 2"/>
           <p:cNvSpPr/>
           <p:nvPr/>
         </p:nvSpPr>
         <p:spPr>
           <a:xfrm>
-            <a:off x="8366760" y="1920240"/>
-            <a:ext cx="914400" cy="914400"/>
+            <a:off x="3355848" y="5120640"/>
+            <a:ext cx="502920" cy="502920"/>
+          </a:xfrm>
+          <a:prstGeom prst="ellipse">
+            <a:avLst/>
+          </a:prstGeom>
+          <a:solidFill>
+            <a:srgbClr val="0B1A3A"/>
+          </a:solidFill>
+          <a:ln w="12700">
+            <a:solidFill>
+              <a:srgbClr val="0B1A3A"/>
+            </a:solidFill>
+            <a:prstDash val="solid"/>
+          </a:ln>
+        </p:spPr>
+      </p:sp>
+      <p:sp>
+        <p:nvSpPr>
+          <p:cNvPr id="11" name="Text 7"/>
+          <p:cNvSpPr txBox="1"/>
+          <p:nvPr/>
+        </p:nvSpPr>
+        <p:spPr>
+          <a:xfrm>
+            <a:off x="3355848" y="5120640"/>
+            <a:ext cx="502920" cy="502920"/>
+          </a:xfrm>
+          <a:prstGeom prst="rect">
+            <a:avLst/>
+          </a:prstGeom>
+          <a:noFill/>
+          <a:ln/>
+        </p:spPr>
+        <p:txBody>
+          <a:bodyPr wrap="square" lIns="0" tIns="0" rIns="0" bIns="0" rtlCol="0" anchor="ctr"/>
+          <a:lstStyle/>
+          <a:p>
+            <a:pPr algn="ctr" indent="0" marL="0">
+              <a:buNone/>
+            </a:pPr>
+            <a:r>
+              <a:rPr lang="en-US" sz="1500" b="1" dirty="0">
+                <a:solidFill>
+                  <a:srgbClr val="FFFFFF"/>
+                </a:solidFill>
+              </a:rPr>
+              <a:t>2</a:t>
+            </a:r>
+            <a:endParaRPr lang="en-US" sz="1500" dirty="0"/>
+          </a:p>
+        </p:txBody>
+      </p:sp>
+      <p:sp>
+        <p:nvSpPr>
+          <p:cNvPr id="12" name="Text 8"/>
+          <p:cNvSpPr txBox="1"/>
+          <p:nvPr/>
+        </p:nvSpPr>
+        <p:spPr>
+          <a:xfrm>
+            <a:off x="3995928" y="5029200"/>
+            <a:ext cx="1965960" cy="777240"/>
+          </a:xfrm>
+          <a:prstGeom prst="rect">
+            <a:avLst/>
+          </a:prstGeom>
+          <a:noFill/>
+          <a:ln/>
+        </p:spPr>
+        <p:txBody>
+          <a:bodyPr wrap="square" lIns="0" tIns="0" rIns="0" bIns="0" rtlCol="0" anchor="ctr"/>
+          <a:lstStyle/>
+          <a:p>
+            <a:pPr indent="0" marL="0">
+              <a:buNone/>
+            </a:pPr>
+            <a:r>
+              <a:rPr lang="en-US" sz="1600" b="1" dirty="0">
+                <a:solidFill>
+                  <a:srgbClr val="0B1A3A"/>
+                </a:solidFill>
+              </a:rPr>
+              <a:t>Bayar</a:t>
+            </a:r>
+            <a:endParaRPr lang="en-US" sz="1600" dirty="0"/>
+          </a:p>
+          <a:p>
+            <a:pPr indent="0" marL="0">
+              <a:buNone/>
+            </a:pPr>
+            <a:r>
+              <a:rPr lang="en-US" sz="1200" dirty="0">
+                <a:solidFill>
+                  <a:srgbClr val="5B6B86"/>
+                </a:solidFill>
+              </a:rPr>
+              <a:t>tunai atau QRIS, kembalian otomatis</a:t>
+            </a:r>
+            <a:endParaRPr lang="en-US" sz="1600" dirty="0"/>
+          </a:p>
+        </p:txBody>
+      </p:sp>
+      <p:sp>
+        <p:nvSpPr>
+          <p:cNvPr id="13" name="Langkah 3"/>
+          <p:cNvSpPr/>
+          <p:nvPr/>
+        </p:nvSpPr>
+        <p:spPr>
+          <a:xfrm>
+            <a:off x="6071616" y="5120640"/>
+            <a:ext cx="502920" cy="502920"/>
+          </a:xfrm>
+          <a:prstGeom prst="ellipse">
+            <a:avLst/>
+          </a:prstGeom>
+          <a:solidFill>
+            <a:srgbClr val="0B1A3A"/>
+          </a:solidFill>
+          <a:ln w="12700">
+            <a:solidFill>
+              <a:srgbClr val="0B1A3A"/>
+            </a:solidFill>
+            <a:prstDash val="solid"/>
+          </a:ln>
+        </p:spPr>
+      </p:sp>
+      <p:sp>
+        <p:nvSpPr>
+          <p:cNvPr id="14" name="Text 10"/>
+          <p:cNvSpPr txBox="1"/>
+          <p:nvPr/>
+        </p:nvSpPr>
+        <p:spPr>
+          <a:xfrm>
+            <a:off x="6071616" y="5120640"/>
+            <a:ext cx="502920" cy="502920"/>
+          </a:xfrm>
+          <a:prstGeom prst="rect">
+            <a:avLst/>
+          </a:prstGeom>
+          <a:noFill/>
+          <a:ln/>
+        </p:spPr>
+        <p:txBody>
+          <a:bodyPr wrap="square" lIns="0" tIns="0" rIns="0" bIns="0" rtlCol="0" anchor="ctr"/>
+          <a:lstStyle/>
+          <a:p>
+            <a:pPr algn="ctr" indent="0" marL="0">
+              <a:buNone/>
+            </a:pPr>
+            <a:r>
+              <a:rPr lang="en-US" sz="1500" b="1" dirty="0">
+                <a:solidFill>
+                  <a:srgbClr val="FFFFFF"/>
+                </a:solidFill>
+              </a:rPr>
+              <a:t>3</a:t>
+            </a:r>
+            <a:endParaRPr lang="en-US" sz="1500" dirty="0"/>
+          </a:p>
+        </p:txBody>
+      </p:sp>
+      <p:sp>
+        <p:nvSpPr>
+          <p:cNvPr id="15" name="Text 11"/>
+          <p:cNvSpPr txBox="1"/>
+          <p:nvPr/>
+        </p:nvSpPr>
+        <p:spPr>
+          <a:xfrm>
+            <a:off x="6711696" y="5029200"/>
+            <a:ext cx="1965960" cy="777240"/>
+          </a:xfrm>
+          <a:prstGeom prst="rect">
+            <a:avLst/>
+          </a:prstGeom>
+          <a:noFill/>
+          <a:ln/>
+        </p:spPr>
+        <p:txBody>
+          <a:bodyPr wrap="square" lIns="0" tIns="0" rIns="0" bIns="0" rtlCol="0" anchor="ctr"/>
+          <a:lstStyle/>
+          <a:p>
+            <a:pPr indent="0" marL="0">
+              <a:buNone/>
+            </a:pPr>
+            <a:r>
+              <a:rPr lang="en-US" sz="1600" b="1" dirty="0">
+                <a:solidFill>
+                  <a:srgbClr val="0B1A3A"/>
+                </a:solidFill>
+              </a:rPr>
+              <a:t>Struk tercetak</a:t>
+            </a:r>
+            <a:endParaRPr lang="en-US" sz="1600" dirty="0"/>
+          </a:p>
+          <a:p>
+            <a:pPr indent="0" marL="0">
+              <a:buNone/>
+            </a:pPr>
+            <a:r>
+              <a:rPr lang="en-US" sz="1200" dirty="0">
+                <a:solidFill>
+                  <a:srgbClr val="5B6B86"/>
+                </a:solidFill>
+              </a:rPr>
+              <a:t>cetak ulang dari riwayat</a:t>
+            </a:r>
+            <a:endParaRPr lang="en-US" sz="1600" dirty="0"/>
+          </a:p>
+        </p:txBody>
+      </p:sp>
+      <p:sp>
+        <p:nvSpPr>
+          <p:cNvPr id="16" name="Langkah 4"/>
+          <p:cNvSpPr/>
+          <p:nvPr/>
+        </p:nvSpPr>
+        <p:spPr>
+          <a:xfrm>
+            <a:off x="8787384" y="5120640"/>
+            <a:ext cx="502920" cy="502920"/>
           </a:xfrm>
           <a:prstGeom prst="ellipse">
             <a:avLst/>
@@ -6166,40 +6267,16 @@
           </a:ln>
         </p:spPr>
       </p:sp>
-      <p:pic>
-        <p:nvPicPr>
-          <p:cNvPr id="15" name="Ikon Terintegrasi" descr="Ikon Terintegrasi">    </p:cNvPr>
-          <p:cNvPicPr>
-            <a:picLocks noChangeAspect="1"/>
-          </p:cNvPicPr>
-          <p:nvPr/>
-        </p:nvPicPr>
-        <p:blipFill>
-          <a:blip r:embed="rId3"/>
-          <a:stretch>
-            <a:fillRect/>
-          </a:stretch>
-        </p:blipFill>
-        <p:spPr>
-          <a:xfrm>
-            <a:off x="8586216" y="2139696"/>
-            <a:ext cx="475488" cy="475488"/>
-          </a:xfrm>
-          <a:prstGeom prst="rect">
-            <a:avLst/>
-          </a:prstGeom>
-        </p:spPr>
-      </p:pic>
-      <p:sp>
-        <p:nvSpPr>
-          <p:cNvPr id="16" name="Text 11"/>
+      <p:sp>
+        <p:nvSpPr>
+          <p:cNvPr id="17" name="Text 13"/>
           <p:cNvSpPr txBox="1"/>
           <p:nvPr/>
         </p:nvSpPr>
         <p:spPr>
           <a:xfrm>
-            <a:off x="8366760" y="3063240"/>
-            <a:ext cx="2834640" cy="548640"/>
+            <a:off x="8787384" y="5120640"/>
+            <a:ext cx="502920" cy="502920"/>
           </a:xfrm>
           <a:prstGeom prst="rect">
             <a:avLst/>
@@ -6211,31 +6288,31 @@
           <a:bodyPr wrap="square" lIns="0" tIns="0" rIns="0" bIns="0" rtlCol="0" anchor="ctr"/>
           <a:lstStyle/>
           <a:p>
-            <a:pPr indent="0" marL="0">
-              <a:buNone/>
-            </a:pPr>
-            <a:r>
-              <a:rPr lang="en-US" sz="2600" b="1" dirty="0">
-                <a:solidFill>
-                  <a:srgbClr val="0B1A3A"/>
-                </a:solidFill>
-              </a:rPr>
-              <a:t>Terintegrasi</a:t>
-            </a:r>
-            <a:endParaRPr lang="en-US" sz="2600" dirty="0"/>
-          </a:p>
-        </p:txBody>
-      </p:sp>
-      <p:sp>
-        <p:nvSpPr>
-          <p:cNvPr id="17" name="Text 12"/>
+            <a:pPr algn="ctr" indent="0" marL="0">
+              <a:buNone/>
+            </a:pPr>
+            <a:r>
+              <a:rPr lang="en-US" sz="1500" b="1" dirty="0">
+                <a:solidFill>
+                  <a:srgbClr val="FFFFFF"/>
+                </a:solidFill>
+              </a:rPr>
+              <a:t>4</a:t>
+            </a:r>
+            <a:endParaRPr lang="en-US" sz="1500" dirty="0"/>
+          </a:p>
+        </p:txBody>
+      </p:sp>
+      <p:sp>
+        <p:nvSpPr>
+          <p:cNvPr id="18" name="Text 14"/>
           <p:cNvSpPr txBox="1"/>
           <p:nvPr/>
         </p:nvSpPr>
         <p:spPr>
           <a:xfrm>
-            <a:off x="8366760" y="3657600"/>
-            <a:ext cx="2834640" cy="1828800"/>
+            <a:off x="9427464" y="5029200"/>
+            <a:ext cx="1965960" cy="777240"/>
           </a:xfrm>
           <a:prstGeom prst="rect">
             <a:avLst/>
@@ -6244,21 +6321,35 @@
           <a:ln/>
         </p:spPr>
         <p:txBody>
-          <a:bodyPr wrap="square" lIns="0" tIns="0" rIns="0" bIns="0" rtlCol="0" anchor="t"/>
+          <a:bodyPr wrap="square" lIns="0" tIns="0" rIns="0" bIns="0" rtlCol="0" anchor="ctr"/>
           <a:lstStyle/>
           <a:p>
             <a:pPr indent="0" marL="0">
               <a:buNone/>
             </a:pPr>
             <a:r>
-              <a:rPr lang="en-US" sz="1500" dirty="0">
-                <a:solidFill>
-                  <a:srgbClr val="1B2437"/>
-                </a:solidFill>
-              </a:rPr>
-              <a:t>Dokumen SAP Business One dibuat otomatis, dan penjualan harian setiap dek masuk SAP sebagai DO.</a:t>
-            </a:r>
-            <a:endParaRPr lang="en-US" sz="1500" dirty="0"/>
+              <a:rPr lang="en-US" sz="1600" b="1" dirty="0">
+                <a:solidFill>
+                  <a:srgbClr val="0B1A3A"/>
+                </a:solidFill>
+              </a:rPr>
+              <a:t>Kirim DO</a:t>
+            </a:r>
+            <a:endParaRPr lang="en-US" sz="1600" dirty="0"/>
+          </a:p>
+          <a:p>
+            <a:pPr indent="0" marL="0">
+              <a:buNone/>
+            </a:pPr>
+            <a:r>
+              <a:rPr lang="en-US" sz="1200" dirty="0">
+                <a:solidFill>
+                  <a:srgbClr val="5B6B86"/>
+                </a:solidFill>
+              </a:rPr>
+              <a:t>penjualan harian masuk SAP</a:t>
+            </a:r>
+            <a:endParaRPr lang="en-US" sz="1600" dirty="0"/>
           </a:p>
         </p:txBody>
       </p:sp>
@@ -6364,7 +6455,7 @@
                   <a:schemeClr val="tx2"/>
                 </a:solidFill>
               </a:rPr>
-              <a:t>Kesiapan dan rencana peluncuran</a:t>
+              <a:t>Keunggulan PID POS</a:t>
             </a:r>
             <a:endParaRPr lang="en-US" sz="3400" dirty="0"/>
           </a:p>
@@ -6372,102 +6463,18 @@
       </p:sp>
       <p:sp>
         <p:nvSpPr>
-          <p:cNvPr id="3" name="Garis waktu"/>
+          <p:cNvPr id="3" name="Nilai Transparan"/>
           <p:cNvSpPr/>
           <p:nvPr/>
         </p:nvSpPr>
         <p:spPr>
           <a:xfrm>
-            <a:off x="1097280" y="2514600"/>
-            <a:ext cx="9921240" cy="0"/>
-          </a:xfrm>
-          <a:prstGeom prst="line">
-            <a:avLst/>
-          </a:prstGeom>
-          <a:noFill/>
-          <a:ln w="38100">
-            <a:solidFill>
-              <a:srgbClr val="D5DEEC"/>
-            </a:solidFill>
-            <a:prstDash val="solid"/>
-          </a:ln>
-        </p:spPr>
-      </p:sp>
-      <p:sp>
-        <p:nvSpPr>
-          <p:cNvPr id="4" name="Titik Uji coba alur"/>
-          <p:cNvSpPr/>
-          <p:nvPr/>
-        </p:nvSpPr>
-        <p:spPr>
-          <a:xfrm>
-            <a:off x="914400" y="2240280"/>
-            <a:ext cx="548640" cy="548640"/>
-          </a:xfrm>
-          <a:prstGeom prst="ellipse">
-            <a:avLst/>
-          </a:prstGeom>
-          <a:solidFill>
-            <a:srgbClr val="0B1A3A"/>
-          </a:solidFill>
-          <a:ln w="38100">
-            <a:solidFill>
-              <a:srgbClr val="FFFFFF"/>
-            </a:solidFill>
-            <a:prstDash val="solid"/>
-          </a:ln>
-        </p:spPr>
-      </p:sp>
-      <p:sp>
-        <p:nvSpPr>
-          <p:cNvPr id="5" name="Text 3"/>
-          <p:cNvSpPr txBox="1"/>
-          <p:nvPr/>
-        </p:nvSpPr>
-        <p:spPr>
-          <a:xfrm>
-            <a:off x="914400" y="2240280"/>
-            <a:ext cx="548640" cy="548640"/>
-          </a:xfrm>
-          <a:prstGeom prst="rect">
-            <a:avLst/>
-          </a:prstGeom>
-          <a:noFill/>
-          <a:ln/>
-        </p:spPr>
-        <p:txBody>
-          <a:bodyPr wrap="square" lIns="0" tIns="0" rIns="0" bIns="0" rtlCol="0" anchor="ctr"/>
-          <a:lstStyle/>
-          <a:p>
-            <a:pPr algn="ctr" indent="0" marL="0">
-              <a:buNone/>
-            </a:pPr>
-            <a:r>
-              <a:rPr lang="en-US" sz="1600" b="1" dirty="0">
-                <a:solidFill>
-                  <a:srgbClr val="FFFFFF"/>
-                </a:solidFill>
-              </a:rPr>
-              <a:t>1</a:t>
-            </a:r>
-            <a:endParaRPr lang="en-US" sz="1600" dirty="0"/>
-          </a:p>
-        </p:txBody>
-      </p:sp>
-      <p:sp>
-        <p:nvSpPr>
-          <p:cNvPr id="6" name="Tahap Uji coba alur"/>
-          <p:cNvSpPr/>
-          <p:nvPr/>
-        </p:nvSpPr>
-        <p:spPr>
-          <a:xfrm>
-            <a:off x="640080" y="3063240"/>
-            <a:ext cx="2468880" cy="2057400"/>
+            <a:off x="640080" y="1600200"/>
+            <a:ext cx="3429000" cy="3566160"/>
           </a:xfrm>
           <a:prstGeom prst="roundRect">
             <a:avLst>
-              <a:gd name="adj" fmla="val 6222"/>
+              <a:gd name="adj" fmla="val 3733"/>
             </a:avLst>
           </a:prstGeom>
           <a:solidFill>
@@ -6490,95 +6497,63 @@
       </p:sp>
       <p:sp>
         <p:nvSpPr>
-          <p:cNvPr id="7" name="Text 5"/>
-          <p:cNvSpPr txBox="1"/>
-          <p:nvPr/>
-        </p:nvSpPr>
-        <p:spPr>
-          <a:xfrm>
-            <a:off x="868680" y="3246120"/>
-            <a:ext cx="2057400" cy="2057400"/>
-          </a:xfrm>
-          <a:prstGeom prst="rect">
-            <a:avLst/>
-          </a:prstGeom>
-          <a:noFill/>
-          <a:ln/>
-        </p:spPr>
-        <p:txBody>
-          <a:bodyPr wrap="square" lIns="0" tIns="0" rIns="0" bIns="0" rtlCol="0" anchor="t"/>
-          <a:lstStyle/>
-          <a:p>
-            <a:pPr indent="0" marL="0">
-              <a:spcAft>
-                <a:spcPts val="600"/>
-              </a:spcAft>
-              <a:buNone/>
-            </a:pPr>
-            <a:r>
-              <a:rPr lang="en-US" sz="1800" b="1" dirty="0">
-                <a:solidFill>
-                  <a:srgbClr val="0B1A3A"/>
-                </a:solidFill>
-              </a:rPr>
-              <a:t>Uji coba alur</a:t>
-            </a:r>
-            <a:endParaRPr lang="en-US" sz="1800" dirty="0"/>
-          </a:p>
-          <a:p>
-            <a:pPr indent="0" marL="0">
-              <a:spcAft>
-                <a:spcPts val="600"/>
-              </a:spcAft>
-              <a:buNone/>
-            </a:pPr>
-            <a:r>
-              <a:rPr lang="en-US" sz="1400" dirty="0">
-                <a:solidFill>
-                  <a:srgbClr val="1B2437"/>
-                </a:solidFill>
-              </a:rPr>
-              <a:t>Alur end-to-end diuji dengan data uji di lingkungan pengujian (SAP DB_TEST).</a:t>
-            </a:r>
-            <a:endParaRPr lang="en-US" sz="1800" dirty="0"/>
-          </a:p>
-        </p:txBody>
-      </p:sp>
-      <p:sp>
-        <p:nvSpPr>
-          <p:cNvPr id="8" name="Titik Materi pendukung"/>
+          <p:cNvPr id="4" name="Ikon Transparan latar"/>
           <p:cNvSpPr/>
           <p:nvPr/>
         </p:nvSpPr>
         <p:spPr>
           <a:xfrm>
-            <a:off x="3630168" y="2240280"/>
-            <a:ext cx="548640" cy="548640"/>
+            <a:off x="960120" y="1920240"/>
+            <a:ext cx="914400" cy="914400"/>
           </a:xfrm>
           <a:prstGeom prst="ellipse">
             <a:avLst/>
           </a:prstGeom>
           <a:solidFill>
-            <a:srgbClr val="0B1A3A"/>
+            <a:srgbClr val="1F3B7A"/>
           </a:solidFill>
-          <a:ln w="38100">
+          <a:ln w="12700">
             <a:solidFill>
-              <a:srgbClr val="FFFFFF"/>
+              <a:srgbClr val="1F3B7A"/>
             </a:solidFill>
             <a:prstDash val="solid"/>
           </a:ln>
         </p:spPr>
       </p:sp>
-      <p:sp>
-        <p:nvSpPr>
-          <p:cNvPr id="9" name="Text 7"/>
+      <p:pic>
+        <p:nvPicPr>
+          <p:cNvPr id="5" name="Ikon Transparan" descr="Ikon Transparan">    </p:cNvPr>
+          <p:cNvPicPr>
+            <a:picLocks noChangeAspect="1"/>
+          </p:cNvPicPr>
+          <p:nvPr/>
+        </p:nvPicPr>
+        <p:blipFill>
+          <a:blip r:embed="rId1"/>
+          <a:stretch>
+            <a:fillRect/>
+          </a:stretch>
+        </p:blipFill>
+        <p:spPr>
+          <a:xfrm>
+            <a:off x="1179576" y="2139696"/>
+            <a:ext cx="475488" cy="475488"/>
+          </a:xfrm>
+          <a:prstGeom prst="rect">
+            <a:avLst/>
+          </a:prstGeom>
+        </p:spPr>
+      </p:pic>
+      <p:sp>
+        <p:nvSpPr>
+          <p:cNvPr id="6" name="Text 3"/>
           <p:cNvSpPr txBox="1"/>
           <p:nvPr/>
         </p:nvSpPr>
         <p:spPr>
           <a:xfrm>
-            <a:off x="3630168" y="2240280"/>
-            <a:ext cx="548640" cy="548640"/>
+            <a:off x="960120" y="3063240"/>
+            <a:ext cx="2834640" cy="548640"/>
           </a:xfrm>
           <a:prstGeom prst="rect">
             <a:avLst/>
@@ -6590,35 +6565,71 @@
           <a:bodyPr wrap="square" lIns="0" tIns="0" rIns="0" bIns="0" rtlCol="0" anchor="ctr"/>
           <a:lstStyle/>
           <a:p>
-            <a:pPr algn="ctr" indent="0" marL="0">
-              <a:buNone/>
-            </a:pPr>
-            <a:r>
-              <a:rPr lang="en-US" sz="1600" b="1" dirty="0">
-                <a:solidFill>
-                  <a:srgbClr val="FFFFFF"/>
-                </a:solidFill>
-              </a:rPr>
-              <a:t>2</a:t>
-            </a:r>
-            <a:endParaRPr lang="en-US" sz="1600" dirty="0"/>
-          </a:p>
-        </p:txBody>
-      </p:sp>
-      <p:sp>
-        <p:nvSpPr>
-          <p:cNvPr id="10" name="Tahap Materi pendukung"/>
+            <a:pPr indent="0" marL="0">
+              <a:buNone/>
+            </a:pPr>
+            <a:r>
+              <a:rPr lang="en-US" sz="2600" b="1" dirty="0">
+                <a:solidFill>
+                  <a:srgbClr val="0B1A3A"/>
+                </a:solidFill>
+              </a:rPr>
+              <a:t>Transparan</a:t>
+            </a:r>
+            <a:endParaRPr lang="en-US" sz="2600" dirty="0"/>
+          </a:p>
+        </p:txBody>
+      </p:sp>
+      <p:sp>
+        <p:nvSpPr>
+          <p:cNvPr id="7" name="Text 4"/>
+          <p:cNvSpPr txBox="1"/>
+          <p:nvPr/>
+        </p:nvSpPr>
+        <p:spPr>
+          <a:xfrm>
+            <a:off x="960120" y="3657600"/>
+            <a:ext cx="2834640" cy="1828800"/>
+          </a:xfrm>
+          <a:prstGeom prst="rect">
+            <a:avLst/>
+          </a:prstGeom>
+          <a:noFill/>
+          <a:ln/>
+        </p:spPr>
+        <p:txBody>
+          <a:bodyPr wrap="square" lIns="0" tIns="0" rIns="0" bIns="0" rtlCol="0" anchor="t"/>
+          <a:lstStyle/>
+          <a:p>
+            <a:pPr indent="0" marL="0">
+              <a:buNone/>
+            </a:pPr>
+            <a:r>
+              <a:rPr lang="en-US" sz="1500" dirty="0">
+                <a:solidFill>
+                  <a:srgbClr val="1B2437"/>
+                </a:solidFill>
+              </a:rPr>
+              <a:t>Stok setiap dek dan status setiap permintaan terpantau real-time, lengkap dengan riwayatnya.</a:t>
+            </a:r>
+            <a:endParaRPr lang="en-US" sz="1500" dirty="0"/>
+          </a:p>
+        </p:txBody>
+      </p:sp>
+      <p:sp>
+        <p:nvSpPr>
+          <p:cNvPr id="8" name="Nilai Terkendali"/>
           <p:cNvSpPr/>
           <p:nvPr/>
         </p:nvSpPr>
         <p:spPr>
           <a:xfrm>
-            <a:off x="3355848" y="3063240"/>
-            <a:ext cx="2468880" cy="2057400"/>
+            <a:off x="4343400" y="1600200"/>
+            <a:ext cx="3429000" cy="3566160"/>
           </a:xfrm>
           <a:prstGeom prst="roundRect">
             <a:avLst>
-              <a:gd name="adj" fmla="val 6222"/>
+              <a:gd name="adj" fmla="val 3733"/>
             </a:avLst>
           </a:prstGeom>
           <a:solidFill>
@@ -6641,95 +6652,63 @@
       </p:sp>
       <p:sp>
         <p:nvSpPr>
-          <p:cNvPr id="11" name="Text 9"/>
-          <p:cNvSpPr txBox="1"/>
-          <p:nvPr/>
-        </p:nvSpPr>
-        <p:spPr>
-          <a:xfrm>
-            <a:off x="3584448" y="3246120"/>
-            <a:ext cx="2057400" cy="2057400"/>
-          </a:xfrm>
-          <a:prstGeom prst="rect">
-            <a:avLst/>
-          </a:prstGeom>
-          <a:noFill/>
-          <a:ln/>
-        </p:spPr>
-        <p:txBody>
-          <a:bodyPr wrap="square" lIns="0" tIns="0" rIns="0" bIns="0" rtlCol="0" anchor="t"/>
-          <a:lstStyle/>
-          <a:p>
-            <a:pPr indent="0" marL="0">
-              <a:spcAft>
-                <a:spcPts val="600"/>
-              </a:spcAft>
-              <a:buNone/>
-            </a:pPr>
-            <a:r>
-              <a:rPr lang="en-US" sz="1800" b="1" dirty="0">
-                <a:solidFill>
-                  <a:srgbClr val="0B1A3A"/>
-                </a:solidFill>
-              </a:rPr>
-              <a:t>Materi pendukung</a:t>
-            </a:r>
-            <a:endParaRPr lang="en-US" sz="1800" dirty="0"/>
-          </a:p>
-          <a:p>
-            <a:pPr indent="0" marL="0">
-              <a:spcAft>
-                <a:spcPts val="600"/>
-              </a:spcAft>
-              <a:buNone/>
-            </a:pPr>
-            <a:r>
-              <a:rPr lang="en-US" sz="1400" dirty="0">
-                <a:solidFill>
-                  <a:srgbClr val="1B2437"/>
-                </a:solidFill>
-              </a:rPr>
-              <a:t>Manual book per peran, video tutorial, dan video perkenalan.</a:t>
-            </a:r>
-            <a:endParaRPr lang="en-US" sz="1800" dirty="0"/>
-          </a:p>
-        </p:txBody>
-      </p:sp>
-      <p:sp>
-        <p:nvSpPr>
-          <p:cNvPr id="12" name="Titik Peluncuran"/>
+          <p:cNvPr id="9" name="Ikon Terkendali latar"/>
           <p:cNvSpPr/>
           <p:nvPr/>
         </p:nvSpPr>
         <p:spPr>
           <a:xfrm>
-            <a:off x="6345936" y="2240280"/>
-            <a:ext cx="548640" cy="548640"/>
+            <a:off x="4663440" y="1920240"/>
+            <a:ext cx="914400" cy="914400"/>
           </a:xfrm>
           <a:prstGeom prst="ellipse">
             <a:avLst/>
           </a:prstGeom>
           <a:solidFill>
-            <a:srgbClr val="FF6B1A"/>
+            <a:srgbClr val="3D6FC2"/>
           </a:solidFill>
-          <a:ln w="38100">
+          <a:ln w="12700">
             <a:solidFill>
-              <a:srgbClr val="FFFFFF"/>
+              <a:srgbClr val="3D6FC2"/>
             </a:solidFill>
             <a:prstDash val="solid"/>
           </a:ln>
         </p:spPr>
       </p:sp>
-      <p:sp>
-        <p:nvSpPr>
-          <p:cNvPr id="13" name="Text 11"/>
+      <p:pic>
+        <p:nvPicPr>
+          <p:cNvPr id="10" name="Ikon Terkendali" descr="Ikon Terkendali">    </p:cNvPr>
+          <p:cNvPicPr>
+            <a:picLocks noChangeAspect="1"/>
+          </p:cNvPicPr>
+          <p:nvPr/>
+        </p:nvPicPr>
+        <p:blipFill>
+          <a:blip r:embed="rId2"/>
+          <a:stretch>
+            <a:fillRect/>
+          </a:stretch>
+        </p:blipFill>
+        <p:spPr>
+          <a:xfrm>
+            <a:off x="4882896" y="2139696"/>
+            <a:ext cx="475488" cy="475488"/>
+          </a:xfrm>
+          <a:prstGeom prst="rect">
+            <a:avLst/>
+          </a:prstGeom>
+        </p:spPr>
+      </p:pic>
+      <p:sp>
+        <p:nvSpPr>
+          <p:cNvPr id="11" name="Text 7"/>
           <p:cNvSpPr txBox="1"/>
           <p:nvPr/>
         </p:nvSpPr>
         <p:spPr>
           <a:xfrm>
-            <a:off x="6345936" y="2240280"/>
-            <a:ext cx="548640" cy="548640"/>
+            <a:off x="4663440" y="3063240"/>
+            <a:ext cx="2834640" cy="548640"/>
           </a:xfrm>
           <a:prstGeom prst="rect">
             <a:avLst/>
@@ -6741,186 +6720,71 @@
           <a:bodyPr wrap="square" lIns="0" tIns="0" rIns="0" bIns="0" rtlCol="0" anchor="ctr"/>
           <a:lstStyle/>
           <a:p>
-            <a:pPr algn="ctr" indent="0" marL="0">
-              <a:buNone/>
-            </a:pPr>
-            <a:r>
-              <a:rPr lang="en-US" sz="1600" b="1" dirty="0">
-                <a:solidFill>
-                  <a:srgbClr val="FFFFFF"/>
-                </a:solidFill>
-              </a:rPr>
-              <a:t>3</a:t>
-            </a:r>
-            <a:endParaRPr lang="en-US" sz="1600" dirty="0"/>
-          </a:p>
-        </p:txBody>
-      </p:sp>
-      <p:sp>
-        <p:nvSpPr>
-          <p:cNvPr id="14" name="Tahap Peluncuran"/>
+            <a:pPr indent="0" marL="0">
+              <a:buNone/>
+            </a:pPr>
+            <a:r>
+              <a:rPr lang="en-US" sz="2600" b="1" dirty="0">
+                <a:solidFill>
+                  <a:srgbClr val="0B1A3A"/>
+                </a:solidFill>
+              </a:rPr>
+              <a:t>Terkendali</a:t>
+            </a:r>
+            <a:endParaRPr lang="en-US" sz="2600" dirty="0"/>
+          </a:p>
+        </p:txBody>
+      </p:sp>
+      <p:sp>
+        <p:nvSpPr>
+          <p:cNvPr id="12" name="Text 8"/>
+          <p:cNvSpPr txBox="1"/>
+          <p:nvPr/>
+        </p:nvSpPr>
+        <p:spPr>
+          <a:xfrm>
+            <a:off x="4663440" y="3657600"/>
+            <a:ext cx="2834640" cy="1828800"/>
+          </a:xfrm>
+          <a:prstGeom prst="rect">
+            <a:avLst/>
+          </a:prstGeom>
+          <a:noFill/>
+          <a:ln/>
+        </p:spPr>
+        <p:txBody>
+          <a:bodyPr wrap="square" lIns="0" tIns="0" rIns="0" bIns="0" rtlCol="0" anchor="t"/>
+          <a:lstStyle/>
+          <a:p>
+            <a:pPr indent="0" marL="0">
+              <a:buNone/>
+            </a:pPr>
+            <a:r>
+              <a:rPr lang="en-US" sz="1500" dirty="0">
+                <a:solidFill>
+                  <a:srgbClr val="1B2437"/>
+                </a:solidFill>
+              </a:rPr>
+              <a:t>Persetujuan berjenjang di setiap tahap; retur dan kas keluar besar memerlukan PIN kepala toko.</a:t>
+            </a:r>
+            <a:endParaRPr lang="en-US" sz="1500" dirty="0"/>
+          </a:p>
+        </p:txBody>
+      </p:sp>
+      <p:sp>
+        <p:nvSpPr>
+          <p:cNvPr id="13" name="Nilai Terintegrasi"/>
           <p:cNvSpPr/>
           <p:nvPr/>
         </p:nvSpPr>
         <p:spPr>
           <a:xfrm>
-            <a:off x="6071616" y="3063240"/>
-            <a:ext cx="2468880" cy="2057400"/>
+            <a:off x="8046720" y="1600200"/>
+            <a:ext cx="3429000" cy="3566160"/>
           </a:xfrm>
           <a:prstGeom prst="roundRect">
             <a:avLst>
-              <a:gd name="adj" fmla="val 6222"/>
-            </a:avLst>
-          </a:prstGeom>
-          <a:solidFill>
-            <a:srgbClr val="0B1A3A"/>
-          </a:solidFill>
-          <a:ln w="12700">
-            <a:solidFill>
-              <a:srgbClr val="0B1A3A"/>
-            </a:solidFill>
-            <a:prstDash val="solid"/>
-          </a:ln>
-          <a:effectLst>
-            <a:outerShdw sx="100000" sy="100000" kx="0" ky="0" algn="bl" rotWithShape="0" blurRad="127000" dist="38100" dir="5400000">
-              <a:srgbClr val="0B1A3A">
-                <a:alpha val="14000"/>
-              </a:srgbClr>
-            </a:outerShdw>
-          </a:effectLst>
-        </p:spPr>
-      </p:sp>
-      <p:sp>
-        <p:nvSpPr>
-          <p:cNvPr id="15" name="Text 13"/>
-          <p:cNvSpPr txBox="1"/>
-          <p:nvPr/>
-        </p:nvSpPr>
-        <p:spPr>
-          <a:xfrm>
-            <a:off x="6300216" y="3246120"/>
-            <a:ext cx="2057400" cy="2057400"/>
-          </a:xfrm>
-          <a:prstGeom prst="rect">
-            <a:avLst/>
-          </a:prstGeom>
-          <a:noFill/>
-          <a:ln/>
-        </p:spPr>
-        <p:txBody>
-          <a:bodyPr wrap="square" lIns="0" tIns="0" rIns="0" bIns="0" rtlCol="0" anchor="t"/>
-          <a:lstStyle/>
-          <a:p>
-            <a:pPr indent="0" marL="0">
-              <a:spcAft>
-                <a:spcPts val="600"/>
-              </a:spcAft>
-              <a:buNone/>
-            </a:pPr>
-            <a:r>
-              <a:rPr lang="en-US" sz="1800" b="1" dirty="0">
-                <a:solidFill>
-                  <a:srgbClr val="FFFFFF"/>
-                </a:solidFill>
-              </a:rPr>
-              <a:t>Peluncuran</a:t>
-            </a:r>
-            <a:endParaRPr lang="en-US" sz="1800" dirty="0"/>
-          </a:p>
-          <a:p>
-            <a:pPr indent="0" marL="0">
-              <a:spcAft>
-                <a:spcPts val="600"/>
-              </a:spcAft>
-              <a:buNone/>
-            </a:pPr>
-            <a:r>
-              <a:rPr lang="en-US" sz="1400" dirty="0">
-                <a:solidFill>
-                  <a:srgbClr val="CADCFC"/>
-                </a:solidFill>
-              </a:rPr>
-              <a:t>Mulai digunakan Selasa, 27 Oktober 2026.</a:t>
-            </a:r>
-            <a:endParaRPr lang="en-US" sz="1800" dirty="0"/>
-          </a:p>
-        </p:txBody>
-      </p:sp>
-      <p:sp>
-        <p:nvSpPr>
-          <p:cNvPr id="16" name="Titik Pendampingan"/>
-          <p:cNvSpPr/>
-          <p:nvPr/>
-        </p:nvSpPr>
-        <p:spPr>
-          <a:xfrm>
-            <a:off x="9061704" y="2240280"/>
-            <a:ext cx="548640" cy="548640"/>
-          </a:xfrm>
-          <a:prstGeom prst="ellipse">
-            <a:avLst/>
-          </a:prstGeom>
-          <a:solidFill>
-            <a:srgbClr val="0B1A3A"/>
-          </a:solidFill>
-          <a:ln w="38100">
-            <a:solidFill>
-              <a:srgbClr val="FFFFFF"/>
-            </a:solidFill>
-            <a:prstDash val="solid"/>
-          </a:ln>
-        </p:spPr>
-      </p:sp>
-      <p:sp>
-        <p:nvSpPr>
-          <p:cNvPr id="17" name="Text 15"/>
-          <p:cNvSpPr txBox="1"/>
-          <p:nvPr/>
-        </p:nvSpPr>
-        <p:spPr>
-          <a:xfrm>
-            <a:off x="9061704" y="2240280"/>
-            <a:ext cx="548640" cy="548640"/>
-          </a:xfrm>
-          <a:prstGeom prst="rect">
-            <a:avLst/>
-          </a:prstGeom>
-          <a:noFill/>
-          <a:ln/>
-        </p:spPr>
-        <p:txBody>
-          <a:bodyPr wrap="square" lIns="0" tIns="0" rIns="0" bIns="0" rtlCol="0" anchor="ctr"/>
-          <a:lstStyle/>
-          <a:p>
-            <a:pPr algn="ctr" indent="0" marL="0">
-              <a:buNone/>
-            </a:pPr>
-            <a:r>
-              <a:rPr lang="en-US" sz="1600" b="1" dirty="0">
-                <a:solidFill>
-                  <a:srgbClr val="FFFFFF"/>
-                </a:solidFill>
-              </a:rPr>
-              <a:t>4</a:t>
-            </a:r>
-            <a:endParaRPr lang="en-US" sz="1600" dirty="0"/>
-          </a:p>
-        </p:txBody>
-      </p:sp>
-      <p:sp>
-        <p:nvSpPr>
-          <p:cNvPr id="18" name="Tahap Pendampingan"/>
-          <p:cNvSpPr/>
-          <p:nvPr/>
-        </p:nvSpPr>
-        <p:spPr>
-          <a:xfrm>
-            <a:off x="8787384" y="3063240"/>
-            <a:ext cx="2468880" cy="2057400"/>
-          </a:xfrm>
-          <a:prstGeom prst="roundRect">
-            <a:avLst>
-              <a:gd name="adj" fmla="val 6222"/>
+              <a:gd name="adj" fmla="val 3733"/>
             </a:avLst>
           </a:prstGeom>
           <a:solidFill>
@@ -6943,14 +6807,63 @@
       </p:sp>
       <p:sp>
         <p:nvSpPr>
-          <p:cNvPr id="19" name="Text 17"/>
+          <p:cNvPr id="14" name="Ikon Terintegrasi latar"/>
+          <p:cNvSpPr/>
+          <p:nvPr/>
+        </p:nvSpPr>
+        <p:spPr>
+          <a:xfrm>
+            <a:off x="8366760" y="1920240"/>
+            <a:ext cx="914400" cy="914400"/>
+          </a:xfrm>
+          <a:prstGeom prst="ellipse">
+            <a:avLst/>
+          </a:prstGeom>
+          <a:solidFill>
+            <a:srgbClr val="FF6B1A"/>
+          </a:solidFill>
+          <a:ln w="12700">
+            <a:solidFill>
+              <a:srgbClr val="FF6B1A"/>
+            </a:solidFill>
+            <a:prstDash val="solid"/>
+          </a:ln>
+        </p:spPr>
+      </p:sp>
+      <p:pic>
+        <p:nvPicPr>
+          <p:cNvPr id="15" name="Ikon Terintegrasi" descr="Ikon Terintegrasi">    </p:cNvPr>
+          <p:cNvPicPr>
+            <a:picLocks noChangeAspect="1"/>
+          </p:cNvPicPr>
+          <p:nvPr/>
+        </p:nvPicPr>
+        <p:blipFill>
+          <a:blip r:embed="rId3"/>
+          <a:stretch>
+            <a:fillRect/>
+          </a:stretch>
+        </p:blipFill>
+        <p:spPr>
+          <a:xfrm>
+            <a:off x="8586216" y="2139696"/>
+            <a:ext cx="475488" cy="475488"/>
+          </a:xfrm>
+          <a:prstGeom prst="rect">
+            <a:avLst/>
+          </a:prstGeom>
+        </p:spPr>
+      </p:pic>
+      <p:sp>
+        <p:nvSpPr>
+          <p:cNvPr id="16" name="Text 11"/>
           <p:cNvSpPr txBox="1"/>
           <p:nvPr/>
         </p:nvSpPr>
         <p:spPr>
           <a:xfrm>
-            <a:off x="9015984" y="3246120"/>
-            <a:ext cx="2057400" cy="2057400"/>
+            <a:off x="8366760" y="3063240"/>
+            <a:ext cx="2834640" cy="548640"/>
           </a:xfrm>
           <a:prstGeom prst="rect">
             <a:avLst/>
@@ -6959,54 +6872,34 @@
           <a:ln/>
         </p:spPr>
         <p:txBody>
-          <a:bodyPr wrap="square" lIns="0" tIns="0" rIns="0" bIns="0" rtlCol="0" anchor="t"/>
+          <a:bodyPr wrap="square" lIns="0" tIns="0" rIns="0" bIns="0" rtlCol="0" anchor="ctr"/>
           <a:lstStyle/>
           <a:p>
             <a:pPr indent="0" marL="0">
-              <a:spcAft>
-                <a:spcPts val="600"/>
-              </a:spcAft>
-              <a:buNone/>
-            </a:pPr>
-            <a:r>
-              <a:rPr lang="en-US" sz="1800" b="1" dirty="0">
+              <a:buNone/>
+            </a:pPr>
+            <a:r>
+              <a:rPr lang="en-US" sz="2600" b="1" dirty="0">
                 <a:solidFill>
                   <a:srgbClr val="0B1A3A"/>
                 </a:solidFill>
               </a:rPr>
-              <a:t>Pendampingan</a:t>
-            </a:r>
-            <a:endParaRPr lang="en-US" sz="1800" dirty="0"/>
-          </a:p>
-          <a:p>
-            <a:pPr indent="0" marL="0">
-              <a:spcAft>
-                <a:spcPts val="600"/>
-              </a:spcAft>
-              <a:buNone/>
-            </a:pPr>
-            <a:r>
-              <a:rPr lang="en-US" sz="1400" dirty="0">
-                <a:solidFill>
-                  <a:srgbClr val="1B2437"/>
-                </a:solidFill>
-              </a:rPr>
-              <a:t>Tim TI PIDC sebagai kontak teknis selama masa awal penggunaan.</a:t>
-            </a:r>
-            <a:endParaRPr lang="en-US" sz="1800" dirty="0"/>
-          </a:p>
-        </p:txBody>
-      </p:sp>
-      <p:sp>
-        <p:nvSpPr>
-          <p:cNvPr id="20" name="Text 18"/>
+              <a:t>Terintegrasi</a:t>
+            </a:r>
+            <a:endParaRPr lang="en-US" sz="2600" dirty="0"/>
+          </a:p>
+        </p:txBody>
+      </p:sp>
+      <p:sp>
+        <p:nvSpPr>
+          <p:cNvPr id="17" name="Text 12"/>
           <p:cNvSpPr txBox="1"/>
           <p:nvPr/>
         </p:nvSpPr>
         <p:spPr>
           <a:xfrm>
-            <a:off x="640080" y="5440680"/>
-            <a:ext cx="10835640" cy="365760"/>
+            <a:off x="8366760" y="3657600"/>
+            <a:ext cx="2834640" cy="1828800"/>
           </a:xfrm>
           <a:prstGeom prst="rect">
             <a:avLst/>
@@ -7015,21 +6908,21 @@
           <a:ln/>
         </p:spPr>
         <p:txBody>
-          <a:bodyPr wrap="square" lIns="0" tIns="0" rIns="0" bIns="0" rtlCol="0" anchor="ctr"/>
+          <a:bodyPr wrap="square" lIns="0" tIns="0" rIns="0" bIns="0" rtlCol="0" anchor="t"/>
           <a:lstStyle/>
           <a:p>
             <a:pPr indent="0" marL="0">
               <a:buNone/>
             </a:pPr>
             <a:r>
-              <a:rPr lang="en-US" sz="1200" i="1" dirty="0">
-                <a:solidFill>
-                  <a:srgbClr val="5B6B86"/>
-                </a:solidFill>
-              </a:rPr>
-              <a:t>Usulan rencana; tanggal selain peluncuran disesuaikan dengan keputusan Direksi.</a:t>
-            </a:r>
-            <a:endParaRPr lang="en-US" sz="1200" dirty="0"/>
+              <a:rPr lang="en-US" sz="1500" dirty="0">
+                <a:solidFill>
+                  <a:srgbClr val="1B2437"/>
+                </a:solidFill>
+              </a:rPr>
+              <a:t>Dokumen SAP Business One dibuat otomatis, dan penjualan harian setiap dek masuk SAP sebagai DO.</a:t>
+            </a:r>
+            <a:endParaRPr lang="en-US" sz="1500" dirty="0"/>
           </a:p>
         </p:txBody>
       </p:sp>
@@ -7210,287 +7103,7 @@
       </p:pic>
       <p:sp>
         <p:nvSpPr>
-          <p:cNvPr id="6" name="Text 2"/>
-          <p:cNvSpPr txBox="1"/>
-          <p:nvPr/>
-        </p:nvSpPr>
-        <p:spPr>
-          <a:xfrm>
-            <a:off x="640080" y="1874520"/>
-            <a:ext cx="10881360" cy="731520"/>
-          </a:xfrm>
-          <a:prstGeom prst="rect">
-            <a:avLst/>
-          </a:prstGeom>
-          <a:noFill/>
-          <a:ln/>
-        </p:spPr>
-        <p:txBody>
-          <a:bodyPr wrap="square" lIns="0" tIns="0" rIns="0" bIns="0" rtlCol="0" anchor="ctr"/>
-          <a:lstStyle/>
-          <a:p>
-            <a:pPr indent="0" marL="0">
-              <a:buNone/>
-            </a:pPr>
-            <a:r>
-              <a:rPr lang="en-US" sz="3600" b="1" dirty="0">
-                <a:solidFill>
-                  <a:srgbClr val="FFFFFF"/>
-                </a:solidFill>
-              </a:rPr>
-              <a:t>Dukungan yang dimohonkan</a:t>
-            </a:r>
-            <a:endParaRPr lang="en-US" sz="3600" dirty="0"/>
-          </a:p>
-        </p:txBody>
-      </p:sp>
-      <p:sp>
-        <p:nvSpPr>
-          <p:cNvPr id="7" name="Nomor 1"/>
-          <p:cNvSpPr/>
-          <p:nvPr/>
-        </p:nvSpPr>
-        <p:spPr>
-          <a:xfrm>
-            <a:off x="640080" y="2880360"/>
-            <a:ext cx="640080" cy="640080"/>
-          </a:xfrm>
-          <a:prstGeom prst="ellipse">
-            <a:avLst/>
-          </a:prstGeom>
-          <a:solidFill>
-            <a:srgbClr val="FF6B1A"/>
-          </a:solidFill>
-          <a:ln w="12700">
-            <a:solidFill>
-              <a:srgbClr val="FF6B1A"/>
-            </a:solidFill>
-            <a:prstDash val="solid"/>
-          </a:ln>
-        </p:spPr>
-      </p:sp>
-      <p:sp>
-        <p:nvSpPr>
-          <p:cNvPr id="8" name="Text 4"/>
-          <p:cNvSpPr txBox="1"/>
-          <p:nvPr/>
-        </p:nvSpPr>
-        <p:spPr>
-          <a:xfrm>
-            <a:off x="640080" y="2880360"/>
-            <a:ext cx="640080" cy="640080"/>
-          </a:xfrm>
-          <a:prstGeom prst="rect">
-            <a:avLst/>
-          </a:prstGeom>
-          <a:noFill/>
-          <a:ln/>
-        </p:spPr>
-        <p:txBody>
-          <a:bodyPr wrap="square" lIns="0" tIns="0" rIns="0" bIns="0" rtlCol="0" anchor="ctr"/>
-          <a:lstStyle/>
-          <a:p>
-            <a:pPr algn="ctr" indent="0" marL="0">
-              <a:buNone/>
-            </a:pPr>
-            <a:r>
-              <a:rPr lang="en-US" sz="2000" b="1" dirty="0">
-                <a:solidFill>
-                  <a:srgbClr val="FFFFFF"/>
-                </a:solidFill>
-              </a:rPr>
-              <a:t>1</a:t>
-            </a:r>
-            <a:endParaRPr lang="en-US" sz="2000" dirty="0"/>
-          </a:p>
-        </p:txBody>
-      </p:sp>
-      <p:sp>
-        <p:nvSpPr>
-          <p:cNvPr id="9" name="Text 5"/>
-          <p:cNvSpPr txBox="1"/>
-          <p:nvPr/>
-        </p:nvSpPr>
-        <p:spPr>
-          <a:xfrm>
-            <a:off x="1508760" y="2788920"/>
-            <a:ext cx="9966960" cy="822960"/>
-          </a:xfrm>
-          <a:prstGeom prst="rect">
-            <a:avLst/>
-          </a:prstGeom>
-          <a:noFill/>
-          <a:ln/>
-        </p:spPr>
-        <p:txBody>
-          <a:bodyPr wrap="square" lIns="0" tIns="0" rIns="0" bIns="0" rtlCol="0" anchor="ctr"/>
-          <a:lstStyle/>
-          <a:p>
-            <a:pPr indent="0" marL="0">
-              <a:buNone/>
-            </a:pPr>
-            <a:r>
-              <a:rPr lang="en-US" sz="2000" dirty="0">
-                <a:solidFill>
-                  <a:srgbClr val="FFFFFF"/>
-                </a:solidFill>
-              </a:rPr>
-              <a:t>Persetujuan penerapan PID POS di toko kapal, DC, dan kantor pusat mulai 27 Oktober 2026.</a:t>
-            </a:r>
-            <a:endParaRPr lang="en-US" sz="2000" dirty="0"/>
-          </a:p>
-        </p:txBody>
-      </p:sp>
-      <p:sp>
-        <p:nvSpPr>
-          <p:cNvPr id="10" name="Nomor 2"/>
-          <p:cNvSpPr/>
-          <p:nvPr/>
-        </p:nvSpPr>
-        <p:spPr>
-          <a:xfrm>
-            <a:off x="640080" y="4023360"/>
-            <a:ext cx="640080" cy="640080"/>
-          </a:xfrm>
-          <a:prstGeom prst="ellipse">
-            <a:avLst/>
-          </a:prstGeom>
-          <a:solidFill>
-            <a:srgbClr val="FF6B1A"/>
-          </a:solidFill>
-          <a:ln w="12700">
-            <a:solidFill>
-              <a:srgbClr val="FF6B1A"/>
-            </a:solidFill>
-            <a:prstDash val="solid"/>
-          </a:ln>
-        </p:spPr>
-      </p:sp>
-      <p:sp>
-        <p:nvSpPr>
-          <p:cNvPr id="11" name="Text 7"/>
-          <p:cNvSpPr txBox="1"/>
-          <p:nvPr/>
-        </p:nvSpPr>
-        <p:spPr>
-          <a:xfrm>
-            <a:off x="640080" y="4023360"/>
-            <a:ext cx="640080" cy="640080"/>
-          </a:xfrm>
-          <a:prstGeom prst="rect">
-            <a:avLst/>
-          </a:prstGeom>
-          <a:noFill/>
-          <a:ln/>
-        </p:spPr>
-        <p:txBody>
-          <a:bodyPr wrap="square" lIns="0" tIns="0" rIns="0" bIns="0" rtlCol="0" anchor="ctr"/>
-          <a:lstStyle/>
-          <a:p>
-            <a:pPr algn="ctr" indent="0" marL="0">
-              <a:buNone/>
-            </a:pPr>
-            <a:r>
-              <a:rPr lang="en-US" sz="2000" b="1" dirty="0">
-                <a:solidFill>
-                  <a:srgbClr val="FFFFFF"/>
-                </a:solidFill>
-              </a:rPr>
-              <a:t>2</a:t>
-            </a:r>
-            <a:endParaRPr lang="en-US" sz="2000" dirty="0"/>
-          </a:p>
-        </p:txBody>
-      </p:sp>
-      <p:sp>
-        <p:nvSpPr>
-          <p:cNvPr id="12" name="Text 8"/>
-          <p:cNvSpPr txBox="1"/>
-          <p:nvPr/>
-        </p:nvSpPr>
-        <p:spPr>
-          <a:xfrm>
-            <a:off x="1508760" y="3931920"/>
-            <a:ext cx="9966960" cy="822960"/>
-          </a:xfrm>
-          <a:prstGeom prst="rect">
-            <a:avLst/>
-          </a:prstGeom>
-          <a:noFill/>
-          <a:ln/>
-        </p:spPr>
-        <p:txBody>
-          <a:bodyPr wrap="square" lIns="0" tIns="0" rIns="0" bIns="0" rtlCol="0" anchor="ctr"/>
-          <a:lstStyle/>
-          <a:p>
-            <a:pPr indent="0" marL="0">
-              <a:buNone/>
-            </a:pPr>
-            <a:r>
-              <a:rPr lang="en-US" sz="2000" dirty="0">
-                <a:solidFill>
-                  <a:srgbClr val="FFFFFF"/>
-                </a:solidFill>
-              </a:rPr>
-              <a:t>Arahan kepada unit terkait untuk menjalankan permintaan barang dan penjualan melalui PID POS.</a:t>
-            </a:r>
-            <a:endParaRPr lang="en-US" sz="2000" dirty="0"/>
-          </a:p>
-        </p:txBody>
-      </p:sp>
-      <p:sp>
-        <p:nvSpPr>
-          <p:cNvPr id="13" name="Text 9"/>
-          <p:cNvSpPr txBox="1"/>
-          <p:nvPr/>
-        </p:nvSpPr>
-        <p:spPr>
-          <a:xfrm>
-            <a:off x="640080" y="5257800"/>
-            <a:ext cx="10881360" cy="1051560"/>
-          </a:xfrm>
-          <a:prstGeom prst="rect">
-            <a:avLst/>
-          </a:prstGeom>
-          <a:noFill/>
-          <a:ln/>
-        </p:spPr>
-        <p:txBody>
-          <a:bodyPr wrap="square" lIns="0" tIns="0" rIns="0" bIns="0" rtlCol="0" anchor="t"/>
-          <a:lstStyle/>
-          <a:p>
-            <a:pPr indent="0" marL="0">
-              <a:buNone/>
-            </a:pPr>
-            <a:r>
-              <a:rPr lang="en-US" sz="3000" b="1" dirty="0">
-                <a:solidFill>
-                  <a:srgbClr val="FFFFFF"/>
-                </a:solidFill>
-              </a:rPr>
-              <a:t>Terima kasih</a:t>
-            </a:r>
-            <a:endParaRPr lang="en-US" sz="3000" dirty="0"/>
-          </a:p>
-          <a:p>
-            <a:pPr indent="0" marL="0">
-              <a:buNone/>
-            </a:pPr>
-            <a:r>
-              <a:rPr lang="en-US" sz="1600" dirty="0">
-                <a:solidFill>
-                  <a:srgbClr val="8FA6D8"/>
-                </a:solidFill>
-              </a:rPr>
-              <a:t>PID POS · Satu alur, dari kapal sampai kasir.</a:t>
-            </a:r>
-            <a:endParaRPr lang="en-US" sz="3000" dirty="0"/>
-          </a:p>
-        </p:txBody>
-      </p:sp>
-      <p:sp>
-        <p:nvSpPr>
-          <p:cNvPr id="15" name="Text 0"/>
+          <p:cNvPr id="6" name="Text 0"/>
           <p:cNvSpPr/>
           <p:nvPr>
             <p:ph idx="100" type="title" hasCustomPrompt="1"/>
@@ -7514,7 +7127,101 @@
             <a:pPr algn="l" indent="0" marL="0">
               <a:buNone/>
             </a:pPr>
+            <a:r>
+              <a:rPr lang="en-US" sz="6600" b="1" dirty="0">
+                <a:solidFill>
+                  <a:schemeClr val="bg1"/>
+                </a:solidFill>
+              </a:rPr>
+              <a:t>PID POS</a:t>
+            </a:r>
             <a:endParaRPr lang="en-US" sz="6600" dirty="0"/>
+          </a:p>
+        </p:txBody>
+      </p:sp>
+      <p:sp>
+        <p:nvSpPr>
+          <p:cNvPr id="7" name="Text 3"/>
+          <p:cNvSpPr txBox="1"/>
+          <p:nvPr/>
+        </p:nvSpPr>
+        <p:spPr>
+          <a:xfrm>
+            <a:off x="640080" y="3611880"/>
+            <a:ext cx="7315200" cy="548640"/>
+          </a:xfrm>
+          <a:prstGeom prst="rect">
+            <a:avLst/>
+          </a:prstGeom>
+          <a:noFill/>
+          <a:ln/>
+        </p:spPr>
+        <p:txBody>
+          <a:bodyPr wrap="square" lIns="0" tIns="0" rIns="0" bIns="0" rtlCol="0" anchor="ctr"/>
+          <a:lstStyle/>
+          <a:p>
+            <a:pPr indent="0" marL="0">
+              <a:buNone/>
+            </a:pPr>
+            <a:r>
+              <a:rPr lang="en-US" sz="2400" dirty="0">
+                <a:solidFill>
+                  <a:srgbClr val="CADCFC"/>
+                </a:solidFill>
+              </a:rPr>
+              <a:t>Satu alur, dari kapal sampai kasir.</a:t>
+            </a:r>
+            <a:endParaRPr lang="en-US" sz="2400" dirty="0"/>
+          </a:p>
+        </p:txBody>
+      </p:sp>
+      <p:sp>
+        <p:nvSpPr>
+          <p:cNvPr id="8" name="Text 4"/>
+          <p:cNvSpPr txBox="1"/>
+          <p:nvPr/>
+        </p:nvSpPr>
+        <p:spPr>
+          <a:xfrm>
+            <a:off x="640080" y="5257800"/>
+            <a:ext cx="10881360" cy="1051560"/>
+          </a:xfrm>
+          <a:prstGeom prst="rect">
+            <a:avLst/>
+          </a:prstGeom>
+          <a:noFill/>
+          <a:ln/>
+        </p:spPr>
+        <p:txBody>
+          <a:bodyPr wrap="square" lIns="0" tIns="0" rIns="0" bIns="0" rtlCol="0" anchor="t"/>
+          <a:lstStyle/>
+          <a:p>
+            <a:pPr indent="0" marL="0">
+              <a:buNone/>
+            </a:pPr>
+            <a:r>
+              <a:rPr lang="en-US" sz="3000" b="1" dirty="0">
+                <a:solidFill>
+                  <a:srgbClr val="FFFFFF"/>
+                </a:solidFill>
+              </a:rPr>
+              <a:t>Terima kasih</a:t>
+            </a:r>
+            <a:endParaRPr lang="en-US" sz="3000" dirty="0"/>
+          </a:p>
+          <a:p>
+            <a:pPr indent="0" marL="0">
+              <a:buNone/>
+            </a:pPr>
+            <a:r>
+              <a:rPr lang="en-US" sz="1600" dirty="0">
+                <a:solidFill>
+                  <a:srgbClr val="8FA6D8"/>
+                </a:solidFill>
+              </a:rPr>
+              <a:t>Aplikasi toko kapal PELNI Services, terhubung SAP Business One.</a:t>
+            </a:r>
+            <a:endParaRPr lang="en-US" sz="3000" dirty="0"/>
           </a:p>
         </p:txBody>
       </p:sp>
